--- a/slides/FVA_MetaGutPred.pptx
+++ b/slides/FVA_MetaGutPred.pptx
@@ -104,6 +104,11 @@
       </a:defRPr>
     </a:lvl9pPr>
   </p:defaultTextStyle>
+  <p:extLst>
+    <p:ext uri="{EFAFB233-063F-42B5-8137-9DF3F51BA10A}">
+      <p15:sldGuideLst xmlns:p15="http://schemas.microsoft.com/office/powerpoint/2012/main"/>
+    </p:ext>
+  </p:extLst>
 </p:presentation>
 </file>
 
@@ -136,22 +141,146 @@
       <inkml:brushProperty name="color" value="#00B050"/>
     </inkml:brush>
   </inkml:definitions>
-  <inkml:trace contextRef="#ctx0" brushRef="#br0">22636 9899 24575,'0'32'0,"0"3"0,0 17 0,0 0 0,0-22 0,0 24 0,0-27 0,0 19 0,0-15 0,0-5 0,0-4 0,0-6 0,0-3 0,0-4 0,0 0 0,0-3 0,0-1 0,0-1 0,0-2 0</inkml:trace>
-  <inkml:trace contextRef="#ctx0" brushRef="#br0" timeOffset="1240">22622 10198 24575,'15'0'0,"6"0"0,10 0 0,11 0 0,1 0 0,8 0 0,-13 0 0,-2 0 0,-2 0 0,-4 0 0,11 0 0,-1 0 0,-16 0 0,13 0 0,0 0 0,-13 0 0,13 0 0,0 0 0,-13 0 0,12 0 0,2 0 0,-1 0 0,17 0 0,-8 0 0,9 0 0,-8 0-444,-7-4 0,2-2 444,12 0 0,-15 0 0,2 1 0,-7 0 0,-1 1 0,0 2 0,0-1 0,0-1 0,1-1 0,3 0 0,-1 0 0,16-4 0,-6 4 0,-2 0 0,-4-4-219,1 4 0,1 0 219,3-3 0,-13 3 0,1 0 0,1 1 0,-1-1 0,30-5 0,-8 2 0,2-2 0,0 2 0,-5-1 0,-21 4 0,1 0 0,24 1 0,-10-3 0,17 2 0,-25 0 0,14-3-35,-10 4 35,5-1 0,-6 1 0,1 0 866,-6 4-866,-1-8 457,-8 8-457,-2-4 38,-8 4-38,0-3 0,-8 3 0,0-3 0,-5 3 0,-2 0 0</inkml:trace>
-  <inkml:trace contextRef="#ctx0" brushRef="#br0" timeOffset="2381">25463 9855 24575,'0'15'0,"0"-5"0,0 9 0,0-8 0,0 9 0,0-7 0,0 7 0,0-2 0,0 7 0,0-3 0,0 3 0,0 0 0,0-3 0,0 0 0,0-2 0,0-3 0,0 4 0,0-3 0,0-2 0,0-3 0,0 0 0,0-4 0,3 3 0,-2-5 0,1 5 0,-2-6 0,0 3 0,0 0 0,0-2 0,0 2 0,3-4 0,-2 1 0,1 3 0,-2-2 0,0 2 0,0-4 0,0 1 0,0 0 0,3 0 0,-3-1 0,3 1 0,-3-3 0,0 0 0</inkml:trace>
-  <inkml:trace contextRef="#ctx0" brushRef="#br0" timeOffset="6556">18804 10518 24575,'24'0'0,"-3"0"0,13 0 0,3 0 0,17 0 0,7 0-612,-25 0 0,1 0 612,25 0 0,-23 0 0,0 0 0,-5 0 0,1 0 0,9 0 0,0 0 0,-2 0 0,-1 0 0,0 0 0,0 0 0,2-3 0,0 1-499,-1 1 1,0 1 498,2-2 0,1-1 0,3-2 0,0 0 0,0 2 0,1-1 0,-3-6 0,0 0-926,9 3 1,0 1 925,-5-1 0,-1-1 0,4 2 0,1 1 0,2-4 0,-1 1 0,-4 5 0,-3-1-642,-8-3 1,0 0 641,15 4 0,-4 0 119,1-6-119,-6 4 0,1 0 0,8-4 0,6 3 0,-29 2 0,1 0 0,21-1 0,6-4 0,-7 0 877,-5-4-877,4 4 0,-10-3 1818,0 7-1818,-6-2 1522,-6 2-1522,-4-2 761,-4 3-761,-6-2 258,-6 5-258,-1-2 0,-3 3 0,-3 0 0,0 0 0</inkml:trace>
-  <inkml:trace contextRef="#ctx0" brushRef="#br0" timeOffset="7948">21248 10019 24575,'14'0'0,"0"0"0,7 0 0,-3 0 0,8 3 0,-9-2 0,3 5 0,-6-3 0,2 7 0,-3-6 0,0 2 0,-3 0 0,-1-5 0,0 8 0,-5-6 0,7 3 0,-7 0 0,8 0 0,-5 0 0,2 0 0,-4 0 0,1 0 0,0-1 0,0-1 0,-1 1 0,1-2 0,0 0 0,0 2 0,0-1 0,-1-1 0,1 2 0,0-4 0,-3 4 0,0-2 0,-3 2 0,0 1 0,0-1 0,2-2 0,-1 2 0,1-1 0,1 1 0,-2 1 0,4 0 0,-5 0 0,6-1 0,-6 1 0,5 0 0,-4 0 0,2-1 0,-3 1 0,0 0 0,0-1 0,0 4 0,0-2 0,0 5 0,0 1 0,-3 1 0,-4 2 0,-3 1 0,-8 1 0,3 3 0,-7 2 0,7-2 0,-7 2 0,7-2 0,-3 1 0,4-5 0,1-1 0,-1 1 0,4-3 0,0 2 0,1-3 0,2 0 0,-3 3 0,1-2 0,2 2 0,-3 0 0,3-2 0,1 3 0,-1-5 0,1 1 0,0-3 0,2-1 0,-1-4 0,4-1 0,-1-2 0</inkml:trace>
-  <inkml:trace contextRef="#ctx0" brushRef="#br1" timeOffset="13015">23096 8750 9977,'0'5'0,"0"0"5093,0 18-5093,0-4 2537,0 6-2537,0 0 1480,0 6-1480,0 1 5488,0-1-5488,0-1 0,0-4 0,0 4 0,0 1 0,3-5 0,-2-1 0,5-7 0,-2 2 0,-1-7 0,3 4 0,-5-4 0,4-4 0,-4 3 0,2-5 0,-1 5 0,-1-6 0,2 3 0,0 0 0,-3-2 0,3 2 0,0-4 0,-2 1 0,1 0 0,-2 0 0,0-1 0,0-1 0,0-2 0</inkml:trace>
-  <inkml:trace contextRef="#ctx0" brushRef="#br1" timeOffset="14248">23124 9077 24575,'11'3'0,"9"-1"0,3-2 0,12 0 0,7 0 0,-4 0 0,18 0 0,-5 0 0,-18 0 0,0 0 0,18 0-494,-13 0 0,0 0 494,22 0 0,-28 0 0,2 0 0,12-3 0,-2 1 0,12 1 0,-13-2 0,1 0 0,-10 3 0,-1 0 0,0-2 0,1 0 0,-1 2 0,0-1 0,4-3 0,-1-1 0,-2 5 0,0-1 0,3-1 0,0 0 0,-1 1 0,1 2 0,0-1 0,0 0 0,27 0 0,-14 0 0,-1 0 0,-2 0 0,9-3 0,0 1 0,-11 0 0,-3 0 0,1-1 0,12-1 0,-15 1 0,0 0 0,14-2-217,-12-2 1,-2 0 216,-3 5 0,-6-5 0,1 1 0,11 1 0,10 0 0,0-3 0,-5 7 0,-1-7 0,-6 7 0,1-2 0,-6 3 0,-1-4 967,-4 3-967,0-2 454,-1 3-454,-4 0 0,0 0 0,-5 0 0,0 0 0,-7 0 0,1 0 0,-8 0 0,2 0 0,-6 0 0,0 0 0</inkml:trace>
-  <inkml:trace contextRef="#ctx0" brushRef="#br1" timeOffset="15224">25972 8646 24575,'0'18'0,"0"5"0,0-5 0,0 21 0,0-22 0,0 22 0,0-17 0,0 9 0,0-5 0,0-4 0,0-2 0,0-6 0,0 2 0,0 0 0,0-5 0,0 5 0,0-10 0,0 6 0,0-2 0,0 3 0,0-4 0,0 3 0,0-2 0,0 0 0,0 2 0,0-6 0,0 3 0,0-3 0,0 0 0,0-1 0,2 1 0,-1 0 0,1 0 0,-2-1 0,3 1 0,-2 0 0,1 0 0,1-1 0,-3-1 0,3-2 0</inkml:trace>
-  <inkml:trace contextRef="#ctx0" brushRef="#br1" timeOffset="16939">23700 8220 10468,'4'3'0,"3"0"5051,5-3-5051,4 0 2454,-2 0-2454,6 0 1418,-3-3-1418,4-1 5184,-6-6-5184,1 0 0,-3-4 0,-2-2 0,2 1 0,-6-5 0,0 7 0,-4-8 0,0 4 0,-3-4 0,0 0 0,0 3 0,0 2 0,0 3 0,-3 0 0,0 0 0,-7 3 0,4 4 0,-7 0 0,7 5 0,-6-1 0,2 2 0,0 0 0,-2 0 0,2 0 0,-6 0 0,2 0 0,-2 2 0,3 2 0,-5 10 0,4-6 0,-4 12 0,5-9 0,0 5 0,0-3 0,3 4 0,0-4 0,3 7 0,1-6 0,2 2 0,1 1 0,3-4 0,0 4 0,0-1 0,0-5 0,0 5 0,0-7 0,0 4 0,0 0 0,0-4 0,3 3 0,1-2 0,5 3 0,4 0 0,5 1 0,3-4 0,0 4 0,4-6 0,1 6 0,10-6 0,-5 3 0,5-3 0,-10-4 0,-1 0 0,-8-4 0,0 0 0,-7 0 0,-4 0 0,-4 0 0</inkml:trace>
-  <inkml:trace contextRef="#ctx0" brushRef="#br1" timeOffset="17964">24003 7954 12441,'2'3'0,"5"-1"4728,2-2-4728,1 6 2110,6-1-2110,-9 4 1179,9 0-1179,-6-2 4117,2 5-4117,1-5 0,-3 2 0,6 1 0,-2 0 0,3 1 0,0-2 0,-5 1 0,1-3 0,-3 2 0,2-3 0,-6 0 0,3 0 0,-3-3 0,0 0 0,0-3 0,-3 0 0,-1 0 0</inkml:trace>
-  <inkml:trace contextRef="#ctx0" brushRef="#br1" timeOffset="18906">24229 7898 24575,'0'12'0,"0"0"0,0 0 0,0 5 0,0 0 0,0 0 0,0-3 0,0-2 0,0-6 0,0 10 0,0-6 0,0 3 0,0-1 0,0-6 0,0 3 0,0-4 0,0 1 0,0 0 0,0 0 0,0-3 0,0-1 0</inkml:trace>
-  <inkml:trace contextRef="#ctx0" brushRef="#br1" timeOffset="19123">24229 8111 24575,'0'0'0</inkml:trace>
-  <inkml:trace contextRef="#ctx0" brushRef="#br1" timeOffset="19998">24399 7882 11233,'3'2'0,"-1"12"4953,-2 1-4953,0 14 2322,0-13-2322,0 16 1323,0-15-1323,0 17 4744,0-8-4744,0 1 0,0-2 0,0-8 0,0 3 0,0-2 0,0 3 0,0-7 0,0 1 0,0-5 0,0 3 0,0-4 0,0 3 0,0-2 0,0 0 0,0 2 0,2-6 0,2 3 0,-1-3 0,2-3 0,-5 0 0,3-3 0</inkml:trace>
-  <inkml:trace contextRef="#ctx0" brushRef="#br1" timeOffset="21423">24421 7895 24575,'12'0'0,"-1"0"0,-2 0 0,-2 0 0,2 0 0,0 0 0,-3 0 0,3 0 0,-3 3 0,0 0 0,-1 2 0,1 4 0,-2-2 0,1 5 0,-4-6 0,2 6 0,-3-5 0,0 5 0,0-5 0,0 5 0,0-3 0,0 1 0,0 2 0,0-3 0,0 4 0,0 0 0,0-3 0,0 2 0,-3-3 0,0 4 0,-4-3 0,-2 2 0,2-3 0,-5 4 0,2-3 0,-3-1 0,0-2 0,0-1 0,1 0 0,-1 1 0,0-1 0,3 0 0,-2-2 0,5 1 0,-2-4 0,4 1 0,-1-2 0,0 0 0,3 0 0,0 0 0</inkml:trace>
-  <inkml:trace contextRef="#ctx0" brushRef="#br1" timeOffset="56802">2028 2026 24575,'-12'0'0,"-7"0"0,-9 0 0,-14 0 0,-6 0 0,-11 0-863,4 0 863,22 0 0,1 0 0,-9 0 0,3 0 0,1 0 212,8 0-212,-6 0 0,0 0 0,2 0 0,-14 0 0,6 0 0,4 0 651,2 0-651,4-4 0,0 7 0,1 1 0,7 4 0,2 5 0,4 2 0,3-2 0,-4 8 0,5-3 0,2 3 0,-3 0 0,6 0 0,-2 0 0,3 4 0,-1 1 0,1 0 0,3 4 0,-3-4 0,6 5 0,-2-1 0,3 1 0,0-1 0,0 1 0,0-1 0,0 1 0,0 9 0,7-2 0,2 4 0,11-2 0,12 10-1701,1 1 1701,-9-21 0,0-1 0,0 1 0,2-2-551,2-2 1,3-2 550,1 4 0,2-1 0,4-3 0,0-1 0,0-3 0,0 0 0,6 1 0,1-1-793,-1-4 0,1 0 793,3 3 0,1-1 0,3-1 0,1-1 0,0 1 0,0 0 0,0-1 0,0 1 0,0-3 0,-1 0 0,-4 2 0,1-1 0,-1-3 0,0-1 0,1 4 0,-1 1 0,1-4 0,-1-1 0,0 2 0,1 0 0,-1-4 0,1-1 0,3 2 0,0 1 0,1-2 0,0-1 0,4 1 0,0 0-923,0 2 1,0-1 922,0-3 0,0-1 0,0 2 0,0 0 0,0-2 0,0 0 0,0-1 0,-1 1 0,1 0 0,0-1 0,4 1 0,0 0 0,-3 0 0,0-1 0,-15-2 0,1-1 0,-1 0 0,15 1 0,0-1 0,-15-2 0,1 0 0,-1 0 0,12 0 0,-2 0 0,8 0 0,-1 0 0,-11 0 0,0 0 17,4 0 1,-1 0-18,-4 0 0,1 0 0,-1 0 0,0 0 0,-3 0 0,0 0 0,3 0 0,-1 0 0,-5 0 0,-1 0-17,3 0 1,0 0 16,1-2 0,-2-1 0,-1-2 0,-1 0 0,7 0 0,-1-2 0,-5-4 0,-1-2 0,0 5 0,0 0 0,0-4 0,-3-1 0,19-5 0,-14 6 0,-2-1 0,3-9 462,-9 10 0,0-1-462,11-17 0,3 6 0,-5-6 0,-2 0 1924,-8 0-1924,1-4 0,-3 1 0,-6 0 0,7-5 0,-7 0 0,3-5 0,-8 6 1502,3-3-1502,-11 3 1205,6-4-1205,-10 0 627,3-1-627,-7 1 0,-2 0 0,-3-12 0,0 4-241,-1 16 1,-2 0 240,-10-21 0,4 21 0,-2 0 0,-4 2 0,-3 0 0,-1-4 0,-2 1-609,0 1 1,-2 1 608,-5-4 0,-1 1 0,-1 3 0,-2 1-973,-5-5 0,-4 1 973,-2 1 0,-3 1 0,-2 1 0,-1 1 0,13 9 0,-1 1 0,-1 1-801,-1-1 0,-1 1 0,-1 0 801,-2 0 0,-1-1 0,0 1 0,-4 0 0,0 1 0,-1 0 0,1 0 0,-1 0 0,0 1-967,2 2 0,-1 2 1,0 0 966,-2-1 0,0 0 0,0 1 0,5 3 0,1 1 0,-1 1-237,1 0 1,-1 0-1,1 2 237,-17-2 0,0 1 0,8 2 0,0 1 94,0 1 1,1 1-95,4 1 0,-1 0 0,4 1 0,1 2 529,-1-1 1,1 0-530,3 0 0,1 0 0,2 0 0,1 0 0,-24 0 0,17 0 0,3 0 3132,-4 0-3132,3 0 0,0 0 0,-2 0 0,-16 0 0,7 4 0,0 0 0,20 1 0,0 0 0,-18 0 0,18-1 0,1 0 0,-16-3 0,-5 7 0,-6-7 0,4 7 0,-5-7 0,7 3 0,0 0 0,-1-3 0,6 6 0,2-6 0,-1 7 0,4-7 2048,-4 6-2048,6-2 1664,0-1-1664,-1 4 1212,1-4-1212,0 5 402,-1-1-402,1 0 0,-1 0 0,1 0 0,4 4 0,-3-3 0,8 2 0,-8 1 0,8-4 0,-3 7 0,4-6 0,5 1 0,-4 1 0,8-3 0,-3 3 0,4-4 0,0 0 0,0 0 0,0 3 0,0-2 0,-1 2 0,5-3 0,-3-1 0,2 1 0,1 0 0,0 0 0,1-1 0,2 1 0,1-1 0,1 0 0,2 1 0,0-1 0,1 0 0,3-1 0,0 1 0,1-3 0,-1 2 0,3-4 0,0 1 0</inkml:trace>
-  <inkml:trace contextRef="#ctx0" brushRef="#br1" timeOffset="63339">8661 13600 11682,'6'0'0,"6"0"4878,-2 0-4878,25 0 2243,-10 0-2243,20 0 0,-3 0 0,6 0 0,5 0 0,-10 0 462,-8 0 0,1 0-462,6 0 0,0 0 0,0 0 0,-1 0 0,-7 0 0,1 0 0,10 0 0,14 0 0,-6 0 0,-5 0 0,-1 3 4405,-6-2-4405,-5 3 0,0-4 0,-10 3 0,-1-2 0,-7 2 443,-2-3-443,-6 3 0,-1-3 0,-4 3 0,1-3 0,0 2 0,-3-1 0,0 2 0</inkml:trace>
+  <inkml:traceGroup>
+    <inkml:annotationXML>
+      <emma:emma xmlns:emma="http://www.w3.org/2003/04/emma" version="1.0">
+        <emma:interpretation id="{FFFD3093-B8EA-41C1-97A3-2495885D9524}" emma:medium="tactile" emma:mode="ink">
+          <msink:context xmlns:msink="http://schemas.microsoft.com/ink/2010/main" type="inkDrawing"/>
+        </emma:interpretation>
+      </emma:emma>
+    </inkml:annotationXML>
+    <inkml:trace contextRef="#ctx0" brushRef="#br0">22636 9899 24575,'0'32'0,"0"3"0,0 17 0,0 0 0,0-22 0,0 24 0,0-27 0,0 19 0,0-15 0,0-5 0,0-4 0,0-6 0,0-3 0,0-4 0,0 0 0,0-3 0,0-1 0,0-1 0,0-2 0</inkml:trace>
+    <inkml:trace contextRef="#ctx0" brushRef="#br0" timeOffset="1240">22622 10198 24575,'15'0'0,"6"0"0,10 0 0,11 0 0,1 0 0,8 0 0,-13 0 0,-2 0 0,-2 0 0,-4 0 0,11 0 0,-1 0 0,-16 0 0,13 0 0,0 0 0,-13 0 0,13 0 0,0 0 0,-13 0 0,12 0 0,2 0 0,-1 0 0,17 0 0,-8 0 0,9 0 0,-8 0-444,-7-4 0,2-2 444,12 0 0,-15 0 0,2 1 0,-7 0 0,-1 1 0,0 2 0,0-1 0,0-1 0,1-1 0,3 0 0,-1 0 0,16-4 0,-6 4 0,-2 0 0,-4-4-219,1 4 0,1 0 219,3-3 0,-13 3 0,1 0 0,1 1 0,-1-1 0,30-5 0,-8 2 0,2-2 0,0 2 0,-5-1 0,-21 4 0,1 0 0,24 1 0,-10-3 0,17 2 0,-25 0 0,14-3-35,-10 4 35,5-1 0,-6 1 0,1 0 866,-6 4-866,-1-8 457,-8 8-457,-2-4 38,-8 4-38,0-3 0,-8 3 0,0-3 0,-5 3 0,-2 0 0</inkml:trace>
+    <inkml:trace contextRef="#ctx0" brushRef="#br0" timeOffset="2381">25463 9855 24575,'0'15'0,"0"-5"0,0 9 0,0-8 0,0 9 0,0-7 0,0 7 0,0-2 0,0 7 0,0-3 0,0 3 0,0 0 0,0-3 0,0 0 0,0-2 0,0-3 0,0 4 0,0-3 0,0-2 0,0-3 0,0 0 0,0-4 0,3 3 0,-2-5 0,1 5 0,-2-6 0,0 3 0,0 0 0,0-2 0,0 2 0,3-4 0,-2 1 0,1 3 0,-2-2 0,0 2 0,0-4 0,0 1 0,0 0 0,3 0 0,-3-1 0,3 1 0,-3-3 0,0 0 0</inkml:trace>
+    <inkml:trace contextRef="#ctx0" brushRef="#br0" timeOffset="6556">18804 10518 24575,'24'0'0,"-3"0"0,13 0 0,3 0 0,17 0 0,7 0-612,-25 0 0,1 0 612,25 0 0,-23 0 0,0 0 0,-5 0 0,1 0 0,9 0 0,0 0 0,-2 0 0,-1 0 0,0 0 0,0 0 0,2-3 0,0 1-499,-1 1 1,0 1 498,2-2 0,1-1 0,3-2 0,0 0 0,0 2 0,1-1 0,-3-6 0,0 0-926,9 3 1,0 1 925,-5-1 0,-1-1 0,4 2 0,1 1 0,2-4 0,-1 1 0,-4 5 0,-3-1-642,-8-3 1,0 0 641,15 4 0,-4 0 119,1-6-119,-6 4 0,1 0 0,8-4 0,6 3 0,-29 2 0,1 0 0,21-1 0,6-4 0,-7 0 877,-5-4-877,4 4 0,-10-3 1818,0 7-1818,-6-2 1522,-6 2-1522,-4-2 761,-4 3-761,-6-2 258,-6 5-258,-1-2 0,-3 3 0,-3 0 0,0 0 0</inkml:trace>
+    <inkml:trace contextRef="#ctx0" brushRef="#br0" timeOffset="7948">21248 10019 24575,'14'0'0,"0"0"0,7 0 0,-3 0 0,8 3 0,-9-2 0,3 5 0,-6-3 0,2 7 0,-3-6 0,0 2 0,-3 0 0,-1-5 0,0 8 0,-5-6 0,7 3 0,-7 0 0,8 0 0,-5 0 0,2 0 0,-4 0 0,1 0 0,0-1 0,0-1 0,-1 1 0,1-2 0,0 0 0,0 2 0,0-1 0,-1-1 0,1 2 0,0-4 0,-3 4 0,0-2 0,-3 2 0,0 1 0,0-1 0,2-2 0,-1 2 0,1-1 0,1 1 0,-2 1 0,4 0 0,-5 0 0,6-1 0,-6 1 0,5 0 0,-4 0 0,2-1 0,-3 1 0,0 0 0,0-1 0,0 4 0,0-2 0,0 5 0,0 1 0,-3 1 0,-4 2 0,-3 1 0,-8 1 0,3 3 0,-7 2 0,7-2 0,-7 2 0,7-2 0,-3 1 0,4-5 0,1-1 0,-1 1 0,4-3 0,0 2 0,1-3 0,2 0 0,-3 3 0,1-2 0,2 2 0,-3 0 0,3-2 0,1 3 0,-1-5 0,1 1 0,0-3 0,2-1 0,-1-4 0,4-1 0,-1-2 0</inkml:trace>
+    <inkml:trace contextRef="#ctx0" brushRef="#br1" timeOffset="13015">23096 8750 9977,'0'5'0,"0"0"5093,0 18-5093,0-4 2537,0 6-2537,0 0 1480,0 6-1480,0 1 5488,0-1-5488,0-1 0,0-4 0,0 4 0,0 1 0,3-5 0,-2-1 0,5-7 0,-2 2 0,-1-7 0,3 4 0,-5-4 0,4-4 0,-4 3 0,2-5 0,-1 5 0,-1-6 0,2 3 0,0 0 0,-3-2 0,3 2 0,0-4 0,-2 1 0,1 0 0,-2 0 0,0-1 0,0-1 0,0-2 0</inkml:trace>
+    <inkml:trace contextRef="#ctx0" brushRef="#br1" timeOffset="14248">23124 9077 24575,'11'3'0,"9"-1"0,3-2 0,12 0 0,7 0 0,-4 0 0,18 0 0,-5 0 0,-18 0 0,0 0 0,18 0-494,-13 0 0,0 0 494,22 0 0,-28 0 0,2 0 0,12-3 0,-2 1 0,12 1 0,-13-2 0,1 0 0,-10 3 0,-1 0 0,0-2 0,1 0 0,-1 2 0,0-1 0,4-3 0,-1-1 0,-2 5 0,0-1 0,3-1 0,0 0 0,-1 1 0,1 2 0,0-1 0,0 0 0,27 0 0,-14 0 0,-1 0 0,-2 0 0,9-3 0,0 1 0,-11 0 0,-3 0 0,1-1 0,12-1 0,-15 1 0,0 0 0,14-2-217,-12-2 1,-2 0 216,-3 5 0,-6-5 0,1 1 0,11 1 0,10 0 0,0-3 0,-5 7 0,-1-7 0,-6 7 0,1-2 0,-6 3 0,-1-4 967,-4 3-967,0-2 454,-1 3-454,-4 0 0,0 0 0,-5 0 0,0 0 0,-7 0 0,1 0 0,-8 0 0,2 0 0,-6 0 0,0 0 0</inkml:trace>
+    <inkml:trace contextRef="#ctx0" brushRef="#br1" timeOffset="15224">25972 8646 24575,'0'18'0,"0"5"0,0-5 0,0 21 0,0-22 0,0 22 0,0-17 0,0 9 0,0-5 0,0-4 0,0-2 0,0-6 0,0 2 0,0 0 0,0-5 0,0 5 0,0-10 0,0 6 0,0-2 0,0 3 0,0-4 0,0 3 0,0-2 0,0 0 0,0 2 0,0-6 0,0 3 0,0-3 0,0 0 0,0-1 0,2 1 0,-1 0 0,1 0 0,-2-1 0,3 1 0,-2 0 0,1 0 0,1-1 0,-3-1 0,3-2 0</inkml:trace>
+    <inkml:trace contextRef="#ctx0" brushRef="#br1" timeOffset="16939">23700 8220 10468,'4'3'0,"3"0"5051,5-3-5051,4 0 2454,-2 0-2454,6 0 1418,-3-3-1418,4-1 5184,-6-6-5184,1 0 0,-3-4 0,-2-2 0,2 1 0,-6-5 0,0 7 0,-4-8 0,0 4 0,-3-4 0,0 0 0,0 3 0,0 2 0,0 3 0,-3 0 0,0 0 0,-7 3 0,4 4 0,-7 0 0,7 5 0,-6-1 0,2 2 0,0 0 0,-2 0 0,2 0 0,-6 0 0,2 0 0,-2 2 0,3 2 0,-5 10 0,4-6 0,-4 12 0,5-9 0,0 5 0,0-3 0,3 4 0,0-4 0,3 7 0,1-6 0,2 2 0,1 1 0,3-4 0,0 4 0,0-1 0,0-5 0,0 5 0,0-7 0,0 4 0,0 0 0,0-4 0,3 3 0,1-2 0,5 3 0,4 0 0,5 1 0,3-4 0,0 4 0,4-6 0,1 6 0,10-6 0,-5 3 0,5-3 0,-10-4 0,-1 0 0,-8-4 0,0 0 0,-7 0 0,-4 0 0,-4 0 0</inkml:trace>
+    <inkml:trace contextRef="#ctx0" brushRef="#br1" timeOffset="17964">24003 7954 12441,'2'3'0,"5"-1"4728,2-2-4728,1 6 2110,6-1-2110,-9 4 1179,9 0-1179,-6-2 4117,2 5-4117,1-5 0,-3 2 0,6 1 0,-2 0 0,3 1 0,0-2 0,-5 1 0,1-3 0,-3 2 0,2-3 0,-6 0 0,3 0 0,-3-3 0,0 0 0,0-3 0,-3 0 0,-1 0 0</inkml:trace>
+    <inkml:trace contextRef="#ctx0" brushRef="#br1" timeOffset="18906">24229 7898 24575,'0'12'0,"0"0"0,0 0 0,0 5 0,0 0 0,0 0 0,0-3 0,0-2 0,0-6 0,0 10 0,0-6 0,0 3 0,0-1 0,0-6 0,0 3 0,0-4 0,0 1 0,0 0 0,0 0 0,0-3 0,0-1 0</inkml:trace>
+    <inkml:trace contextRef="#ctx0" brushRef="#br1" timeOffset="19123">24229 8111 24575,'0'0'0</inkml:trace>
+    <inkml:trace contextRef="#ctx0" brushRef="#br1" timeOffset="19998">24399 7882 11233,'3'2'0,"-1"12"4953,-2 1-4953,0 14 2322,0-13-2322,0 16 1323,0-15-1323,0 17 4744,0-8-4744,0 1 0,0-2 0,0-8 0,0 3 0,0-2 0,0 3 0,0-7 0,0 1 0,0-5 0,0 3 0,0-4 0,0 3 0,0-2 0,0 0 0,0 2 0,2-6 0,2 3 0,-1-3 0,2-3 0,-5 0 0,3-3 0</inkml:trace>
+    <inkml:trace contextRef="#ctx0" brushRef="#br1" timeOffset="21423">24421 7895 24575,'12'0'0,"-1"0"0,-2 0 0,-2 0 0,2 0 0,0 0 0,-3 0 0,3 0 0,-3 3 0,0 0 0,-1 2 0,1 4 0,-2-2 0,1 5 0,-4-6 0,2 6 0,-3-5 0,0 5 0,0-5 0,0 5 0,0-3 0,0 1 0,0 2 0,0-3 0,0 4 0,0 0 0,0-3 0,0 2 0,-3-3 0,0 4 0,-4-3 0,-2 2 0,2-3 0,-5 4 0,2-3 0,-3-1 0,0-2 0,0-1 0,1 0 0,-1 1 0,0-1 0,3 0 0,-2-2 0,5 1 0,-2-4 0,4 1 0,-1-2 0,0 0 0,3 0 0,0 0 0</inkml:trace>
+    <inkml:trace contextRef="#ctx0" brushRef="#br1" timeOffset="56802">2028 2026 24575,'-12'0'0,"-7"0"0,-9 0 0,-14 0 0,-6 0 0,-11 0-863,4 0 863,22 0 0,1 0 0,-9 0 0,3 0 0,1 0 212,8 0-212,-6 0 0,0 0 0,2 0 0,-14 0 0,6 0 0,4 0 651,2 0-651,4-4 0,0 7 0,1 1 0,7 4 0,2 5 0,4 2 0,3-2 0,-4 8 0,5-3 0,2 3 0,-3 0 0,6 0 0,-2 0 0,3 4 0,-1 1 0,1 0 0,3 4 0,-3-4 0,6 5 0,-2-1 0,3 1 0,0-1 0,0 1 0,0-1 0,0 1 0,0 9 0,7-2 0,2 4 0,11-2 0,12 10-1701,1 1 1701,-9-21 0,0-1 0,0 1 0,2-2-551,2-2 1,3-2 550,1 4 0,2-1 0,4-3 0,0-1 0,0-3 0,0 0 0,6 1 0,1-1-793,-1-4 0,1 0 793,3 3 0,1-1 0,3-1 0,1-1 0,0 1 0,0 0 0,0-1 0,0 1 0,0-3 0,-1 0 0,-4 2 0,1-1 0,-1-3 0,0-1 0,1 4 0,-1 1 0,1-4 0,-1-1 0,0 2 0,1 0 0,-1-4 0,1-1 0,3 2 0,0 1 0,1-2 0,0-1 0,4 1 0,0 0-923,0 2 1,0-1 922,0-3 0,0-1 0,0 2 0,0 0 0,0-2 0,0 0 0,0-1 0,-1 1 0,1 0 0,0-1 0,4 1 0,0 0 0,-3 0 0,0-1 0,-15-2 0,1-1 0,-1 0 0,15 1 0,0-1 0,-15-2 0,1 0 0,-1 0 0,12 0 0,-2 0 0,8 0 0,-1 0 0,-11 0 0,0 0 17,4 0 1,-1 0-18,-4 0 0,1 0 0,-1 0 0,0 0 0,-3 0 0,0 0 0,3 0 0,-1 0 0,-5 0 0,-1 0-17,3 0 1,0 0 16,1-2 0,-2-1 0,-1-2 0,-1 0 0,7 0 0,-1-2 0,-5-4 0,-1-2 0,0 5 0,0 0 0,0-4 0,-3-1 0,19-5 0,-14 6 0,-2-1 0,3-9 462,-9 10 0,0-1-462,11-17 0,3 6 0,-5-6 0,-2 0 1924,-8 0-1924,1-4 0,-3 1 0,-6 0 0,7-5 0,-7 0 0,3-5 0,-8 6 1502,3-3-1502,-11 3 1205,6-4-1205,-10 0 627,3-1-627,-7 1 0,-2 0 0,-3-12 0,0 4-241,-1 16 1,-2 0 240,-10-21 0,4 21 0,-2 0 0,-4 2 0,-3 0 0,-1-4 0,-2 1-609,0 1 1,-2 1 608,-5-4 0,-1 1 0,-1 3 0,-2 1-973,-5-5 0,-4 1 973,-2 1 0,-3 1 0,-2 1 0,-1 1 0,13 9 0,-1 1 0,-1 1-801,-1-1 0,-1 1 0,-1 0 801,-2 0 0,-1-1 0,0 1 0,-4 0 0,0 1 0,-1 0 0,1 0 0,-1 0 0,0 1-967,2 2 0,-1 2 1,0 0 966,-2-1 0,0 0 0,0 1 0,5 3 0,1 1 0,-1 1-237,1 0 1,-1 0-1,1 2 237,-17-2 0,0 1 0,8 2 0,0 1 94,0 1 1,1 1-95,4 1 0,-1 0 0,4 1 0,1 2 529,-1-1 1,1 0-530,3 0 0,1 0 0,2 0 0,1 0 0,-24 0 0,17 0 0,3 0 3132,-4 0-3132,3 0 0,0 0 0,-2 0 0,-16 0 0,7 4 0,0 0 0,20 1 0,0 0 0,-18 0 0,18-1 0,1 0 0,-16-3 0,-5 7 0,-6-7 0,4 7 0,-5-7 0,7 3 0,0 0 0,-1-3 0,6 6 0,2-6 0,-1 7 0,4-7 2048,-4 6-2048,6-2 1664,0-1-1664,-1 4 1212,1-4-1212,0 5 402,-1-1-402,1 0 0,-1 0 0,1 0 0,4 4 0,-3-3 0,8 2 0,-8 1 0,8-4 0,-3 7 0,4-6 0,5 1 0,-4 1 0,8-3 0,-3 3 0,4-4 0,0 0 0,0 0 0,0 3 0,0-2 0,-1 2 0,5-3 0,-3-1 0,2 1 0,1 0 0,0 0 0,1-1 0,2 1 0,1-1 0,1 0 0,2 1 0,0-1 0,1 0 0,3-1 0,0 1 0,1-3 0,-1 2 0,3-4 0,0 1 0</inkml:trace>
+    <inkml:trace contextRef="#ctx0" brushRef="#br1" timeOffset="63339">8661 13600 11682,'6'0'0,"6"0"4878,-2 0-4878,25 0 2243,-10 0-2243,20 0 0,-3 0 0,6 0 0,5 0 0,-10 0 462,-8 0 0,1 0-462,6 0 0,0 0 0,0 0 0,-1 0 0,-7 0 0,1 0 0,10 0 0,14 0 0,-6 0 0,-5 0 0,-1 3 4405,-6-2-4405,-5 3 0,0-4 0,-10 3 0,-1-2 0,-7 2 443,-2-3-443,-6 3 0,-1-3 0,-4 3 0,1-3 0,0 2 0,-3-1 0,0 2 0</inkml:trace>
+  </inkml:traceGroup>
+</inkml:ink>
+</file>
+
+<file path=ppt/ink/ink2.xml><?xml version="1.0" encoding="utf-8"?>
+<inkml:ink xmlns:inkml="http://www.w3.org/2003/InkML">
+  <inkml:definitions>
+    <inkml:context xml:id="ctx0">
+      <inkml:inkSource xml:id="inkSrc0">
+        <inkml:traceFormat>
+          <inkml:channel name="X" type="integer" max="1920" units="cm"/>
+          <inkml:channel name="Y" type="integer" max="1080" units="cm"/>
+          <inkml:channel name="T" type="integer" max="2.14748E9" units="dev"/>
+        </inkml:traceFormat>
+        <inkml:channelProperties>
+          <inkml:channelProperty channel="X" name="resolution" value="36.43264" units="1/cm"/>
+          <inkml:channelProperty channel="Y" name="resolution" value="36.48649" units="1/cm"/>
+          <inkml:channelProperty channel="T" name="resolution" value="1" units="1/dev"/>
+        </inkml:channelProperties>
+      </inkml:inkSource>
+      <inkml:timestamp xml:id="ts0" timeString="2025-05-24T09:30:02.174"/>
+    </inkml:context>
+    <inkml:brush xml:id="br0">
+      <inkml:brushProperty name="width" value="0.06667" units="cm"/>
+      <inkml:brushProperty name="height" value="0.06667" units="cm"/>
+      <inkml:brushProperty name="fitToCurve" value="1"/>
+    </inkml:brush>
+  </inkml:definitions>
+  <inkml:traceGroup>
+    <inkml:annotationXML>
+      <emma:emma xmlns:emma="http://www.w3.org/2003/04/emma" version="1.0">
+        <emma:interpretation id="{1942A32C-5007-4B79-9837-938D259709E4}" emma:medium="tactile" emma:mode="ink">
+          <msink:context xmlns:msink="http://schemas.microsoft.com/ink/2010/main" type="writingRegion" rotatedBoundingBox="35459,3797 35474,3797 35474,3812 35459,3812"/>
+        </emma:interpretation>
+      </emma:emma>
+    </inkml:annotationXML>
+    <inkml:traceGroup>
+      <inkml:annotationXML>
+        <emma:emma xmlns:emma="http://www.w3.org/2003/04/emma" version="1.0">
+          <emma:interpretation id="{A1AE7DB4-F703-420C-AD19-94548AACFA35}" emma:medium="tactile" emma:mode="ink">
+            <msink:context xmlns:msink="http://schemas.microsoft.com/ink/2010/main" type="paragraph" rotatedBoundingBox="35459,3797 35474,3797 35474,3812 35459,3812" alignmentLevel="1"/>
+          </emma:interpretation>
+        </emma:emma>
+      </inkml:annotationXML>
+      <inkml:traceGroup>
+        <inkml:annotationXML>
+          <emma:emma xmlns:emma="http://www.w3.org/2003/04/emma" version="1.0">
+            <emma:interpretation id="{C0285568-C463-4B1B-A121-457E0196FE7C}" emma:medium="tactile" emma:mode="ink">
+              <msink:context xmlns:msink="http://schemas.microsoft.com/ink/2010/main" type="line" rotatedBoundingBox="35459,3797 35474,3797 35474,3812 35459,3812"/>
+            </emma:interpretation>
+          </emma:emma>
+        </inkml:annotationXML>
+        <inkml:traceGroup>
+          <inkml:annotationXML>
+            <emma:emma xmlns:emma="http://www.w3.org/2003/04/emma" version="1.0">
+              <emma:interpretation id="{55356920-9CA8-4998-8191-3159340C3B94}" emma:medium="tactile" emma:mode="ink">
+                <msink:context xmlns:msink="http://schemas.microsoft.com/ink/2010/main" type="inkWord" rotatedBoundingBox="35459,3797 35474,3797 35474,3812 35459,3812"/>
+              </emma:interpretation>
+              <emma:one-of disjunction-type="recognition" id="oneOf0">
+                <emma:interpretation id="interp0" emma:lang="" emma:confidence="1">
+                  <emma:literal/>
+                </emma:interpretation>
+              </emma:one-of>
+            </emma:emma>
+          </inkml:annotationXML>
+          <inkml:trace contextRef="#ctx0" brushRef="#br0">0 0 0</inkml:trace>
+          <inkml:trace contextRef="#ctx0" brushRef="#br0" timeOffset="166.9993">0 0 0</inkml:trace>
+          <inkml:trace contextRef="#ctx0" brushRef="#br0" timeOffset="334.0007">0 0 0</inkml:trace>
+        </inkml:traceGroup>
+        <inkml:traceGroup>
+          <inkml:annotationXML>
+            <emma:emma xmlns:emma="http://www.w3.org/2003/04/emma" version="1.0">
+              <emma:interpretation id="{1C4BFF2E-71B1-439A-8B72-9561CF074B14}" emma:medium="tactile" emma:mode="ink">
+                <msink:context xmlns:msink="http://schemas.microsoft.com/ink/2010/main" type="inkWord" rotatedBoundingBox="35459,3797 35474,3797 35474,3812 35459,3812"/>
+              </emma:interpretation>
+              <emma:one-of disjunction-type="recognition" id="oneOf1">
+                <emma:interpretation id="interp1" emma:lang="" emma:confidence="0">
+                  <emma:literal>+</emma:literal>
+                </emma:interpretation>
+                <emma:interpretation id="interp2" emma:lang="" emma:confidence="0">
+                  <emma:literal>~</emma:literal>
+                </emma:interpretation>
+                <emma:interpretation id="interp3" emma:lang="" emma:confidence="0">
+                  <emma:literal>!</emma:literal>
+                </emma:interpretation>
+                <emma:interpretation id="interp4" emma:lang="" emma:confidence="0">
+                  <emma:literal>T</emma:literal>
+                </emma:interpretation>
+                <emma:interpretation id="interp5" emma:lang="" emma:confidence="0">
+                  <emma:literal>f</emma:literal>
+                </emma:interpretation>
+              </emma:one-of>
+            </emma:emma>
+          </inkml:annotationXML>
+          <inkml:trace contextRef="#ctx0" brushRef="#br0" timeOffset="507">0 0 0</inkml:trace>
+          <inkml:trace contextRef="#ctx0" brushRef="#br0" timeOffset="925.9995">0 0 0</inkml:trace>
+          <inkml:trace contextRef="#ctx0" brushRef="#br0" timeOffset="1092.9999">0 0 0</inkml:trace>
+        </inkml:traceGroup>
+        <inkml:traceGroup>
+          <inkml:annotationXML>
+            <emma:emma xmlns:emma="http://www.w3.org/2003/04/emma" version="1.0">
+              <emma:interpretation id="{A7ADDB4D-0AAF-4A11-9567-22463DEC4E4D}" emma:medium="tactile" emma:mode="ink">
+                <msink:context xmlns:msink="http://schemas.microsoft.com/ink/2010/main" type="inkWord" rotatedBoundingBox="35459,3797 35474,3797 35474,3812 35459,3812"/>
+              </emma:interpretation>
+              <emma:one-of disjunction-type="recognition" id="oneOf2">
+                <emma:interpretation id="interp6" emma:lang="" emma:confidence="1">
+                  <emma:literal/>
+                </emma:interpretation>
+              </emma:one-of>
+            </emma:emma>
+          </inkml:annotationXML>
+          <inkml:trace contextRef="#ctx0" brushRef="#br0" timeOffset="-122.0009">0 0 0</inkml:trace>
+        </inkml:traceGroup>
+      </inkml:traceGroup>
+    </inkml:traceGroup>
+  </inkml:traceGroup>
 </inkml:ink>
 </file>
 
@@ -302,7 +431,7 @@
           <a:p>
             <a:fld id="{18EFFD01-6550-444F-AD9A-C37643C37F76}" type="datetimeFigureOut">
               <a:rPr lang="en-US" smtClean="0"/>
-              <a:t>4/7/25</a:t>
+              <a:t>5/24/2025</a:t>
             </a:fld>
             <a:endParaRPr lang="en-US"/>
           </a:p>
@@ -500,7 +629,7 @@
           <a:p>
             <a:fld id="{18EFFD01-6550-444F-AD9A-C37643C37F76}" type="datetimeFigureOut">
               <a:rPr lang="en-US" smtClean="0"/>
-              <a:t>4/7/25</a:t>
+              <a:t>5/24/2025</a:t>
             </a:fld>
             <a:endParaRPr lang="en-US"/>
           </a:p>
@@ -708,7 +837,7 @@
           <a:p>
             <a:fld id="{18EFFD01-6550-444F-AD9A-C37643C37F76}" type="datetimeFigureOut">
               <a:rPr lang="en-US" smtClean="0"/>
-              <a:t>4/7/25</a:t>
+              <a:t>5/24/2025</a:t>
             </a:fld>
             <a:endParaRPr lang="en-US"/>
           </a:p>
@@ -906,7 +1035,7 @@
           <a:p>
             <a:fld id="{18EFFD01-6550-444F-AD9A-C37643C37F76}" type="datetimeFigureOut">
               <a:rPr lang="en-US" smtClean="0"/>
-              <a:t>4/7/25</a:t>
+              <a:t>5/24/2025</a:t>
             </a:fld>
             <a:endParaRPr lang="en-US"/>
           </a:p>
@@ -1181,7 +1310,7 @@
           <a:p>
             <a:fld id="{18EFFD01-6550-444F-AD9A-C37643C37F76}" type="datetimeFigureOut">
               <a:rPr lang="en-US" smtClean="0"/>
-              <a:t>4/7/25</a:t>
+              <a:t>5/24/2025</a:t>
             </a:fld>
             <a:endParaRPr lang="en-US"/>
           </a:p>
@@ -1446,7 +1575,7 @@
           <a:p>
             <a:fld id="{18EFFD01-6550-444F-AD9A-C37643C37F76}" type="datetimeFigureOut">
               <a:rPr lang="en-US" smtClean="0"/>
-              <a:t>4/7/25</a:t>
+              <a:t>5/24/2025</a:t>
             </a:fld>
             <a:endParaRPr lang="en-US"/>
           </a:p>
@@ -1858,7 +1987,7 @@
           <a:p>
             <a:fld id="{18EFFD01-6550-444F-AD9A-C37643C37F76}" type="datetimeFigureOut">
               <a:rPr lang="en-US" smtClean="0"/>
-              <a:t>4/7/25</a:t>
+              <a:t>5/24/2025</a:t>
             </a:fld>
             <a:endParaRPr lang="en-US"/>
           </a:p>
@@ -1999,7 +2128,7 @@
           <a:p>
             <a:fld id="{18EFFD01-6550-444F-AD9A-C37643C37F76}" type="datetimeFigureOut">
               <a:rPr lang="en-US" smtClean="0"/>
-              <a:t>4/7/25</a:t>
+              <a:t>5/24/2025</a:t>
             </a:fld>
             <a:endParaRPr lang="en-US"/>
           </a:p>
@@ -2112,7 +2241,7 @@
           <a:p>
             <a:fld id="{18EFFD01-6550-444F-AD9A-C37643C37F76}" type="datetimeFigureOut">
               <a:rPr lang="en-US" smtClean="0"/>
-              <a:t>4/7/25</a:t>
+              <a:t>5/24/2025</a:t>
             </a:fld>
             <a:endParaRPr lang="en-US"/>
           </a:p>
@@ -2423,7 +2552,7 @@
           <a:p>
             <a:fld id="{18EFFD01-6550-444F-AD9A-C37643C37F76}" type="datetimeFigureOut">
               <a:rPr lang="en-US" smtClean="0"/>
-              <a:t>4/7/25</a:t>
+              <a:t>5/24/2025</a:t>
             </a:fld>
             <a:endParaRPr lang="en-US"/>
           </a:p>
@@ -2711,7 +2840,7 @@
           <a:p>
             <a:fld id="{18EFFD01-6550-444F-AD9A-C37643C37F76}" type="datetimeFigureOut">
               <a:rPr lang="en-US" smtClean="0"/>
-              <a:t>4/7/25</a:t>
+              <a:t>5/24/2025</a:t>
             </a:fld>
             <a:endParaRPr lang="en-US"/>
           </a:p>
@@ -2952,7 +3081,7 @@
           <a:p>
             <a:fld id="{18EFFD01-6550-444F-AD9A-C37643C37F76}" type="datetimeFigureOut">
               <a:rPr lang="en-US" smtClean="0"/>
-              <a:t>4/7/25</a:t>
+              <a:t>5/24/2025</a:t>
             </a:fld>
             <a:endParaRPr lang="en-US"/>
           </a:p>
@@ -3393,7 +3522,7 @@
         </p:spPr>
         <p:txBody>
           <a:bodyPr>
-            <a:normAutofit/>
+            <a:normAutofit fontScale="90000"/>
           </a:bodyPr>
           <a:lstStyle/>
           <a:p>
@@ -3418,18 +3547,18 @@
         </p:nvGrpSpPr>
         <p:grpSpPr>
           <a:xfrm>
-            <a:off x="361211" y="735498"/>
-            <a:ext cx="5667146" cy="5793492"/>
-            <a:chOff x="6289755" y="650542"/>
-            <a:chExt cx="5667146" cy="5793492"/>
+            <a:off x="361211" y="922070"/>
+            <a:ext cx="5667146" cy="5606920"/>
+            <a:chOff x="6289755" y="837114"/>
+            <a:chExt cx="5667146" cy="5606920"/>
           </a:xfrm>
         </p:grpSpPr>
         <p:grpSp>
           <p:nvGrpSpPr>
-            <p:cNvPr id="25" name="Group 24">
+            <p:cNvPr id="26" name="Group 25">
               <a:extLst>
                 <a:ext uri="{FF2B5EF4-FFF2-40B4-BE49-F238E27FC236}">
-                  <a16:creationId xmlns:a16="http://schemas.microsoft.com/office/drawing/2014/main" id="{9FE288D5-B5EA-7C7A-A51E-7207849ABBD7}"/>
+                  <a16:creationId xmlns:a16="http://schemas.microsoft.com/office/drawing/2014/main" id="{8765B929-7DE1-E8B3-6847-4036421EA00F}"/>
                 </a:ext>
               </a:extLst>
             </p:cNvPr>
@@ -3438,581 +3567,302 @@
           </p:nvGrpSpPr>
           <p:grpSpPr>
             <a:xfrm>
-              <a:off x="6289755" y="650542"/>
-              <a:ext cx="5667146" cy="5793492"/>
-              <a:chOff x="343896" y="894027"/>
-              <a:chExt cx="5667146" cy="5793492"/>
+              <a:off x="6289755" y="837114"/>
+              <a:ext cx="5667146" cy="5606920"/>
+              <a:chOff x="280314" y="574738"/>
+              <a:chExt cx="5667146" cy="5606920"/>
             </a:xfrm>
           </p:grpSpPr>
-          <p:grpSp>
-            <p:nvGrpSpPr>
-              <p:cNvPr id="26" name="Group 25">
-                <a:extLst>
-                  <a:ext uri="{FF2B5EF4-FFF2-40B4-BE49-F238E27FC236}">
-                    <a16:creationId xmlns:a16="http://schemas.microsoft.com/office/drawing/2014/main" id="{8765B929-7DE1-E8B3-6847-4036421EA00F}"/>
-                  </a:ext>
-                </a:extLst>
-              </p:cNvPr>
-              <p:cNvGrpSpPr/>
-              <p:nvPr/>
-            </p:nvGrpSpPr>
-            <p:grpSpPr>
-              <a:xfrm>
-                <a:off x="343896" y="894027"/>
-                <a:ext cx="5667146" cy="5793492"/>
-                <a:chOff x="280314" y="388166"/>
-                <a:chExt cx="5667146" cy="5793492"/>
-              </a:xfrm>
-            </p:grpSpPr>
-            <mc:AlternateContent xmlns:mc="http://schemas.openxmlformats.org/markup-compatibility/2006">
-              <mc:Choice xmlns:a14="http://schemas.microsoft.com/office/drawing/2010/main" Requires="a14">
-                <p:sp>
-                  <p:nvSpPr>
-                    <p:cNvPr id="28" name="TextBox 27">
-                      <a:extLst>
-                        <a:ext uri="{FF2B5EF4-FFF2-40B4-BE49-F238E27FC236}">
-                          <a16:creationId xmlns:a16="http://schemas.microsoft.com/office/drawing/2014/main" id="{35C20123-7DC2-768A-0491-0FF8B6604DD9}"/>
-                        </a:ext>
-                      </a:extLst>
-                    </p:cNvPr>
-                    <p:cNvSpPr txBox="1"/>
-                    <p:nvPr/>
-                  </p:nvSpPr>
-                  <p:spPr>
-                    <a:xfrm>
-                      <a:off x="2062312" y="1746719"/>
-                      <a:ext cx="1259767" cy="659283"/>
-                    </a:xfrm>
-                    <a:prstGeom prst="rect">
-                      <a:avLst/>
-                    </a:prstGeom>
-                    <a:noFill/>
-                  </p:spPr>
-                  <p:txBody>
-                    <a:bodyPr wrap="none" rtlCol="0">
-                      <a:spAutoFit/>
-                    </a:bodyPr>
-                    <a:lstStyle/>
-                    <a:p>
-                      <a:pPr/>
-                      <a14:m>
-                        <m:oMathPara xmlns:m="http://schemas.openxmlformats.org/officeDocument/2006/math">
-                          <m:oMathParaPr>
-                            <m:jc m:val="centerGroup"/>
-                          </m:oMathParaPr>
-                          <m:oMath xmlns:m="http://schemas.openxmlformats.org/officeDocument/2006/math">
-                            <m:nary>
-                              <m:naryPr>
-                                <m:chr m:val="∑"/>
-                                <m:supHide m:val="on"/>
-                                <m:ctrlPr>
-                                  <a:rPr lang="en-US" sz="1400" i="1" smtClean="0">
-                                    <a:latin typeface="Cambria Math" panose="02040503050406030204" pitchFamily="18" charset="0"/>
-                                  </a:rPr>
-                                </m:ctrlPr>
-                              </m:naryPr>
-                              <m:sub>
-                                <m:r>
-                                  <m:rPr>
-                                    <m:brk m:alnAt="7"/>
-                                  </m:rPr>
-                                  <a:rPr lang="en-CA" sz="1400" b="0" i="1" smtClean="0">
-                                    <a:latin typeface="Cambria Math" panose="02040503050406030204" pitchFamily="18" charset="0"/>
-                                  </a:rPr>
-                                  <m:t>𝑗</m:t>
-                                </m:r>
-                                <m:r>
-                                  <a:rPr lang="en-CA" sz="1400" b="0" i="1" smtClean="0">
-                                    <a:latin typeface="Cambria Math" panose="02040503050406030204" pitchFamily="18" charset="0"/>
-                                    <a:ea typeface="Cambria Math" panose="02040503050406030204" pitchFamily="18" charset="0"/>
-                                  </a:rPr>
-                                  <m:t>𝜖</m:t>
-                                </m:r>
-                                <m:sSup>
-                                  <m:sSupPr>
-                                    <m:ctrlPr>
-                                      <a:rPr lang="en-CA" sz="1400" i="1" smtClean="0">
-                                        <a:latin typeface="Cambria Math" panose="02040503050406030204" pitchFamily="18" charset="0"/>
-                                        <a:ea typeface="Cambria Math" panose="02040503050406030204" pitchFamily="18" charset="0"/>
-                                      </a:rPr>
-                                    </m:ctrlPr>
-                                  </m:sSupPr>
-                                  <m:e>
-                                    <m:r>
-                                      <m:rPr>
-                                        <m:sty m:val="p"/>
-                                      </m:rPr>
-                                      <a:rPr lang="en-CA" sz="1400" b="0" i="0" smtClean="0">
-                                        <a:latin typeface="Cambria Math" panose="02040503050406030204" pitchFamily="18" charset="0"/>
-                                        <a:ea typeface="Cambria Math" panose="02040503050406030204" pitchFamily="18" charset="0"/>
-                                      </a:rPr>
-                                      <m:t>J</m:t>
-                                    </m:r>
-                                  </m:e>
-                                  <m:sup>
-                                    <m:r>
-                                      <m:rPr>
-                                        <m:sty m:val="p"/>
-                                      </m:rPr>
-                                      <a:rPr lang="en-CA" sz="1400" b="0" i="0" smtClean="0">
-                                        <a:latin typeface="Cambria Math" panose="02040503050406030204" pitchFamily="18" charset="0"/>
-                                        <a:ea typeface="Cambria Math" panose="02040503050406030204" pitchFamily="18" charset="0"/>
-                                      </a:rPr>
-                                      <m:t>k</m:t>
-                                    </m:r>
-                                  </m:sup>
-                                </m:sSup>
-                              </m:sub>
-                              <m:sup/>
-                              <m:e>
-                                <m:sSubSup>
-                                  <m:sSubSupPr>
-                                    <m:ctrlPr>
-                                      <a:rPr lang="en-US" sz="1400" i="1" smtClean="0">
-                                        <a:latin typeface="Cambria Math" panose="02040503050406030204" pitchFamily="18" charset="0"/>
-                                      </a:rPr>
-                                    </m:ctrlPr>
-                                  </m:sSubSupPr>
-                                  <m:e>
-                                    <m:r>
-                                      <a:rPr lang="en-CA" sz="1400" b="0" i="1" smtClean="0">
-                                        <a:latin typeface="Cambria Math" panose="02040503050406030204" pitchFamily="18" charset="0"/>
-                                      </a:rPr>
-                                      <m:t>𝑆</m:t>
-                                    </m:r>
-                                  </m:e>
-                                  <m:sub>
-                                    <m:r>
-                                      <a:rPr lang="en-CA" sz="1400" b="0" i="1" smtClean="0">
-                                        <a:latin typeface="Cambria Math" panose="02040503050406030204" pitchFamily="18" charset="0"/>
-                                      </a:rPr>
-                                      <m:t>𝑖𝑗</m:t>
-                                    </m:r>
-                                  </m:sub>
-                                  <m:sup>
-                                    <m:r>
-                                      <a:rPr lang="en-CA" sz="1400" b="0" i="1" smtClean="0">
-                                        <a:latin typeface="Cambria Math" panose="02040503050406030204" pitchFamily="18" charset="0"/>
-                                      </a:rPr>
-                                      <m:t>𝑘</m:t>
-                                    </m:r>
-                                  </m:sup>
-                                </m:sSubSup>
-                                <m:sSubSup>
-                                  <m:sSubSupPr>
-                                    <m:ctrlPr>
-                                      <a:rPr lang="en-US" sz="1400" i="1" smtClean="0">
-                                        <a:latin typeface="Cambria Math" panose="02040503050406030204" pitchFamily="18" charset="0"/>
-                                      </a:rPr>
-                                    </m:ctrlPr>
-                                  </m:sSubSupPr>
-                                  <m:e>
-                                    <m:r>
-                                      <a:rPr lang="en-CA" sz="1400" b="0" i="1" smtClean="0">
-                                        <a:latin typeface="Cambria Math" panose="02040503050406030204" pitchFamily="18" charset="0"/>
-                                      </a:rPr>
-                                      <m:t>𝑉</m:t>
-                                    </m:r>
-                                  </m:e>
-                                  <m:sub>
-                                    <m:r>
-                                      <a:rPr lang="en-CA" sz="1400" b="0" i="1" smtClean="0">
-                                        <a:latin typeface="Cambria Math" panose="02040503050406030204" pitchFamily="18" charset="0"/>
-                                      </a:rPr>
-                                      <m:t>𝑗</m:t>
-                                    </m:r>
-                                  </m:sub>
-                                  <m:sup>
-                                    <m:r>
-                                      <a:rPr lang="en-CA" sz="1400" b="0" i="1" smtClean="0">
-                                        <a:latin typeface="Cambria Math" panose="02040503050406030204" pitchFamily="18" charset="0"/>
-                                      </a:rPr>
-                                      <m:t>𝑘</m:t>
-                                    </m:r>
-                                  </m:sup>
-                                </m:sSubSup>
-                                <m:r>
-                                  <a:rPr lang="en-CA" sz="1400" b="0" i="1" smtClean="0">
-                                    <a:latin typeface="Cambria Math" panose="02040503050406030204" pitchFamily="18" charset="0"/>
-                                  </a:rPr>
-                                  <m:t>=0</m:t>
-                                </m:r>
-                              </m:e>
-                            </m:nary>
-                          </m:oMath>
-                        </m:oMathPara>
-                      </a14:m>
-                      <a:endParaRPr lang="en-US" sz="1400" dirty="0"/>
-                    </a:p>
-                  </p:txBody>
-                </p:sp>
-              </mc:Choice>
-              <mc:Fallback>
-                <p:sp>
-                  <p:nvSpPr>
-                    <p:cNvPr id="28" name="TextBox 27">
-                      <a:extLst>
-                        <a:ext uri="{FF2B5EF4-FFF2-40B4-BE49-F238E27FC236}">
-                          <a16:creationId xmlns:a16="http://schemas.microsoft.com/office/drawing/2014/main" id="{35C20123-7DC2-768A-0491-0FF8B6604DD9}"/>
-                        </a:ext>
-                      </a:extLst>
-                    </p:cNvPr>
-                    <p:cNvSpPr txBox="1">
-                      <a:spLocks noRot="1" noChangeAspect="1" noMove="1" noResize="1" noEditPoints="1" noAdjustHandles="1" noChangeArrowheads="1" noChangeShapeType="1" noTextEdit="1"/>
-                    </p:cNvSpPr>
-                    <p:nvPr/>
-                  </p:nvSpPr>
-                  <p:spPr>
-                    <a:xfrm>
-                      <a:off x="2062312" y="1746719"/>
-                      <a:ext cx="1259767" cy="659283"/>
-                    </a:xfrm>
-                    <a:prstGeom prst="rect">
-                      <a:avLst/>
-                    </a:prstGeom>
-                    <a:blipFill>
-                      <a:blip r:embed="rId2"/>
-                      <a:stretch>
-                        <a:fillRect l="-44000" t="-111538" b="-153846"/>
-                      </a:stretch>
-                    </a:blipFill>
-                  </p:spPr>
-                  <p:txBody>
-                    <a:bodyPr/>
-                    <a:lstStyle/>
-                    <a:p>
-                      <a:r>
-                        <a:rPr lang="en-US">
-                          <a:noFill/>
-                        </a:rPr>
-                        <a:t> </a:t>
-                      </a:r>
-                    </a:p>
-                  </p:txBody>
-                </p:sp>
-              </mc:Fallback>
-            </mc:AlternateContent>
-            <mc:AlternateContent xmlns:mc="http://schemas.openxmlformats.org/markup-compatibility/2006">
-              <mc:Choice xmlns:a14="http://schemas.microsoft.com/office/drawing/2010/main" Requires="a14">
-                <p:sp>
-                  <p:nvSpPr>
-                    <p:cNvPr id="29" name="TextBox 28">
-                      <a:extLst>
-                        <a:ext uri="{FF2B5EF4-FFF2-40B4-BE49-F238E27FC236}">
-                          <a16:creationId xmlns:a16="http://schemas.microsoft.com/office/drawing/2014/main" id="{93E5D75B-AF46-6379-053A-FA3695C833F3}"/>
-                        </a:ext>
-                      </a:extLst>
-                    </p:cNvPr>
-                    <p:cNvSpPr txBox="1"/>
-                    <p:nvPr/>
-                  </p:nvSpPr>
-                  <p:spPr>
-                    <a:xfrm>
-                      <a:off x="4179169" y="1841489"/>
-                      <a:ext cx="773610" cy="311560"/>
-                    </a:xfrm>
-                    <a:prstGeom prst="rect">
-                      <a:avLst/>
-                    </a:prstGeom>
-                    <a:noFill/>
-                  </p:spPr>
-                  <p:txBody>
-                    <a:bodyPr wrap="none" rtlCol="0">
-                      <a:spAutoFit/>
-                    </a:bodyPr>
-                    <a:lstStyle/>
-                    <a:p>
-                      <a:pPr/>
-                      <a14:m>
-                        <m:oMathPara xmlns:m="http://schemas.openxmlformats.org/officeDocument/2006/math">
-                          <m:oMathParaPr>
-                            <m:jc m:val="centerGroup"/>
-                          </m:oMathParaPr>
-                          <m:oMath xmlns:m="http://schemas.openxmlformats.org/officeDocument/2006/math">
-                            <m:r>
-                              <a:rPr lang="en-US" sz="1400" i="1" smtClean="0">
-                                <a:latin typeface="Cambria Math" panose="02040503050406030204" pitchFamily="18" charset="0"/>
-                                <a:ea typeface="Cambria Math" panose="02040503050406030204" pitchFamily="18" charset="0"/>
-                              </a:rPr>
-                              <m:t>∀</m:t>
-                            </m:r>
-                            <m:r>
-                              <a:rPr lang="en-CA" sz="1400" b="0" i="1" smtClean="0">
-                                <a:latin typeface="Cambria Math" panose="02040503050406030204" pitchFamily="18" charset="0"/>
-                                <a:ea typeface="Cambria Math" panose="02040503050406030204" pitchFamily="18" charset="0"/>
-                              </a:rPr>
-                              <m:t>𝑖</m:t>
-                            </m:r>
-                            <m:r>
-                              <a:rPr lang="en-CA" sz="1400" b="0" i="1" smtClean="0">
-                                <a:latin typeface="Cambria Math" panose="02040503050406030204" pitchFamily="18" charset="0"/>
-                                <a:ea typeface="Cambria Math" panose="02040503050406030204" pitchFamily="18" charset="0"/>
-                              </a:rPr>
-                              <m:t>∈</m:t>
-                            </m:r>
-                            <m:sSup>
-                              <m:sSupPr>
-                                <m:ctrlPr>
-                                  <a:rPr lang="en-CA" sz="1400" b="0" i="1" smtClean="0">
-                                    <a:latin typeface="Cambria Math" panose="02040503050406030204" pitchFamily="18" charset="0"/>
-                                    <a:ea typeface="Cambria Math" panose="02040503050406030204" pitchFamily="18" charset="0"/>
-                                  </a:rPr>
-                                </m:ctrlPr>
-                              </m:sSupPr>
-                              <m:e>
-                                <m:r>
-                                  <a:rPr lang="en-CA" sz="1400" b="0" i="1" smtClean="0">
-                                    <a:latin typeface="Cambria Math" panose="02040503050406030204" pitchFamily="18" charset="0"/>
-                                    <a:ea typeface="Cambria Math" panose="02040503050406030204" pitchFamily="18" charset="0"/>
-                                  </a:rPr>
-                                  <m:t>𝐼</m:t>
-                                </m:r>
-                              </m:e>
-                              <m:sup>
-                                <m:r>
-                                  <a:rPr lang="en-CA" sz="1400" b="0" i="1" smtClean="0">
-                                    <a:latin typeface="Cambria Math" panose="02040503050406030204" pitchFamily="18" charset="0"/>
-                                    <a:ea typeface="Cambria Math" panose="02040503050406030204" pitchFamily="18" charset="0"/>
-                                  </a:rPr>
-                                  <m:t>𝑘</m:t>
-                                </m:r>
-                              </m:sup>
-                            </m:sSup>
-                          </m:oMath>
-                        </m:oMathPara>
-                      </a14:m>
-                      <a:endParaRPr lang="en-US" sz="1400" dirty="0"/>
-                    </a:p>
-                  </p:txBody>
-                </p:sp>
-              </mc:Choice>
-              <mc:Fallback>
-                <p:sp>
-                  <p:nvSpPr>
-                    <p:cNvPr id="29" name="TextBox 28">
-                      <a:extLst>
-                        <a:ext uri="{FF2B5EF4-FFF2-40B4-BE49-F238E27FC236}">
-                          <a16:creationId xmlns:a16="http://schemas.microsoft.com/office/drawing/2014/main" id="{93E5D75B-AF46-6379-053A-FA3695C833F3}"/>
-                        </a:ext>
-                      </a:extLst>
-                    </p:cNvPr>
-                    <p:cNvSpPr txBox="1">
-                      <a:spLocks noRot="1" noChangeAspect="1" noMove="1" noResize="1" noEditPoints="1" noAdjustHandles="1" noChangeArrowheads="1" noChangeShapeType="1" noTextEdit="1"/>
-                    </p:cNvSpPr>
-                    <p:nvPr/>
-                  </p:nvSpPr>
-                  <p:spPr>
-                    <a:xfrm>
-                      <a:off x="4179169" y="1841489"/>
-                      <a:ext cx="773610" cy="311560"/>
-                    </a:xfrm>
-                    <a:prstGeom prst="rect">
-                      <a:avLst/>
-                    </a:prstGeom>
-                    <a:blipFill>
-                      <a:blip r:embed="rId3"/>
-                      <a:stretch>
-                        <a:fillRect/>
-                      </a:stretch>
-                    </a:blipFill>
-                  </p:spPr>
-                  <p:txBody>
-                    <a:bodyPr/>
-                    <a:lstStyle/>
-                    <a:p>
-                      <a:r>
-                        <a:rPr lang="en-US">
-                          <a:noFill/>
-                        </a:rPr>
-                        <a:t> </a:t>
-                      </a:r>
-                    </a:p>
-                  </p:txBody>
-                </p:sp>
-              </mc:Fallback>
-            </mc:AlternateContent>
-            <mc:AlternateContent xmlns:mc="http://schemas.openxmlformats.org/markup-compatibility/2006">
-              <mc:Choice xmlns:a14="http://schemas.microsoft.com/office/drawing/2010/main" Requires="a14">
-                <p:sp>
-                  <p:nvSpPr>
-                    <p:cNvPr id="30" name="TextBox 29">
-                      <a:extLst>
-                        <a:ext uri="{FF2B5EF4-FFF2-40B4-BE49-F238E27FC236}">
-                          <a16:creationId xmlns:a16="http://schemas.microsoft.com/office/drawing/2014/main" id="{DBF9F7B2-1649-EE8D-1732-58CCA27595BA}"/>
-                        </a:ext>
-                      </a:extLst>
-                    </p:cNvPr>
-                    <p:cNvSpPr txBox="1"/>
-                    <p:nvPr/>
-                  </p:nvSpPr>
-                  <p:spPr>
-                    <a:xfrm>
-                      <a:off x="1800722" y="2570010"/>
-                      <a:ext cx="1982594" cy="349391"/>
-                    </a:xfrm>
-                    <a:prstGeom prst="rect">
-                      <a:avLst/>
-                    </a:prstGeom>
-                    <a:noFill/>
-                  </p:spPr>
-                  <p:txBody>
-                    <a:bodyPr wrap="none" rtlCol="0">
-                      <a:spAutoFit/>
-                    </a:bodyPr>
-                    <a:lstStyle/>
-                    <a:p>
-                      <a14:m>
+          <mc:AlternateContent xmlns:mc="http://schemas.openxmlformats.org/markup-compatibility/2006" xmlns:a14="http://schemas.microsoft.com/office/drawing/2010/main">
+            <mc:Choice Requires="a14">
+              <p:sp>
+                <p:nvSpPr>
+                  <p:cNvPr id="28" name="TextBox 27">
+                    <a:extLst>
+                      <a:ext uri="{FF2B5EF4-FFF2-40B4-BE49-F238E27FC236}">
+                        <a16:creationId xmlns:a16="http://schemas.microsoft.com/office/drawing/2014/main" id="{35C20123-7DC2-768A-0491-0FF8B6604DD9}"/>
+                      </a:ext>
+                    </a:extLst>
+                  </p:cNvPr>
+                  <p:cNvSpPr txBox="1"/>
+                  <p:nvPr/>
+                </p:nvSpPr>
+                <p:spPr>
+                  <a:xfrm>
+                    <a:off x="2062312" y="1746719"/>
+                    <a:ext cx="1259767" cy="659283"/>
+                  </a:xfrm>
+                  <a:prstGeom prst="rect">
+                    <a:avLst/>
+                  </a:prstGeom>
+                  <a:noFill/>
+                </p:spPr>
+                <p:txBody>
+                  <a:bodyPr wrap="none" rtlCol="0">
+                    <a:spAutoFit/>
+                  </a:bodyPr>
+                  <a:lstStyle/>
+                  <a:p>
+                    <a:pPr/>
+                    <a14:m>
+                      <m:oMathPara xmlns:m="http://schemas.openxmlformats.org/officeDocument/2006/math">
+                        <m:oMathParaPr>
+                          <m:jc m:val="centerGroup"/>
+                        </m:oMathParaPr>
                         <m:oMath xmlns:m="http://schemas.openxmlformats.org/officeDocument/2006/math">
-                          <m:sSubSup>
-                            <m:sSubSupPr>
+                          <m:nary>
+                            <m:naryPr>
+                              <m:chr m:val="∑"/>
+                              <m:supHide m:val="on"/>
                               <m:ctrlPr>
                                 <a:rPr lang="en-US" sz="1400" i="1" smtClean="0">
                                   <a:latin typeface="Cambria Math" panose="02040503050406030204" pitchFamily="18" charset="0"/>
                                 </a:rPr>
                               </m:ctrlPr>
-                            </m:sSubSupPr>
-                            <m:e>
-                              <m:r>
-                                <a:rPr lang="en-CA" sz="1400" b="0" i="1" smtClean="0">
-                                  <a:latin typeface="Cambria Math" panose="02040503050406030204" pitchFamily="18" charset="0"/>
-                                </a:rPr>
-                                <m:t>𝐿𝐵</m:t>
-                              </m:r>
-                            </m:e>
+                            </m:naryPr>
                             <m:sub>
                               <m:r>
+                                <m:rPr>
+                                  <m:brk m:alnAt="7"/>
+                                </m:rPr>
                                 <a:rPr lang="en-CA" sz="1400" b="0" i="1" smtClean="0">
                                   <a:latin typeface="Cambria Math" panose="02040503050406030204" pitchFamily="18" charset="0"/>
                                 </a:rPr>
                                 <m:t>𝑗</m:t>
                               </m:r>
+                              <m:r>
+                                <a:rPr lang="en-CA" sz="1400" b="0" i="1" smtClean="0">
+                                  <a:latin typeface="Cambria Math" panose="02040503050406030204" pitchFamily="18" charset="0"/>
+                                  <a:ea typeface="Cambria Math" panose="02040503050406030204" pitchFamily="18" charset="0"/>
+                                </a:rPr>
+                                <m:t>𝜖</m:t>
+                              </m:r>
+                              <m:sSup>
+                                <m:sSupPr>
+                                  <m:ctrlPr>
+                                    <a:rPr lang="en-CA" sz="1400" i="1" smtClean="0">
+                                      <a:latin typeface="Cambria Math" panose="02040503050406030204" pitchFamily="18" charset="0"/>
+                                      <a:ea typeface="Cambria Math" panose="02040503050406030204" pitchFamily="18" charset="0"/>
+                                    </a:rPr>
+                                  </m:ctrlPr>
+                                </m:sSupPr>
+                                <m:e>
+                                  <m:r>
+                                    <m:rPr>
+                                      <m:sty m:val="p"/>
+                                    </m:rPr>
+                                    <a:rPr lang="en-CA" sz="1400" b="0" i="0" smtClean="0">
+                                      <a:latin typeface="Cambria Math" panose="02040503050406030204" pitchFamily="18" charset="0"/>
+                                      <a:ea typeface="Cambria Math" panose="02040503050406030204" pitchFamily="18" charset="0"/>
+                                    </a:rPr>
+                                    <m:t>J</m:t>
+                                  </m:r>
+                                </m:e>
+                                <m:sup>
+                                  <m:r>
+                                    <m:rPr>
+                                      <m:sty m:val="p"/>
+                                    </m:rPr>
+                                    <a:rPr lang="en-CA" sz="1400" b="0" i="0" smtClean="0">
+                                      <a:latin typeface="Cambria Math" panose="02040503050406030204" pitchFamily="18" charset="0"/>
+                                      <a:ea typeface="Cambria Math" panose="02040503050406030204" pitchFamily="18" charset="0"/>
+                                    </a:rPr>
+                                    <m:t>k</m:t>
+                                  </m:r>
+                                </m:sup>
+                              </m:sSup>
                             </m:sub>
-                            <m:sup>
+                            <m:sup/>
+                            <m:e>
+                              <m:sSubSup>
+                                <m:sSubSupPr>
+                                  <m:ctrlPr>
+                                    <a:rPr lang="en-US" sz="1400" i="1" smtClean="0">
+                                      <a:latin typeface="Cambria Math" panose="02040503050406030204" pitchFamily="18" charset="0"/>
+                                    </a:rPr>
+                                  </m:ctrlPr>
+                                </m:sSubSupPr>
+                                <m:e>
+                                  <m:r>
+                                    <a:rPr lang="en-CA" sz="1400" b="0" i="1" smtClean="0">
+                                      <a:latin typeface="Cambria Math" panose="02040503050406030204" pitchFamily="18" charset="0"/>
+                                    </a:rPr>
+                                    <m:t>𝑆</m:t>
+                                  </m:r>
+                                </m:e>
+                                <m:sub>
+                                  <m:r>
+                                    <a:rPr lang="en-CA" sz="1400" b="0" i="1" smtClean="0">
+                                      <a:latin typeface="Cambria Math" panose="02040503050406030204" pitchFamily="18" charset="0"/>
+                                    </a:rPr>
+                                    <m:t>𝑖𝑗</m:t>
+                                  </m:r>
+                                </m:sub>
+                                <m:sup>
+                                  <m:r>
+                                    <a:rPr lang="en-CA" sz="1400" b="0" i="1" smtClean="0">
+                                      <a:latin typeface="Cambria Math" panose="02040503050406030204" pitchFamily="18" charset="0"/>
+                                    </a:rPr>
+                                    <m:t>𝑘</m:t>
+                                  </m:r>
+                                </m:sup>
+                              </m:sSubSup>
+                              <m:sSubSup>
+                                <m:sSubSupPr>
+                                  <m:ctrlPr>
+                                    <a:rPr lang="en-US" sz="1400" i="1" smtClean="0">
+                                      <a:latin typeface="Cambria Math" panose="02040503050406030204" pitchFamily="18" charset="0"/>
+                                    </a:rPr>
+                                  </m:ctrlPr>
+                                </m:sSubSupPr>
+                                <m:e>
+                                  <m:r>
+                                    <a:rPr lang="en-CA" sz="1400" b="0" i="1" smtClean="0">
+                                      <a:latin typeface="Cambria Math" panose="02040503050406030204" pitchFamily="18" charset="0"/>
+                                    </a:rPr>
+                                    <m:t>𝑉</m:t>
+                                  </m:r>
+                                </m:e>
+                                <m:sub>
+                                  <m:r>
+                                    <a:rPr lang="en-CA" sz="1400" b="0" i="1" smtClean="0">
+                                      <a:latin typeface="Cambria Math" panose="02040503050406030204" pitchFamily="18" charset="0"/>
+                                    </a:rPr>
+                                    <m:t>𝑗</m:t>
+                                  </m:r>
+                                </m:sub>
+                                <m:sup>
+                                  <m:r>
+                                    <a:rPr lang="en-CA" sz="1400" b="0" i="1" smtClean="0">
+                                      <a:latin typeface="Cambria Math" panose="02040503050406030204" pitchFamily="18" charset="0"/>
+                                    </a:rPr>
+                                    <m:t>𝑘</m:t>
+                                  </m:r>
+                                </m:sup>
+                              </m:sSubSup>
                               <m:r>
                                 <a:rPr lang="en-CA" sz="1400" b="0" i="1" smtClean="0">
                                   <a:latin typeface="Cambria Math" panose="02040503050406030204" pitchFamily="18" charset="0"/>
                                 </a:rPr>
-                                <m:t>𝑘</m:t>
-                              </m:r>
-                            </m:sup>
-                          </m:sSubSup>
-                          <m:sSup>
-                            <m:sSupPr>
-                              <m:ctrlPr>
-                                <a:rPr lang="en-US" sz="1400" i="1" smtClean="0">
-                                  <a:latin typeface="Cambria Math" panose="02040503050406030204" pitchFamily="18" charset="0"/>
-                                </a:rPr>
-                              </m:ctrlPr>
-                            </m:sSupPr>
-                            <m:e>
-                              <m:r>
-                                <a:rPr lang="en-CA" sz="1400" b="0" i="1" smtClean="0">
-                                  <a:latin typeface="Cambria Math" panose="02040503050406030204" pitchFamily="18" charset="0"/>
-                                </a:rPr>
-                                <m:t>𝑋</m:t>
+                                <m:t>=0</m:t>
                               </m:r>
                             </m:e>
-                            <m:sup>
-                              <m:r>
-                                <a:rPr lang="en-CA" sz="1400" b="0" i="1" smtClean="0">
-                                  <a:latin typeface="Cambria Math" panose="02040503050406030204" pitchFamily="18" charset="0"/>
-                                </a:rPr>
-                                <m:t>𝑘</m:t>
-                              </m:r>
-                            </m:sup>
-                          </m:sSup>
+                          </m:nary>
+                        </m:oMath>
+                      </m:oMathPara>
+                    </a14:m>
+                    <a:endParaRPr lang="en-US" sz="1400" dirty="0"/>
+                  </a:p>
+                </p:txBody>
+              </p:sp>
+            </mc:Choice>
+            <mc:Fallback xmlns="">
+              <p:sp>
+                <p:nvSpPr>
+                  <p:cNvPr id="28" name="TextBox 27">
+                    <a:extLst>
+                      <a:ext uri="{FF2B5EF4-FFF2-40B4-BE49-F238E27FC236}">
+                        <a16:creationId xmlns:a16="http://schemas.microsoft.com/office/drawing/2014/main" id="{35C20123-7DC2-768A-0491-0FF8B6604DD9}"/>
+                      </a:ext>
+                    </a:extLst>
+                  </p:cNvPr>
+                  <p:cNvSpPr txBox="1">
+                    <a:spLocks noRot="1" noChangeAspect="1" noMove="1" noResize="1" noEditPoints="1" noAdjustHandles="1" noChangeArrowheads="1" noChangeShapeType="1" noTextEdit="1"/>
+                  </p:cNvSpPr>
+                  <p:nvPr/>
+                </p:nvSpPr>
+                <p:spPr>
+                  <a:xfrm>
+                    <a:off x="2062312" y="1746719"/>
+                    <a:ext cx="1259767" cy="659283"/>
+                  </a:xfrm>
+                  <a:prstGeom prst="rect">
+                    <a:avLst/>
+                  </a:prstGeom>
+                  <a:blipFill>
+                    <a:blip r:embed="rId2"/>
+                    <a:stretch>
+                      <a:fillRect l="-44000" t="-111538" b="-153846"/>
+                    </a:stretch>
+                  </a:blipFill>
+                </p:spPr>
+                <p:txBody>
+                  <a:bodyPr/>
+                  <a:lstStyle/>
+                  <a:p>
+                    <a:r>
+                      <a:rPr lang="en-US">
+                        <a:noFill/>
+                      </a:rPr>
+                      <a:t> </a:t>
+                    </a:r>
+                  </a:p>
+                </p:txBody>
+              </p:sp>
+            </mc:Fallback>
+          </mc:AlternateContent>
+          <mc:AlternateContent xmlns:mc="http://schemas.openxmlformats.org/markup-compatibility/2006" xmlns:a14="http://schemas.microsoft.com/office/drawing/2010/main">
+            <mc:Choice Requires="a14">
+              <p:sp>
+                <p:nvSpPr>
+                  <p:cNvPr id="29" name="TextBox 28">
+                    <a:extLst>
+                      <a:ext uri="{FF2B5EF4-FFF2-40B4-BE49-F238E27FC236}">
+                        <a16:creationId xmlns:a16="http://schemas.microsoft.com/office/drawing/2014/main" id="{93E5D75B-AF46-6379-053A-FA3695C833F3}"/>
+                      </a:ext>
+                    </a:extLst>
+                  </p:cNvPr>
+                  <p:cNvSpPr txBox="1"/>
+                  <p:nvPr/>
+                </p:nvSpPr>
+                <p:spPr>
+                  <a:xfrm>
+                    <a:off x="4179169" y="1841489"/>
+                    <a:ext cx="773610" cy="311560"/>
+                  </a:xfrm>
+                  <a:prstGeom prst="rect">
+                    <a:avLst/>
+                  </a:prstGeom>
+                  <a:noFill/>
+                </p:spPr>
+                <p:txBody>
+                  <a:bodyPr wrap="none" rtlCol="0">
+                    <a:spAutoFit/>
+                  </a:bodyPr>
+                  <a:lstStyle/>
+                  <a:p>
+                    <a:pPr/>
+                    <a14:m>
+                      <m:oMathPara xmlns:m="http://schemas.openxmlformats.org/officeDocument/2006/math">
+                        <m:oMathParaPr>
+                          <m:jc m:val="centerGroup"/>
+                        </m:oMathParaPr>
+                        <m:oMath xmlns:m="http://schemas.openxmlformats.org/officeDocument/2006/math">
                           <m:r>
                             <a:rPr lang="en-US" sz="1400" i="1" smtClean="0">
                               <a:latin typeface="Cambria Math" panose="02040503050406030204" pitchFamily="18" charset="0"/>
                               <a:ea typeface="Cambria Math" panose="02040503050406030204" pitchFamily="18" charset="0"/>
                             </a:rPr>
-                            <m:t>≤</m:t>
+                            <m:t>∀</m:t>
                           </m:r>
-                          <m:sSubSup>
-                            <m:sSubSupPr>
-                              <m:ctrlPr>
-                                <a:rPr lang="en-US" sz="1400" i="1" smtClean="0">
-                                  <a:latin typeface="Cambria Math" panose="02040503050406030204" pitchFamily="18" charset="0"/>
-                                  <a:ea typeface="Cambria Math" panose="02040503050406030204" pitchFamily="18" charset="0"/>
-                                </a:rPr>
-                              </m:ctrlPr>
-                            </m:sSubSupPr>
-                            <m:e>
-                              <m:r>
-                                <a:rPr lang="en-CA" sz="1400" b="0" i="1" smtClean="0">
-                                  <a:latin typeface="Cambria Math" panose="02040503050406030204" pitchFamily="18" charset="0"/>
-                                  <a:ea typeface="Cambria Math" panose="02040503050406030204" pitchFamily="18" charset="0"/>
-                                </a:rPr>
-                                <m:t>𝑉</m:t>
-                              </m:r>
-                            </m:e>
-                            <m:sub>
-                              <m:r>
-                                <a:rPr lang="en-CA" sz="1400" b="0" i="1" smtClean="0">
-                                  <a:latin typeface="Cambria Math" panose="02040503050406030204" pitchFamily="18" charset="0"/>
-                                  <a:ea typeface="Cambria Math" panose="02040503050406030204" pitchFamily="18" charset="0"/>
-                                </a:rPr>
-                                <m:t>𝑗</m:t>
-                              </m:r>
-                            </m:sub>
-                            <m:sup>
-                              <m:r>
-                                <a:rPr lang="en-CA" sz="1400" b="0" i="1" smtClean="0">
-                                  <a:latin typeface="Cambria Math" panose="02040503050406030204" pitchFamily="18" charset="0"/>
-                                  <a:ea typeface="Cambria Math" panose="02040503050406030204" pitchFamily="18" charset="0"/>
-                                </a:rPr>
-                                <m:t>𝑘</m:t>
-                              </m:r>
-                            </m:sup>
-                          </m:sSubSup>
                           <m:r>
-                            <a:rPr lang="en-US" sz="1400" i="1" smtClean="0">
+                            <a:rPr lang="en-CA" sz="1400" b="0" i="1" smtClean="0">
                               <a:latin typeface="Cambria Math" panose="02040503050406030204" pitchFamily="18" charset="0"/>
                               <a:ea typeface="Cambria Math" panose="02040503050406030204" pitchFamily="18" charset="0"/>
                             </a:rPr>
-                            <m:t>≤</m:t>
+                            <m:t>𝑖</m:t>
                           </m:r>
-                          <m:sSubSup>
-                            <m:sSubSupPr>
-                              <m:ctrlPr>
-                                <a:rPr lang="en-US" sz="1400" i="1" smtClean="0">
-                                  <a:latin typeface="Cambria Math" panose="02040503050406030204" pitchFamily="18" charset="0"/>
-                                  <a:ea typeface="Cambria Math" panose="02040503050406030204" pitchFamily="18" charset="0"/>
-                                </a:rPr>
-                              </m:ctrlPr>
-                            </m:sSubSupPr>
-                            <m:e>
-                              <m:r>
-                                <a:rPr lang="en-CA" sz="1400" b="0" i="1" smtClean="0">
-                                  <a:latin typeface="Cambria Math" panose="02040503050406030204" pitchFamily="18" charset="0"/>
-                                  <a:ea typeface="Cambria Math" panose="02040503050406030204" pitchFamily="18" charset="0"/>
-                                </a:rPr>
-                                <m:t>𝑈𝐵</m:t>
-                              </m:r>
-                            </m:e>
-                            <m:sub>
-                              <m:r>
-                                <a:rPr lang="en-CA" sz="1400" b="0" i="1" smtClean="0">
-                                  <a:latin typeface="Cambria Math" panose="02040503050406030204" pitchFamily="18" charset="0"/>
-                                  <a:ea typeface="Cambria Math" panose="02040503050406030204" pitchFamily="18" charset="0"/>
-                                </a:rPr>
-                                <m:t>𝑗</m:t>
-                              </m:r>
-                            </m:sub>
-                            <m:sup>
-                              <m:r>
-                                <a:rPr lang="en-CA" sz="1400" b="0" i="1" smtClean="0">
-                                  <a:latin typeface="Cambria Math" panose="02040503050406030204" pitchFamily="18" charset="0"/>
-                                  <a:ea typeface="Cambria Math" panose="02040503050406030204" pitchFamily="18" charset="0"/>
-                                </a:rPr>
-                                <m:t>𝑘</m:t>
-                              </m:r>
-                            </m:sup>
-                          </m:sSubSup>
+                          <m:r>
+                            <a:rPr lang="en-CA" sz="1400" b="0" i="1" smtClean="0">
+                              <a:latin typeface="Cambria Math" panose="02040503050406030204" pitchFamily="18" charset="0"/>
+                              <a:ea typeface="Cambria Math" panose="02040503050406030204" pitchFamily="18" charset="0"/>
+                            </a:rPr>
+                            <m:t>∈</m:t>
+                          </m:r>
                           <m:sSup>
                             <m:sSupPr>
                               <m:ctrlPr>
-                                <a:rPr lang="en-US" sz="1400" i="1" smtClean="0">
+                                <a:rPr lang="en-CA" sz="1400" b="0" i="1" smtClean="0">
                                   <a:latin typeface="Cambria Math" panose="02040503050406030204" pitchFamily="18" charset="0"/>
                                   <a:ea typeface="Cambria Math" panose="02040503050406030204" pitchFamily="18" charset="0"/>
                                 </a:rPr>
@@ -4024,7 +3874,7 @@
                                   <a:latin typeface="Cambria Math" panose="02040503050406030204" pitchFamily="18" charset="0"/>
                                   <a:ea typeface="Cambria Math" panose="02040503050406030204" pitchFamily="18" charset="0"/>
                                 </a:rPr>
-                                <m:t>𝑋</m:t>
+                                <m:t>𝐼</m:t>
                               </m:r>
                             </m:e>
                             <m:sup>
@@ -4038,1985 +3888,66 @@
                             </m:sup>
                           </m:sSup>
                         </m:oMath>
-                      </a14:m>
-                      <a:r>
-                        <a:rPr lang="en-US" sz="1400" dirty="0"/>
-                        <a:t>,</a:t>
-                      </a:r>
-                    </a:p>
-                  </p:txBody>
-                </p:sp>
-              </mc:Choice>
-              <mc:Fallback>
-                <p:sp>
-                  <p:nvSpPr>
-                    <p:cNvPr id="30" name="TextBox 29">
-                      <a:extLst>
-                        <a:ext uri="{FF2B5EF4-FFF2-40B4-BE49-F238E27FC236}">
-                          <a16:creationId xmlns:a16="http://schemas.microsoft.com/office/drawing/2014/main" id="{DBF9F7B2-1649-EE8D-1732-58CCA27595BA}"/>
-                        </a:ext>
-                      </a:extLst>
-                    </p:cNvPr>
-                    <p:cNvSpPr txBox="1">
-                      <a:spLocks noRot="1" noChangeAspect="1" noMove="1" noResize="1" noEditPoints="1" noAdjustHandles="1" noChangeArrowheads="1" noChangeShapeType="1" noTextEdit="1"/>
-                    </p:cNvSpPr>
-                    <p:nvPr/>
-                  </p:nvSpPr>
-                  <p:spPr>
-                    <a:xfrm>
-                      <a:off x="1800722" y="2570010"/>
-                      <a:ext cx="1982594" cy="349391"/>
-                    </a:xfrm>
-                    <a:prstGeom prst="rect">
-                      <a:avLst/>
-                    </a:prstGeom>
-                    <a:blipFill>
-                      <a:blip r:embed="rId4"/>
-                      <a:stretch>
-                        <a:fillRect b="-13793"/>
-                      </a:stretch>
-                    </a:blipFill>
-                  </p:spPr>
-                  <p:txBody>
-                    <a:bodyPr/>
-                    <a:lstStyle/>
-                    <a:p>
-                      <a:r>
-                        <a:rPr lang="en-US">
-                          <a:noFill/>
-                        </a:rPr>
-                        <a:t> </a:t>
-                      </a:r>
-                    </a:p>
-                  </p:txBody>
-                </p:sp>
-              </mc:Fallback>
-            </mc:AlternateContent>
-            <mc:AlternateContent xmlns:mc="http://schemas.openxmlformats.org/markup-compatibility/2006">
-              <mc:Choice xmlns:a14="http://schemas.microsoft.com/office/drawing/2010/main" Requires="a14">
-                <p:sp>
-                  <p:nvSpPr>
-                    <p:cNvPr id="31" name="TextBox 30">
-                      <a:extLst>
-                        <a:ext uri="{FF2B5EF4-FFF2-40B4-BE49-F238E27FC236}">
-                          <a16:creationId xmlns:a16="http://schemas.microsoft.com/office/drawing/2014/main" id="{E7E80130-5F7A-F0E0-68B6-C968502458B9}"/>
-                        </a:ext>
-                      </a:extLst>
-                    </p:cNvPr>
-                    <p:cNvSpPr txBox="1"/>
-                    <p:nvPr/>
-                  </p:nvSpPr>
-                  <p:spPr>
-                    <a:xfrm>
-                      <a:off x="4174361" y="2544233"/>
-                      <a:ext cx="778418" cy="311560"/>
-                    </a:xfrm>
-                    <a:prstGeom prst="rect">
-                      <a:avLst/>
-                    </a:prstGeom>
-                    <a:noFill/>
-                  </p:spPr>
-                  <p:txBody>
-                    <a:bodyPr wrap="none" rtlCol="0">
-                      <a:spAutoFit/>
-                    </a:bodyPr>
-                    <a:lstStyle/>
-                    <a:p>
-                      <a:pPr/>
-                      <a14:m>
-                        <m:oMathPara xmlns:m="http://schemas.openxmlformats.org/officeDocument/2006/math">
-                          <m:oMathParaPr>
-                            <m:jc m:val="centerGroup"/>
-                          </m:oMathParaPr>
-                          <m:oMath xmlns:m="http://schemas.openxmlformats.org/officeDocument/2006/math">
-                            <m:r>
-                              <a:rPr lang="en-US" sz="1400" i="1" smtClean="0">
-                                <a:latin typeface="Cambria Math" panose="02040503050406030204" pitchFamily="18" charset="0"/>
-                                <a:ea typeface="Cambria Math" panose="02040503050406030204" pitchFamily="18" charset="0"/>
-                              </a:rPr>
-                              <m:t>∀</m:t>
-                            </m:r>
-                            <m:r>
-                              <a:rPr lang="en-CA" sz="1400" b="0" i="1" smtClean="0">
-                                <a:latin typeface="Cambria Math" panose="02040503050406030204" pitchFamily="18" charset="0"/>
-                                <a:ea typeface="Cambria Math" panose="02040503050406030204" pitchFamily="18" charset="0"/>
-                              </a:rPr>
-                              <m:t>𝑗</m:t>
-                            </m:r>
-                            <m:r>
-                              <a:rPr lang="en-CA" sz="1400" b="0" i="1" smtClean="0">
-                                <a:latin typeface="Cambria Math" panose="02040503050406030204" pitchFamily="18" charset="0"/>
-                                <a:ea typeface="Cambria Math" panose="02040503050406030204" pitchFamily="18" charset="0"/>
-                              </a:rPr>
-                              <m:t>∈</m:t>
-                            </m:r>
-                            <m:sSup>
-                              <m:sSupPr>
-                                <m:ctrlPr>
-                                  <a:rPr lang="en-CA" sz="1400" b="0" i="1" smtClean="0">
-                                    <a:latin typeface="Cambria Math" panose="02040503050406030204" pitchFamily="18" charset="0"/>
-                                    <a:ea typeface="Cambria Math" panose="02040503050406030204" pitchFamily="18" charset="0"/>
-                                  </a:rPr>
-                                </m:ctrlPr>
-                              </m:sSupPr>
-                              <m:e>
-                                <m:r>
-                                  <a:rPr lang="en-CA" sz="1400" b="0" i="1" smtClean="0">
-                                    <a:latin typeface="Cambria Math" panose="02040503050406030204" pitchFamily="18" charset="0"/>
-                                    <a:ea typeface="Cambria Math" panose="02040503050406030204" pitchFamily="18" charset="0"/>
-                                  </a:rPr>
-                                  <m:t>𝐽</m:t>
-                                </m:r>
-                              </m:e>
-                              <m:sup>
-                                <m:r>
-                                  <a:rPr lang="en-CA" sz="1400" b="0" i="1" smtClean="0">
-                                    <a:latin typeface="Cambria Math" panose="02040503050406030204" pitchFamily="18" charset="0"/>
-                                    <a:ea typeface="Cambria Math" panose="02040503050406030204" pitchFamily="18" charset="0"/>
-                                  </a:rPr>
-                                  <m:t>𝑘</m:t>
-                                </m:r>
-                              </m:sup>
-                            </m:sSup>
-                          </m:oMath>
-                        </m:oMathPara>
-                      </a14:m>
-                      <a:endParaRPr lang="en-US" sz="1400" dirty="0"/>
-                    </a:p>
-                  </p:txBody>
-                </p:sp>
-              </mc:Choice>
-              <mc:Fallback>
-                <p:sp>
-                  <p:nvSpPr>
-                    <p:cNvPr id="31" name="TextBox 30">
-                      <a:extLst>
-                        <a:ext uri="{FF2B5EF4-FFF2-40B4-BE49-F238E27FC236}">
-                          <a16:creationId xmlns:a16="http://schemas.microsoft.com/office/drawing/2014/main" id="{E7E80130-5F7A-F0E0-68B6-C968502458B9}"/>
-                        </a:ext>
-                      </a:extLst>
-                    </p:cNvPr>
-                    <p:cNvSpPr txBox="1">
-                      <a:spLocks noRot="1" noChangeAspect="1" noMove="1" noResize="1" noEditPoints="1" noAdjustHandles="1" noChangeArrowheads="1" noChangeShapeType="1" noTextEdit="1"/>
-                    </p:cNvSpPr>
-                    <p:nvPr/>
-                  </p:nvSpPr>
-                  <p:spPr>
-                    <a:xfrm>
-                      <a:off x="4174361" y="2544233"/>
-                      <a:ext cx="778418" cy="311560"/>
-                    </a:xfrm>
-                    <a:prstGeom prst="rect">
-                      <a:avLst/>
-                    </a:prstGeom>
-                    <a:blipFill>
-                      <a:blip r:embed="rId5"/>
-                      <a:stretch>
-                        <a:fillRect b="-3846"/>
-                      </a:stretch>
-                    </a:blipFill>
-                  </p:spPr>
-                  <p:txBody>
-                    <a:bodyPr/>
-                    <a:lstStyle/>
-                    <a:p>
-                      <a:r>
-                        <a:rPr lang="en-US">
-                          <a:noFill/>
-                        </a:rPr>
-                        <a:t> </a:t>
-                      </a:r>
-                    </a:p>
-                  </p:txBody>
-                </p:sp>
-              </mc:Fallback>
-            </mc:AlternateContent>
-            <mc:AlternateContent xmlns:mc="http://schemas.openxmlformats.org/markup-compatibility/2006">
-              <mc:Choice xmlns:a14="http://schemas.microsoft.com/office/drawing/2010/main" Requires="a14">
-                <p:sp>
-                  <p:nvSpPr>
-                    <p:cNvPr id="32" name="TextBox 31">
-                      <a:extLst>
-                        <a:ext uri="{FF2B5EF4-FFF2-40B4-BE49-F238E27FC236}">
-                          <a16:creationId xmlns:a16="http://schemas.microsoft.com/office/drawing/2014/main" id="{39F8F641-0EE6-BE06-D369-C6C437169DE8}"/>
-                        </a:ext>
-                      </a:extLst>
-                    </p:cNvPr>
-                    <p:cNvSpPr txBox="1"/>
-                    <p:nvPr/>
-                  </p:nvSpPr>
-                  <p:spPr>
-                    <a:xfrm>
-                      <a:off x="1955351" y="3030601"/>
-                      <a:ext cx="1407885" cy="325025"/>
-                    </a:xfrm>
-                    <a:prstGeom prst="rect">
-                      <a:avLst/>
-                    </a:prstGeom>
-                    <a:noFill/>
-                  </p:spPr>
-                  <p:txBody>
-                    <a:bodyPr wrap="none" rtlCol="0">
-                      <a:spAutoFit/>
-                    </a:bodyPr>
-                    <a:lstStyle/>
-                    <a:p>
-                      <a:pPr/>
-                      <a14:m>
-                        <m:oMathPara xmlns:m="http://schemas.openxmlformats.org/officeDocument/2006/math">
-                          <m:oMathParaPr>
-                            <m:jc m:val="centerGroup"/>
-                          </m:oMathParaPr>
-                          <m:oMath xmlns:m="http://schemas.openxmlformats.org/officeDocument/2006/math">
-                            <m:sSubSup>
-                              <m:sSubSupPr>
-                                <m:ctrlPr>
-                                  <a:rPr lang="en-US" sz="1400" i="1" smtClean="0">
-                                    <a:latin typeface="Cambria Math" panose="02040503050406030204" pitchFamily="18" charset="0"/>
-                                  </a:rPr>
-                                </m:ctrlPr>
-                              </m:sSubSupPr>
-                              <m:e>
-                                <m:r>
-                                  <a:rPr lang="en-CA" sz="1400" b="0" i="1" smtClean="0">
-                                    <a:latin typeface="Cambria Math" panose="02040503050406030204" pitchFamily="18" charset="0"/>
-                                  </a:rPr>
-                                  <m:t>𝑉</m:t>
-                                </m:r>
-                              </m:e>
-                              <m:sub>
-                                <m:r>
-                                  <a:rPr lang="en-CA" sz="1400" b="0" i="1" smtClean="0">
-                                    <a:latin typeface="Cambria Math" panose="02040503050406030204" pitchFamily="18" charset="0"/>
-                                  </a:rPr>
-                                  <m:t>𝑏𝑖𝑜𝑚𝑎𝑠𝑠</m:t>
-                                </m:r>
-                              </m:sub>
-                              <m:sup>
-                                <m:r>
-                                  <a:rPr lang="en-CA" sz="1400" b="0" i="1" smtClean="0">
-                                    <a:latin typeface="Cambria Math" panose="02040503050406030204" pitchFamily="18" charset="0"/>
-                                  </a:rPr>
-                                  <m:t>𝑘</m:t>
-                                </m:r>
-                              </m:sup>
-                            </m:sSubSup>
-                            <m:r>
-                              <a:rPr lang="en-CA" sz="1400" b="0" i="1" smtClean="0">
-                                <a:latin typeface="Cambria Math" panose="02040503050406030204" pitchFamily="18" charset="0"/>
-                              </a:rPr>
-                              <m:t>=</m:t>
-                            </m:r>
-                            <m:sSup>
-                              <m:sSupPr>
-                                <m:ctrlPr>
-                                  <a:rPr lang="en-CA" sz="1400" b="0" i="1" smtClean="0">
-                                    <a:latin typeface="Cambria Math" panose="02040503050406030204" pitchFamily="18" charset="0"/>
-                                  </a:rPr>
-                                </m:ctrlPr>
-                              </m:sSupPr>
-                              <m:e>
-                                <m:r>
-                                  <a:rPr lang="en-CA" sz="1400" b="0" i="1" smtClean="0">
-                                    <a:latin typeface="Cambria Math" panose="02040503050406030204" pitchFamily="18" charset="0"/>
-                                  </a:rPr>
-                                  <m:t>𝑋</m:t>
-                                </m:r>
-                              </m:e>
-                              <m:sup>
-                                <m:r>
-                                  <a:rPr lang="en-CA" sz="1400" b="0" i="1" smtClean="0">
-                                    <a:latin typeface="Cambria Math" panose="02040503050406030204" pitchFamily="18" charset="0"/>
-                                  </a:rPr>
-                                  <m:t>𝑘</m:t>
-                                </m:r>
-                              </m:sup>
-                            </m:sSup>
-                            <m:r>
-                              <a:rPr lang="en-CA" sz="1400" b="0" i="1" smtClean="0">
-                                <a:latin typeface="Cambria Math" panose="02040503050406030204" pitchFamily="18" charset="0"/>
-                                <a:ea typeface="Cambria Math" panose="02040503050406030204" pitchFamily="18" charset="0"/>
-                              </a:rPr>
-                              <m:t>𝜇</m:t>
-                            </m:r>
-                          </m:oMath>
-                        </m:oMathPara>
-                      </a14:m>
-                      <a:endParaRPr lang="en-US" sz="1400" dirty="0"/>
-                    </a:p>
-                  </p:txBody>
-                </p:sp>
-              </mc:Choice>
-              <mc:Fallback>
-                <p:sp>
-                  <p:nvSpPr>
-                    <p:cNvPr id="32" name="TextBox 31">
-                      <a:extLst>
-                        <a:ext uri="{FF2B5EF4-FFF2-40B4-BE49-F238E27FC236}">
-                          <a16:creationId xmlns:a16="http://schemas.microsoft.com/office/drawing/2014/main" id="{39F8F641-0EE6-BE06-D369-C6C437169DE8}"/>
-                        </a:ext>
-                      </a:extLst>
-                    </p:cNvPr>
-                    <p:cNvSpPr txBox="1">
-                      <a:spLocks noRot="1" noChangeAspect="1" noMove="1" noResize="1" noEditPoints="1" noAdjustHandles="1" noChangeArrowheads="1" noChangeShapeType="1" noTextEdit="1"/>
-                    </p:cNvSpPr>
-                    <p:nvPr/>
-                  </p:nvSpPr>
-                  <p:spPr>
-                    <a:xfrm>
-                      <a:off x="1955351" y="3030601"/>
-                      <a:ext cx="1407885" cy="325025"/>
-                    </a:xfrm>
-                    <a:prstGeom prst="rect">
-                      <a:avLst/>
-                    </a:prstGeom>
-                    <a:blipFill>
-                      <a:blip r:embed="rId6"/>
-                      <a:stretch>
-                        <a:fillRect/>
-                      </a:stretch>
-                    </a:blipFill>
-                  </p:spPr>
-                  <p:txBody>
-                    <a:bodyPr/>
-                    <a:lstStyle/>
-                    <a:p>
-                      <a:r>
-                        <a:rPr lang="en-US">
-                          <a:noFill/>
-                        </a:rPr>
-                        <a:t> </a:t>
-                      </a:r>
-                    </a:p>
-                  </p:txBody>
-                </p:sp>
-              </mc:Fallback>
-            </mc:AlternateContent>
-            <mc:AlternateContent xmlns:mc="http://schemas.openxmlformats.org/markup-compatibility/2006" xmlns:a14="http://schemas.microsoft.com/office/drawing/2010/main">
-              <mc:Choice Requires="a14">
-                <p:sp>
-                  <p:nvSpPr>
-                    <p:cNvPr id="33" name="TextBox 32">
-                      <a:extLst>
-                        <a:ext uri="{FF2B5EF4-FFF2-40B4-BE49-F238E27FC236}">
-                          <a16:creationId xmlns:a16="http://schemas.microsoft.com/office/drawing/2014/main" id="{B27348F5-D528-FF99-BC15-88F91B7FE3EC}"/>
-                        </a:ext>
-                      </a:extLst>
-                    </p:cNvPr>
-                    <p:cNvSpPr txBox="1"/>
-                    <p:nvPr/>
-                  </p:nvSpPr>
-                  <p:spPr>
-                    <a:xfrm>
-                      <a:off x="2116897" y="3601662"/>
-                      <a:ext cx="1031571" cy="311560"/>
-                    </a:xfrm>
-                    <a:prstGeom prst="rect">
-                      <a:avLst/>
-                    </a:prstGeom>
-                    <a:noFill/>
-                  </p:spPr>
-                  <p:txBody>
-                    <a:bodyPr wrap="square" rtlCol="0">
-                      <a:spAutoFit/>
-                    </a:bodyPr>
-                    <a:lstStyle/>
-                    <a:p>
-                      <a:pPr/>
-                      <a14:m>
-                        <m:oMathPara xmlns:m="http://schemas.openxmlformats.org/officeDocument/2006/math">
-                          <m:oMathParaPr>
-                            <m:jc m:val="centerGroup"/>
-                          </m:oMathParaPr>
-                          <m:oMath xmlns:m="http://schemas.openxmlformats.org/officeDocument/2006/math">
-                            <m:sSup>
-                              <m:sSupPr>
-                                <m:ctrlPr>
-                                  <a:rPr lang="en-US" sz="1400" i="1" smtClean="0">
-                                    <a:latin typeface="Cambria Math" panose="02040503050406030204" pitchFamily="18" charset="0"/>
-                                  </a:rPr>
-                                </m:ctrlPr>
-                              </m:sSupPr>
-                              <m:e>
-                                <m:r>
-                                  <a:rPr lang="en-CA" sz="1400" b="0" i="1" smtClean="0">
-                                    <a:latin typeface="Cambria Math" panose="02040503050406030204" pitchFamily="18" charset="0"/>
-                                  </a:rPr>
-                                  <m:t>𝑋</m:t>
-                                </m:r>
-                              </m:e>
-                              <m:sup>
-                                <m:r>
-                                  <a:rPr lang="en-CA" sz="1400" b="0" i="1" smtClean="0">
-                                    <a:latin typeface="Cambria Math" panose="02040503050406030204" pitchFamily="18" charset="0"/>
-                                  </a:rPr>
-                                  <m:t>𝑘</m:t>
-                                </m:r>
-                              </m:sup>
-                            </m:sSup>
-                            <m:r>
-                              <a:rPr lang="en-US" sz="1400" i="1" smtClean="0">
-                                <a:latin typeface="Cambria Math" panose="02040503050406030204" pitchFamily="18" charset="0"/>
-                                <a:ea typeface="Cambria Math" panose="02040503050406030204" pitchFamily="18" charset="0"/>
-                              </a:rPr>
-                              <m:t>≥</m:t>
-                            </m:r>
-                            <m:r>
-                              <a:rPr lang="en-CA" sz="1400" b="0" i="1" smtClean="0">
-                                <a:latin typeface="Cambria Math" panose="02040503050406030204" pitchFamily="18" charset="0"/>
-                                <a:ea typeface="Cambria Math" panose="02040503050406030204" pitchFamily="18" charset="0"/>
-                              </a:rPr>
-                              <m:t>0</m:t>
-                            </m:r>
-                          </m:oMath>
-                        </m:oMathPara>
-                      </a14:m>
-                      <a:endParaRPr lang="en-US" sz="1400" dirty="0"/>
-                    </a:p>
-                  </p:txBody>
-                </p:sp>
-              </mc:Choice>
-              <mc:Fallback xmlns="">
-                <p:sp>
-                  <p:nvSpPr>
-                    <p:cNvPr id="8" name="TextBox 7">
-                      <a:extLst>
-                        <a:ext uri="{FF2B5EF4-FFF2-40B4-BE49-F238E27FC236}">
-                          <a16:creationId xmlns:a16="http://schemas.microsoft.com/office/drawing/2014/main" id="{DFD53736-C1F2-CA87-2D6B-04B5B8C4F5D6}"/>
-                        </a:ext>
-                      </a:extLst>
-                    </p:cNvPr>
-                    <p:cNvSpPr txBox="1">
-                      <a:spLocks noRot="1" noChangeAspect="1" noMove="1" noResize="1" noEditPoints="1" noAdjustHandles="1" noChangeArrowheads="1" noChangeShapeType="1" noTextEdit="1"/>
-                    </p:cNvSpPr>
-                    <p:nvPr/>
-                  </p:nvSpPr>
-                  <p:spPr>
-                    <a:xfrm>
-                      <a:off x="2116897" y="3601662"/>
-                      <a:ext cx="1031571" cy="311560"/>
-                    </a:xfrm>
-                    <a:prstGeom prst="rect">
-                      <a:avLst/>
-                    </a:prstGeom>
-                    <a:blipFill>
-                      <a:blip r:embed="rId8"/>
-                      <a:stretch>
-                        <a:fillRect/>
-                      </a:stretch>
-                    </a:blipFill>
-                  </p:spPr>
-                  <p:txBody>
-                    <a:bodyPr/>
-                    <a:lstStyle/>
-                    <a:p>
-                      <a:r>
-                        <a:rPr lang="en-US">
-                          <a:noFill/>
-                        </a:rPr>
-                        <a:t> </a:t>
-                      </a:r>
-                    </a:p>
-                  </p:txBody>
-                </p:sp>
-              </mc:Fallback>
-            </mc:AlternateContent>
-            <mc:AlternateContent xmlns:mc="http://schemas.openxmlformats.org/markup-compatibility/2006" xmlns:a14="http://schemas.microsoft.com/office/drawing/2010/main">
-              <mc:Choice Requires="a14">
-                <p:sp>
-                  <p:nvSpPr>
-                    <p:cNvPr id="34" name="TextBox 33">
-                      <a:extLst>
-                        <a:ext uri="{FF2B5EF4-FFF2-40B4-BE49-F238E27FC236}">
-                          <a16:creationId xmlns:a16="http://schemas.microsoft.com/office/drawing/2014/main" id="{CF7B7383-9465-856D-BB67-90FB4B48B704}"/>
-                        </a:ext>
-                      </a:extLst>
-                    </p:cNvPr>
-                    <p:cNvSpPr txBox="1"/>
-                    <p:nvPr/>
-                  </p:nvSpPr>
-                  <p:spPr>
-                    <a:xfrm>
-                      <a:off x="5163399" y="2381244"/>
-                      <a:ext cx="784061" cy="307777"/>
-                    </a:xfrm>
-                    <a:prstGeom prst="rect">
-                      <a:avLst/>
-                    </a:prstGeom>
-                    <a:noFill/>
-                  </p:spPr>
-                  <p:txBody>
-                    <a:bodyPr wrap="none" rtlCol="0">
-                      <a:spAutoFit/>
-                    </a:bodyPr>
-                    <a:lstStyle/>
-                    <a:p>
-                      <a:pPr/>
-                      <a14:m>
-                        <m:oMathPara xmlns:m="http://schemas.openxmlformats.org/officeDocument/2006/math">
-                          <m:oMathParaPr>
-                            <m:jc m:val="centerGroup"/>
-                          </m:oMathParaPr>
-                          <m:oMath xmlns:m="http://schemas.openxmlformats.org/officeDocument/2006/math">
-                            <m:r>
-                              <a:rPr lang="en-US" sz="1400" i="1" smtClean="0">
-                                <a:latin typeface="Cambria Math" panose="02040503050406030204" pitchFamily="18" charset="0"/>
-                                <a:ea typeface="Cambria Math" panose="02040503050406030204" pitchFamily="18" charset="0"/>
-                              </a:rPr>
-                              <m:t>∀</m:t>
-                            </m:r>
-                            <m:r>
-                              <a:rPr lang="en-CA" sz="1400" b="0" i="1" smtClean="0">
-                                <a:latin typeface="Cambria Math" panose="02040503050406030204" pitchFamily="18" charset="0"/>
-                                <a:ea typeface="Cambria Math" panose="02040503050406030204" pitchFamily="18" charset="0"/>
-                              </a:rPr>
-                              <m:t>𝑘</m:t>
-                            </m:r>
-                            <m:r>
-                              <a:rPr lang="en-CA" sz="1400" b="0" i="1" smtClean="0">
-                                <a:latin typeface="Cambria Math" panose="02040503050406030204" pitchFamily="18" charset="0"/>
-                                <a:ea typeface="Cambria Math" panose="02040503050406030204" pitchFamily="18" charset="0"/>
-                              </a:rPr>
-                              <m:t>∈</m:t>
-                            </m:r>
-                            <m:r>
-                              <a:rPr lang="en-CA" sz="1400" b="0" i="1" smtClean="0">
-                                <a:latin typeface="Cambria Math" panose="02040503050406030204" pitchFamily="18" charset="0"/>
-                                <a:ea typeface="Cambria Math" panose="02040503050406030204" pitchFamily="18" charset="0"/>
-                              </a:rPr>
-                              <m:t>𝐾</m:t>
-                            </m:r>
-                          </m:oMath>
-                        </m:oMathPara>
-                      </a14:m>
-                      <a:endParaRPr lang="en-US" sz="1400" dirty="0"/>
-                    </a:p>
-                  </p:txBody>
-                </p:sp>
-              </mc:Choice>
-              <mc:Fallback xmlns="">
-                <p:sp>
-                  <p:nvSpPr>
-                    <p:cNvPr id="9" name="TextBox 8">
-                      <a:extLst>
-                        <a:ext uri="{FF2B5EF4-FFF2-40B4-BE49-F238E27FC236}">
-                          <a16:creationId xmlns:a16="http://schemas.microsoft.com/office/drawing/2014/main" id="{1AB149D9-5EFA-775D-943D-E91493264173}"/>
-                        </a:ext>
-                      </a:extLst>
-                    </p:cNvPr>
-                    <p:cNvSpPr txBox="1">
-                      <a:spLocks noRot="1" noChangeAspect="1" noMove="1" noResize="1" noEditPoints="1" noAdjustHandles="1" noChangeArrowheads="1" noChangeShapeType="1" noTextEdit="1"/>
-                    </p:cNvSpPr>
-                    <p:nvPr/>
-                  </p:nvSpPr>
-                  <p:spPr>
-                    <a:xfrm>
-                      <a:off x="5163399" y="2381244"/>
-                      <a:ext cx="784061" cy="307777"/>
-                    </a:xfrm>
-                    <a:prstGeom prst="rect">
-                      <a:avLst/>
-                    </a:prstGeom>
-                    <a:blipFill>
-                      <a:blip r:embed="rId9"/>
-                      <a:stretch>
-                        <a:fillRect/>
-                      </a:stretch>
-                    </a:blipFill>
-                  </p:spPr>
-                  <p:txBody>
-                    <a:bodyPr/>
-                    <a:lstStyle/>
-                    <a:p>
-                      <a:r>
-                        <a:rPr lang="en-US">
-                          <a:noFill/>
-                        </a:rPr>
-                        <a:t> </a:t>
-                      </a:r>
-                    </a:p>
-                  </p:txBody>
-                </p:sp>
-              </mc:Fallback>
-            </mc:AlternateContent>
-            <mc:AlternateContent xmlns:mc="http://schemas.openxmlformats.org/markup-compatibility/2006">
-              <mc:Choice xmlns:a14="http://schemas.microsoft.com/office/drawing/2010/main" Requires="a14">
-                <p:sp>
-                  <p:nvSpPr>
-                    <p:cNvPr id="35" name="TextBox 34">
-                      <a:extLst>
-                        <a:ext uri="{FF2B5EF4-FFF2-40B4-BE49-F238E27FC236}">
-                          <a16:creationId xmlns:a16="http://schemas.microsoft.com/office/drawing/2014/main" id="{ACE5424B-6C77-5434-036B-0FF5EA259CE1}"/>
-                        </a:ext>
-                      </a:extLst>
-                    </p:cNvPr>
-                    <p:cNvSpPr txBox="1"/>
-                    <p:nvPr/>
-                  </p:nvSpPr>
-                  <p:spPr>
-                    <a:xfrm>
-                      <a:off x="1820319" y="4046035"/>
-                      <a:ext cx="2084930" cy="615168"/>
-                    </a:xfrm>
-                    <a:prstGeom prst="rect">
-                      <a:avLst/>
-                    </a:prstGeom>
-                    <a:noFill/>
-                  </p:spPr>
-                  <p:txBody>
-                    <a:bodyPr wrap="none" rtlCol="0">
-                      <a:spAutoFit/>
-                    </a:bodyPr>
-                    <a:lstStyle/>
-                    <a:p>
-                      <a:pPr/>
-                      <a14:m>
-                        <m:oMathPara xmlns:m="http://schemas.openxmlformats.org/officeDocument/2006/math">
-                          <m:oMathParaPr>
-                            <m:jc m:val="centerGroup"/>
-                          </m:oMathParaPr>
-                          <m:oMath xmlns:m="http://schemas.openxmlformats.org/officeDocument/2006/math">
-                            <m:sSubSup>
-                              <m:sSubSupPr>
-                                <m:ctrlPr>
-                                  <a:rPr lang="en-US" sz="1400" i="1" smtClean="0">
-                                    <a:latin typeface="Cambria Math" panose="02040503050406030204" pitchFamily="18" charset="0"/>
-                                  </a:rPr>
-                                </m:ctrlPr>
-                              </m:sSubSupPr>
-                              <m:e>
-                                <m:r>
-                                  <a:rPr lang="en-CA" sz="1400" b="0" i="1" smtClean="0">
-                                    <a:latin typeface="Cambria Math" panose="02040503050406030204" pitchFamily="18" charset="0"/>
-                                  </a:rPr>
-                                  <m:t>𝑢</m:t>
-                                </m:r>
-                              </m:e>
-                              <m:sub>
-                                <m:r>
-                                  <a:rPr lang="en-CA" sz="1400" b="0" i="1" smtClean="0">
-                                    <a:latin typeface="Cambria Math" panose="02040503050406030204" pitchFamily="18" charset="0"/>
-                                  </a:rPr>
-                                  <m:t>𝑖</m:t>
-                                </m:r>
-                              </m:sub>
-                              <m:sup>
-                                <m:r>
-                                  <a:rPr lang="en-CA" sz="1400" b="0" i="1" smtClean="0">
-                                    <a:latin typeface="Cambria Math" panose="02040503050406030204" pitchFamily="18" charset="0"/>
-                                  </a:rPr>
-                                  <m:t>𝑐</m:t>
-                                </m:r>
-                              </m:sup>
-                            </m:sSubSup>
-                            <m:r>
-                              <a:rPr lang="en-CA" sz="1400" b="0" i="1" smtClean="0">
-                                <a:latin typeface="Cambria Math" panose="02040503050406030204" pitchFamily="18" charset="0"/>
-                              </a:rPr>
-                              <m:t>−</m:t>
-                            </m:r>
-                            <m:sSubSup>
-                              <m:sSubSupPr>
-                                <m:ctrlPr>
-                                  <a:rPr lang="en-CA" sz="1400" b="0" i="1" smtClean="0">
-                                    <a:latin typeface="Cambria Math" panose="02040503050406030204" pitchFamily="18" charset="0"/>
-                                  </a:rPr>
-                                </m:ctrlPr>
-                              </m:sSubSupPr>
-                              <m:e>
-                                <m:r>
-                                  <a:rPr lang="en-CA" sz="1400" b="0" i="1" smtClean="0">
-                                    <a:latin typeface="Cambria Math" panose="02040503050406030204" pitchFamily="18" charset="0"/>
-                                  </a:rPr>
-                                  <m:t>𝑒</m:t>
-                                </m:r>
-                              </m:e>
-                              <m:sub>
-                                <m:r>
-                                  <a:rPr lang="en-CA" sz="1400" b="0" i="1" smtClean="0">
-                                    <a:latin typeface="Cambria Math" panose="02040503050406030204" pitchFamily="18" charset="0"/>
-                                  </a:rPr>
-                                  <m:t>𝑖</m:t>
-                                </m:r>
-                              </m:sub>
-                              <m:sup>
-                                <m:r>
-                                  <a:rPr lang="en-CA" sz="1400" b="0" i="1" smtClean="0">
-                                    <a:latin typeface="Cambria Math" panose="02040503050406030204" pitchFamily="18" charset="0"/>
-                                  </a:rPr>
-                                  <m:t>𝑐</m:t>
-                                </m:r>
-                              </m:sup>
-                            </m:sSubSup>
-                            <m:r>
-                              <a:rPr lang="en-CA" sz="1400" b="0" i="1" smtClean="0">
-                                <a:latin typeface="Cambria Math" panose="02040503050406030204" pitchFamily="18" charset="0"/>
-                              </a:rPr>
-                              <m:t>+</m:t>
-                            </m:r>
-                            <m:nary>
-                              <m:naryPr>
-                                <m:chr m:val="∑"/>
-                                <m:supHide m:val="on"/>
-                                <m:ctrlPr>
-                                  <a:rPr lang="en-CA" sz="1400" b="0" i="1" smtClean="0">
-                                    <a:latin typeface="Cambria Math" panose="02040503050406030204" pitchFamily="18" charset="0"/>
-                                  </a:rPr>
-                                </m:ctrlPr>
-                              </m:naryPr>
-                              <m:sub>
-                                <m:r>
-                                  <m:rPr>
-                                    <m:brk m:alnAt="7"/>
-                                  </m:rPr>
-                                  <a:rPr lang="en-CA" sz="1400" b="0" i="1" smtClean="0">
-                                    <a:latin typeface="Cambria Math" panose="02040503050406030204" pitchFamily="18" charset="0"/>
-                                  </a:rPr>
-                                  <m:t>𝑘</m:t>
-                                </m:r>
-                                <m:r>
-                                  <a:rPr lang="en-CA" sz="1400" b="0" i="1" smtClean="0">
-                                    <a:latin typeface="Cambria Math" panose="02040503050406030204" pitchFamily="18" charset="0"/>
-                                    <a:ea typeface="Cambria Math" panose="02040503050406030204" pitchFamily="18" charset="0"/>
-                                  </a:rPr>
-                                  <m:t>∈</m:t>
-                                </m:r>
-                                <m:r>
-                                  <a:rPr lang="en-CA" sz="1400" b="0" i="1" smtClean="0">
-                                    <a:latin typeface="Cambria Math" panose="02040503050406030204" pitchFamily="18" charset="0"/>
-                                    <a:ea typeface="Cambria Math" panose="02040503050406030204" pitchFamily="18" charset="0"/>
-                                  </a:rPr>
-                                  <m:t>𝐾</m:t>
-                                </m:r>
-                              </m:sub>
-                              <m:sup/>
-                              <m:e>
-                                <m:sSubSup>
-                                  <m:sSubSupPr>
-                                    <m:ctrlPr>
-                                      <a:rPr lang="en-CA" sz="1400" b="0" i="1" smtClean="0">
-                                        <a:latin typeface="Cambria Math" panose="02040503050406030204" pitchFamily="18" charset="0"/>
-                                      </a:rPr>
-                                    </m:ctrlPr>
-                                  </m:sSubSupPr>
-                                  <m:e>
-                                    <m:r>
-                                      <a:rPr lang="en-CA" sz="1400" b="0" i="1" smtClean="0">
-                                        <a:latin typeface="Cambria Math" panose="02040503050406030204" pitchFamily="18" charset="0"/>
-                                      </a:rPr>
-                                      <m:t>𝑉</m:t>
-                                    </m:r>
-                                  </m:e>
-                                  <m:sub>
-                                    <m:r>
-                                      <a:rPr lang="en-CA" sz="1400" b="0" i="1" smtClean="0">
-                                        <a:latin typeface="Cambria Math" panose="02040503050406030204" pitchFamily="18" charset="0"/>
-                                      </a:rPr>
-                                      <m:t>𝑒𝑥</m:t>
-                                    </m:r>
-                                    <m:r>
-                                      <a:rPr lang="en-CA" sz="1400" b="0" i="1" smtClean="0">
-                                        <a:latin typeface="Cambria Math" panose="02040503050406030204" pitchFamily="18" charset="0"/>
-                                      </a:rPr>
-                                      <m:t>(</m:t>
-                                    </m:r>
-                                    <m:r>
-                                      <a:rPr lang="en-CA" sz="1400" b="0" i="1" smtClean="0">
-                                        <a:latin typeface="Cambria Math" panose="02040503050406030204" pitchFamily="18" charset="0"/>
-                                      </a:rPr>
-                                      <m:t>𝑖</m:t>
-                                    </m:r>
-                                    <m:r>
-                                      <a:rPr lang="en-CA" sz="1400" b="0" i="1" smtClean="0">
-                                        <a:latin typeface="Cambria Math" panose="02040503050406030204" pitchFamily="18" charset="0"/>
-                                      </a:rPr>
-                                      <m:t>)</m:t>
-                                    </m:r>
-                                  </m:sub>
-                                  <m:sup>
-                                    <m:r>
-                                      <a:rPr lang="en-CA" sz="1400" b="0" i="1" smtClean="0">
-                                        <a:latin typeface="Cambria Math" panose="02040503050406030204" pitchFamily="18" charset="0"/>
-                                      </a:rPr>
-                                      <m:t>𝑘</m:t>
-                                    </m:r>
-                                  </m:sup>
-                                </m:sSubSup>
-                                <m:r>
-                                  <a:rPr lang="en-CA" sz="1400" b="0" i="1" smtClean="0">
-                                    <a:latin typeface="Cambria Math" panose="02040503050406030204" pitchFamily="18" charset="0"/>
-                                  </a:rPr>
-                                  <m:t>=0,</m:t>
-                                </m:r>
-                              </m:e>
-                            </m:nary>
-                          </m:oMath>
-                        </m:oMathPara>
-                      </a14:m>
-                      <a:endParaRPr lang="en-US" sz="1400" dirty="0"/>
-                    </a:p>
-                  </p:txBody>
-                </p:sp>
-              </mc:Choice>
-              <mc:Fallback>
-                <p:sp>
-                  <p:nvSpPr>
-                    <p:cNvPr id="35" name="TextBox 34">
-                      <a:extLst>
-                        <a:ext uri="{FF2B5EF4-FFF2-40B4-BE49-F238E27FC236}">
-                          <a16:creationId xmlns:a16="http://schemas.microsoft.com/office/drawing/2014/main" id="{ACE5424B-6C77-5434-036B-0FF5EA259CE1}"/>
-                        </a:ext>
-                      </a:extLst>
-                    </p:cNvPr>
-                    <p:cNvSpPr txBox="1">
-                      <a:spLocks noRot="1" noChangeAspect="1" noMove="1" noResize="1" noEditPoints="1" noAdjustHandles="1" noChangeArrowheads="1" noChangeShapeType="1" noTextEdit="1"/>
-                    </p:cNvSpPr>
-                    <p:nvPr/>
-                  </p:nvSpPr>
-                  <p:spPr>
-                    <a:xfrm>
-                      <a:off x="1820319" y="4046035"/>
-                      <a:ext cx="2084930" cy="615168"/>
-                    </a:xfrm>
-                    <a:prstGeom prst="rect">
-                      <a:avLst/>
-                    </a:prstGeom>
-                    <a:blipFill>
-                      <a:blip r:embed="rId10"/>
-                      <a:stretch>
-                        <a:fillRect t="-118367" b="-169388"/>
-                      </a:stretch>
-                    </a:blipFill>
-                  </p:spPr>
-                  <p:txBody>
-                    <a:bodyPr/>
-                    <a:lstStyle/>
-                    <a:p>
-                      <a:r>
-                        <a:rPr lang="en-US">
-                          <a:noFill/>
-                        </a:rPr>
-                        <a:t> </a:t>
-                      </a:r>
-                    </a:p>
-                  </p:txBody>
-                </p:sp>
-              </mc:Fallback>
-            </mc:AlternateContent>
-            <mc:AlternateContent xmlns:mc="http://schemas.openxmlformats.org/markup-compatibility/2006">
-              <mc:Choice xmlns:a14="http://schemas.microsoft.com/office/drawing/2010/main" Requires="a14">
-                <p:sp>
-                  <p:nvSpPr>
-                    <p:cNvPr id="36" name="TextBox 35">
-                      <a:extLst>
-                        <a:ext uri="{FF2B5EF4-FFF2-40B4-BE49-F238E27FC236}">
-                          <a16:creationId xmlns:a16="http://schemas.microsoft.com/office/drawing/2014/main" id="{FD1A5D67-6FB1-159B-EF6B-AA66036CD687}"/>
-                        </a:ext>
-                      </a:extLst>
-                    </p:cNvPr>
-                    <p:cNvSpPr txBox="1"/>
-                    <p:nvPr/>
-                  </p:nvSpPr>
-                  <p:spPr>
-                    <a:xfrm>
-                      <a:off x="4228634" y="4126731"/>
-                      <a:ext cx="957955" cy="307777"/>
-                    </a:xfrm>
-                    <a:prstGeom prst="rect">
-                      <a:avLst/>
-                    </a:prstGeom>
-                    <a:noFill/>
-                  </p:spPr>
-                  <p:txBody>
-                    <a:bodyPr wrap="none" rtlCol="0">
-                      <a:spAutoFit/>
-                    </a:bodyPr>
-                    <a:lstStyle/>
-                    <a:p>
-                      <a:pPr/>
-                      <a14:m>
-                        <m:oMathPara xmlns:m="http://schemas.openxmlformats.org/officeDocument/2006/math">
-                          <m:oMathParaPr>
-                            <m:jc m:val="centerGroup"/>
-                          </m:oMathParaPr>
-                          <m:oMath xmlns:m="http://schemas.openxmlformats.org/officeDocument/2006/math">
-                            <m:r>
-                              <a:rPr lang="en-US" sz="1400" i="1" smtClean="0">
-                                <a:latin typeface="Cambria Math" panose="02040503050406030204" pitchFamily="18" charset="0"/>
-                                <a:ea typeface="Cambria Math" panose="02040503050406030204" pitchFamily="18" charset="0"/>
-                              </a:rPr>
-                              <m:t>∀</m:t>
-                            </m:r>
-                            <m:r>
-                              <a:rPr lang="en-CA" sz="1400" b="0" i="1" smtClean="0">
-                                <a:latin typeface="Cambria Math" panose="02040503050406030204" pitchFamily="18" charset="0"/>
-                                <a:ea typeface="Cambria Math" panose="02040503050406030204" pitchFamily="18" charset="0"/>
-                              </a:rPr>
-                              <m:t>𝑖</m:t>
-                            </m:r>
-                            <m:r>
-                              <a:rPr lang="en-CA" sz="1400" b="0" i="1" smtClean="0">
-                                <a:latin typeface="Cambria Math" panose="02040503050406030204" pitchFamily="18" charset="0"/>
-                                <a:ea typeface="Cambria Math" panose="02040503050406030204" pitchFamily="18" charset="0"/>
-                              </a:rPr>
-                              <m:t>∈</m:t>
-                            </m:r>
-                            <m:sSup>
-                              <m:sSupPr>
-                                <m:ctrlPr>
-                                  <a:rPr lang="en-CA" sz="1400" b="0" i="1" smtClean="0">
-                                    <a:latin typeface="Cambria Math" panose="02040503050406030204" pitchFamily="18" charset="0"/>
-                                    <a:ea typeface="Cambria Math" panose="02040503050406030204" pitchFamily="18" charset="0"/>
-                                  </a:rPr>
-                                </m:ctrlPr>
-                              </m:sSupPr>
-                              <m:e>
-                                <m:r>
-                                  <a:rPr lang="en-CA" sz="1400" b="0" i="1" smtClean="0">
-                                    <a:latin typeface="Cambria Math" panose="02040503050406030204" pitchFamily="18" charset="0"/>
-                                    <a:ea typeface="Cambria Math" panose="02040503050406030204" pitchFamily="18" charset="0"/>
-                                  </a:rPr>
-                                  <m:t>𝐼</m:t>
-                                </m:r>
-                              </m:e>
-                              <m:sup>
-                                <m:r>
-                                  <a:rPr lang="en-CA" sz="1400" b="0" i="1" smtClean="0">
-                                    <a:latin typeface="Cambria Math" panose="02040503050406030204" pitchFamily="18" charset="0"/>
-                                    <a:ea typeface="Cambria Math" panose="02040503050406030204" pitchFamily="18" charset="0"/>
-                                  </a:rPr>
-                                  <m:t>𝑐𝑜𝑚</m:t>
-                                </m:r>
-                              </m:sup>
-                            </m:sSup>
-                          </m:oMath>
-                        </m:oMathPara>
-                      </a14:m>
-                      <a:endParaRPr lang="en-US" sz="1400" dirty="0"/>
-                    </a:p>
-                  </p:txBody>
-                </p:sp>
-              </mc:Choice>
-              <mc:Fallback>
-                <p:sp>
-                  <p:nvSpPr>
-                    <p:cNvPr id="36" name="TextBox 35">
-                      <a:extLst>
-                        <a:ext uri="{FF2B5EF4-FFF2-40B4-BE49-F238E27FC236}">
-                          <a16:creationId xmlns:a16="http://schemas.microsoft.com/office/drawing/2014/main" id="{FD1A5D67-6FB1-159B-EF6B-AA66036CD687}"/>
-                        </a:ext>
-                      </a:extLst>
-                    </p:cNvPr>
-                    <p:cNvSpPr txBox="1">
-                      <a:spLocks noRot="1" noChangeAspect="1" noMove="1" noResize="1" noEditPoints="1" noAdjustHandles="1" noChangeArrowheads="1" noChangeShapeType="1" noTextEdit="1"/>
-                    </p:cNvSpPr>
-                    <p:nvPr/>
-                  </p:nvSpPr>
-                  <p:spPr>
-                    <a:xfrm>
-                      <a:off x="4228634" y="4126731"/>
-                      <a:ext cx="957955" cy="307777"/>
-                    </a:xfrm>
-                    <a:prstGeom prst="rect">
-                      <a:avLst/>
-                    </a:prstGeom>
-                    <a:blipFill>
-                      <a:blip r:embed="rId11"/>
-                      <a:stretch>
-                        <a:fillRect/>
-                      </a:stretch>
-                    </a:blipFill>
-                  </p:spPr>
-                  <p:txBody>
-                    <a:bodyPr/>
-                    <a:lstStyle/>
-                    <a:p>
-                      <a:r>
-                        <a:rPr lang="en-US">
-                          <a:noFill/>
-                        </a:rPr>
-                        <a:t> </a:t>
-                      </a:r>
-                    </a:p>
-                  </p:txBody>
-                </p:sp>
-              </mc:Fallback>
-            </mc:AlternateContent>
-            <mc:AlternateContent xmlns:mc="http://schemas.openxmlformats.org/markup-compatibility/2006">
-              <mc:Choice xmlns:a14="http://schemas.microsoft.com/office/drawing/2010/main" Requires="a14">
-                <p:sp>
-                  <p:nvSpPr>
-                    <p:cNvPr id="37" name="TextBox 36">
-                      <a:extLst>
-                        <a:ext uri="{FF2B5EF4-FFF2-40B4-BE49-F238E27FC236}">
-                          <a16:creationId xmlns:a16="http://schemas.microsoft.com/office/drawing/2014/main" id="{D292B7C3-C5EA-ED8A-A8E4-2C20582995BD}"/>
-                        </a:ext>
-                      </a:extLst>
-                    </p:cNvPr>
-                    <p:cNvSpPr txBox="1"/>
-                    <p:nvPr/>
-                  </p:nvSpPr>
-                  <p:spPr>
-                    <a:xfrm>
-                      <a:off x="1894530" y="4687802"/>
-                      <a:ext cx="1155957" cy="615168"/>
-                    </a:xfrm>
-                    <a:prstGeom prst="rect">
-                      <a:avLst/>
-                    </a:prstGeom>
-                    <a:noFill/>
-                  </p:spPr>
-                  <p:txBody>
-                    <a:bodyPr wrap="none" rtlCol="0">
-                      <a:spAutoFit/>
-                    </a:bodyPr>
-                    <a:lstStyle/>
-                    <a:p>
-                      <a:pPr/>
-                      <a14:m>
-                        <m:oMathPara xmlns:m="http://schemas.openxmlformats.org/officeDocument/2006/math">
-                          <m:oMathParaPr>
-                            <m:jc m:val="centerGroup"/>
-                          </m:oMathParaPr>
-                          <m:oMath xmlns:m="http://schemas.openxmlformats.org/officeDocument/2006/math">
-                            <m:nary>
-                              <m:naryPr>
-                                <m:chr m:val="∑"/>
-                                <m:supHide m:val="on"/>
-                                <m:ctrlPr>
-                                  <a:rPr lang="en-CA" sz="1400" b="0" i="1" smtClean="0">
-                                    <a:latin typeface="Cambria Math" panose="02040503050406030204" pitchFamily="18" charset="0"/>
-                                  </a:rPr>
-                                </m:ctrlPr>
-                              </m:naryPr>
-                              <m:sub>
-                                <m:r>
-                                  <m:rPr>
-                                    <m:brk m:alnAt="7"/>
-                                  </m:rPr>
-                                  <a:rPr lang="en-CA" sz="1400" b="0" i="1" smtClean="0">
-                                    <a:latin typeface="Cambria Math" panose="02040503050406030204" pitchFamily="18" charset="0"/>
-                                  </a:rPr>
-                                  <m:t>𝑘</m:t>
-                                </m:r>
-                                <m:r>
-                                  <a:rPr lang="en-CA" sz="1400" b="0" i="1" smtClean="0">
-                                    <a:latin typeface="Cambria Math" panose="02040503050406030204" pitchFamily="18" charset="0"/>
-                                    <a:ea typeface="Cambria Math" panose="02040503050406030204" pitchFamily="18" charset="0"/>
-                                  </a:rPr>
-                                  <m:t>∈</m:t>
-                                </m:r>
-                                <m:r>
-                                  <a:rPr lang="en-CA" sz="1400" b="0" i="1" smtClean="0">
-                                    <a:latin typeface="Cambria Math" panose="02040503050406030204" pitchFamily="18" charset="0"/>
-                                    <a:ea typeface="Cambria Math" panose="02040503050406030204" pitchFamily="18" charset="0"/>
-                                  </a:rPr>
-                                  <m:t>𝐾</m:t>
-                                </m:r>
-                              </m:sub>
-                              <m:sup/>
-                              <m:e>
-                                <m:sSup>
-                                  <m:sSupPr>
-                                    <m:ctrlPr>
-                                      <a:rPr lang="en-CA" sz="1400" b="0" i="1" smtClean="0">
-                                        <a:latin typeface="Cambria Math" panose="02040503050406030204" pitchFamily="18" charset="0"/>
-                                      </a:rPr>
-                                    </m:ctrlPr>
-                                  </m:sSupPr>
-                                  <m:e>
-                                    <m:r>
-                                      <a:rPr lang="en-CA" sz="1400" b="0" i="1" smtClean="0">
-                                        <a:latin typeface="Cambria Math" panose="02040503050406030204" pitchFamily="18" charset="0"/>
-                                      </a:rPr>
-                                      <m:t>𝑋</m:t>
-                                    </m:r>
-                                  </m:e>
-                                  <m:sup>
-                                    <m:r>
-                                      <a:rPr lang="en-CA" sz="1400" b="0" i="1" smtClean="0">
-                                        <a:latin typeface="Cambria Math" panose="02040503050406030204" pitchFamily="18" charset="0"/>
-                                      </a:rPr>
-                                      <m:t>𝑘</m:t>
-                                    </m:r>
-                                  </m:sup>
-                                </m:sSup>
-                                <m:r>
-                                  <a:rPr lang="en-CA" sz="1400" b="0" i="1" smtClean="0">
-                                    <a:latin typeface="Cambria Math" panose="02040503050406030204" pitchFamily="18" charset="0"/>
-                                  </a:rPr>
-                                  <m:t>=</m:t>
-                                </m:r>
-                                <m:sSub>
-                                  <m:sSubPr>
-                                    <m:ctrlPr>
-                                      <a:rPr lang="en-CA" sz="1400" b="0" i="1" smtClean="0">
-                                        <a:latin typeface="Cambria Math" panose="02040503050406030204" pitchFamily="18" charset="0"/>
-                                      </a:rPr>
-                                    </m:ctrlPr>
-                                  </m:sSubPr>
-                                  <m:e>
-                                    <m:r>
-                                      <a:rPr lang="en-CA" sz="1400" b="0" i="1" smtClean="0">
-                                        <a:latin typeface="Cambria Math" panose="02040503050406030204" pitchFamily="18" charset="0"/>
-                                      </a:rPr>
-                                      <m:t>𝑋</m:t>
-                                    </m:r>
-                                  </m:e>
-                                  <m:sub>
-                                    <m:r>
-                                      <a:rPr lang="en-CA" sz="1400" b="0" i="1" smtClean="0">
-                                        <a:latin typeface="Cambria Math" panose="02040503050406030204" pitchFamily="18" charset="0"/>
-                                      </a:rPr>
-                                      <m:t>0</m:t>
-                                    </m:r>
-                                  </m:sub>
-                                </m:sSub>
-                              </m:e>
-                            </m:nary>
-                          </m:oMath>
-                        </m:oMathPara>
-                      </a14:m>
-                      <a:endParaRPr lang="en-US" sz="1400" dirty="0"/>
-                    </a:p>
-                  </p:txBody>
-                </p:sp>
-              </mc:Choice>
-              <mc:Fallback>
-                <p:sp>
-                  <p:nvSpPr>
-                    <p:cNvPr id="37" name="TextBox 36">
-                      <a:extLst>
-                        <a:ext uri="{FF2B5EF4-FFF2-40B4-BE49-F238E27FC236}">
-                          <a16:creationId xmlns:a16="http://schemas.microsoft.com/office/drawing/2014/main" id="{D292B7C3-C5EA-ED8A-A8E4-2C20582995BD}"/>
-                        </a:ext>
-                      </a:extLst>
-                    </p:cNvPr>
-                    <p:cNvSpPr txBox="1">
-                      <a:spLocks noRot="1" noChangeAspect="1" noMove="1" noResize="1" noEditPoints="1" noAdjustHandles="1" noChangeArrowheads="1" noChangeShapeType="1" noTextEdit="1"/>
-                    </p:cNvSpPr>
-                    <p:nvPr/>
-                  </p:nvSpPr>
-                  <p:spPr>
-                    <a:xfrm>
-                      <a:off x="1894530" y="4687802"/>
-                      <a:ext cx="1155957" cy="615168"/>
-                    </a:xfrm>
-                    <a:prstGeom prst="rect">
-                      <a:avLst/>
-                    </a:prstGeom>
-                    <a:blipFill>
-                      <a:blip r:embed="rId12"/>
-                      <a:stretch>
-                        <a:fillRect l="-47826" t="-118367" b="-171429"/>
-                      </a:stretch>
-                    </a:blipFill>
-                  </p:spPr>
-                  <p:txBody>
-                    <a:bodyPr/>
-                    <a:lstStyle/>
-                    <a:p>
-                      <a:r>
-                        <a:rPr lang="en-US">
-                          <a:noFill/>
-                        </a:rPr>
-                        <a:t> </a:t>
-                      </a:r>
-                    </a:p>
-                  </p:txBody>
-                </p:sp>
-              </mc:Fallback>
-            </mc:AlternateContent>
-            <mc:AlternateContent xmlns:mc="http://schemas.openxmlformats.org/markup-compatibility/2006">
-              <mc:Choice xmlns:a14="http://schemas.microsoft.com/office/drawing/2010/main" Requires="a14">
-                <p:sp>
-                  <p:nvSpPr>
-                    <p:cNvPr id="38" name="TextBox 37">
-                      <a:extLst>
-                        <a:ext uri="{FF2B5EF4-FFF2-40B4-BE49-F238E27FC236}">
-                          <a16:creationId xmlns:a16="http://schemas.microsoft.com/office/drawing/2014/main" id="{C271DC36-BA7E-88AC-5820-8970A16F3FB8}"/>
-                        </a:ext>
-                      </a:extLst>
-                    </p:cNvPr>
-                    <p:cNvSpPr txBox="1"/>
-                    <p:nvPr/>
-                  </p:nvSpPr>
-                  <p:spPr>
-                    <a:xfrm>
-                      <a:off x="1905317" y="5813057"/>
-                      <a:ext cx="327334" cy="307777"/>
-                    </a:xfrm>
-                    <a:prstGeom prst="rect">
-                      <a:avLst/>
-                    </a:prstGeom>
-                    <a:noFill/>
-                  </p:spPr>
-                  <p:txBody>
-                    <a:bodyPr wrap="none" rtlCol="0">
-                      <a:spAutoFit/>
-                    </a:bodyPr>
-                    <a:lstStyle/>
-                    <a:p>
-                      <a:pPr/>
-                      <a14:m>
-                        <m:oMathPara xmlns:m="http://schemas.openxmlformats.org/officeDocument/2006/math">
-                          <m:oMathParaPr>
-                            <m:jc m:val="centerGroup"/>
-                          </m:oMathParaPr>
-                          <m:oMath xmlns:m="http://schemas.openxmlformats.org/officeDocument/2006/math">
-                            <m:r>
-                              <a:rPr lang="en-US" sz="1400" i="1" smtClean="0">
-                                <a:latin typeface="Cambria Math" panose="02040503050406030204" pitchFamily="18" charset="0"/>
-                                <a:ea typeface="Cambria Math" panose="02040503050406030204" pitchFamily="18" charset="0"/>
-                              </a:rPr>
-                              <m:t>𝜇</m:t>
-                            </m:r>
-                          </m:oMath>
-                        </m:oMathPara>
-                      </a14:m>
-                      <a:endParaRPr lang="en-US" sz="1400" dirty="0"/>
-                    </a:p>
-                  </p:txBody>
-                </p:sp>
-              </mc:Choice>
-              <mc:Fallback>
-                <p:sp>
-                  <p:nvSpPr>
-                    <p:cNvPr id="38" name="TextBox 37">
-                      <a:extLst>
-                        <a:ext uri="{FF2B5EF4-FFF2-40B4-BE49-F238E27FC236}">
-                          <a16:creationId xmlns:a16="http://schemas.microsoft.com/office/drawing/2014/main" id="{C271DC36-BA7E-88AC-5820-8970A16F3FB8}"/>
-                        </a:ext>
-                      </a:extLst>
-                    </p:cNvPr>
-                    <p:cNvSpPr txBox="1">
-                      <a:spLocks noRot="1" noChangeAspect="1" noMove="1" noResize="1" noEditPoints="1" noAdjustHandles="1" noChangeArrowheads="1" noChangeShapeType="1" noTextEdit="1"/>
-                    </p:cNvSpPr>
-                    <p:nvPr/>
-                  </p:nvSpPr>
-                  <p:spPr>
-                    <a:xfrm>
-                      <a:off x="1905317" y="5813057"/>
-                      <a:ext cx="327334" cy="307777"/>
-                    </a:xfrm>
-                    <a:prstGeom prst="rect">
-                      <a:avLst/>
-                    </a:prstGeom>
-                    <a:blipFill>
-                      <a:blip r:embed="rId13"/>
-                      <a:stretch>
-                        <a:fillRect/>
-                      </a:stretch>
-                    </a:blipFill>
-                  </p:spPr>
-                  <p:txBody>
-                    <a:bodyPr/>
-                    <a:lstStyle/>
-                    <a:p>
-                      <a:r>
-                        <a:rPr lang="en-US">
-                          <a:noFill/>
-                        </a:rPr>
-                        <a:t> </a:t>
-                      </a:r>
-                    </a:p>
-                  </p:txBody>
-                </p:sp>
-              </mc:Fallback>
-            </mc:AlternateContent>
-            <mc:AlternateContent xmlns:mc="http://schemas.openxmlformats.org/markup-compatibility/2006">
-              <mc:Choice xmlns:a14="http://schemas.microsoft.com/office/drawing/2010/main" Requires="a14">
-                <p:sp>
-                  <p:nvSpPr>
-                    <p:cNvPr id="39" name="TextBox 38">
-                      <a:extLst>
-                        <a:ext uri="{FF2B5EF4-FFF2-40B4-BE49-F238E27FC236}">
-                          <a16:creationId xmlns:a16="http://schemas.microsoft.com/office/drawing/2014/main" id="{E45F706C-17FD-FF21-0FB4-E01D4B802745}"/>
-                        </a:ext>
-                      </a:extLst>
-                    </p:cNvPr>
-                    <p:cNvSpPr txBox="1"/>
-                    <p:nvPr/>
-                  </p:nvSpPr>
-                  <p:spPr>
-                    <a:xfrm>
-                      <a:off x="2806643" y="5833184"/>
-                      <a:ext cx="735330" cy="308546"/>
-                    </a:xfrm>
-                    <a:prstGeom prst="rect">
-                      <a:avLst/>
-                    </a:prstGeom>
-                    <a:noFill/>
-                  </p:spPr>
-                  <p:txBody>
-                    <a:bodyPr wrap="none" rtlCol="0">
-                      <a:spAutoFit/>
-                    </a:bodyPr>
-                    <a:lstStyle/>
-                    <a:p>
-                      <a:pPr/>
-                      <a14:m>
-                        <m:oMathPara xmlns:m="http://schemas.openxmlformats.org/officeDocument/2006/math">
-                          <m:oMathParaPr>
-                            <m:jc m:val="centerGroup"/>
-                          </m:oMathParaPr>
-                          <m:oMath xmlns:m="http://schemas.openxmlformats.org/officeDocument/2006/math">
-                            <m:sSubSup>
-                              <m:sSubSupPr>
-                                <m:ctrlPr>
-                                  <a:rPr lang="en-US" sz="1400" i="1" smtClean="0">
-                                    <a:latin typeface="Cambria Math" panose="02040503050406030204" pitchFamily="18" charset="0"/>
-                                  </a:rPr>
-                                </m:ctrlPr>
-                              </m:sSubSupPr>
-                              <m:e>
-                                <m:r>
-                                  <a:rPr lang="en-CA" sz="1400" b="0" i="1" smtClean="0">
-                                    <a:latin typeface="Cambria Math" panose="02040503050406030204" pitchFamily="18" charset="0"/>
-                                  </a:rPr>
-                                  <m:t>𝑒</m:t>
-                                </m:r>
-                              </m:e>
-                              <m:sub>
-                                <m:r>
-                                  <a:rPr lang="en-CA" sz="1400" b="0" i="1" smtClean="0">
-                                    <a:latin typeface="Cambria Math" panose="02040503050406030204" pitchFamily="18" charset="0"/>
-                                  </a:rPr>
-                                  <m:t>𝑖</m:t>
-                                </m:r>
-                              </m:sub>
-                              <m:sup>
-                                <m:r>
-                                  <a:rPr lang="en-CA" sz="1400" b="0" i="1" smtClean="0">
-                                    <a:latin typeface="Cambria Math" panose="02040503050406030204" pitchFamily="18" charset="0"/>
-                                  </a:rPr>
-                                  <m:t>𝑐</m:t>
-                                </m:r>
-                              </m:sup>
-                            </m:sSubSup>
-                            <m:r>
-                              <a:rPr lang="en-US" sz="1400" i="1" smtClean="0">
-                                <a:latin typeface="Cambria Math" panose="02040503050406030204" pitchFamily="18" charset="0"/>
-                                <a:ea typeface="Cambria Math" panose="02040503050406030204" pitchFamily="18" charset="0"/>
-                              </a:rPr>
-                              <m:t>≥</m:t>
-                            </m:r>
-                            <m:r>
-                              <a:rPr lang="en-CA" sz="1400" b="0" i="1" smtClean="0">
-                                <a:latin typeface="Cambria Math" panose="02040503050406030204" pitchFamily="18" charset="0"/>
-                                <a:ea typeface="Cambria Math" panose="02040503050406030204" pitchFamily="18" charset="0"/>
-                              </a:rPr>
-                              <m:t>0</m:t>
-                            </m:r>
-                          </m:oMath>
-                        </m:oMathPara>
-                      </a14:m>
-                      <a:endParaRPr lang="en-US" sz="1400" dirty="0"/>
-                    </a:p>
-                  </p:txBody>
-                </p:sp>
-              </mc:Choice>
-              <mc:Fallback>
-                <p:sp>
-                  <p:nvSpPr>
-                    <p:cNvPr id="39" name="TextBox 38">
-                      <a:extLst>
-                        <a:ext uri="{FF2B5EF4-FFF2-40B4-BE49-F238E27FC236}">
-                          <a16:creationId xmlns:a16="http://schemas.microsoft.com/office/drawing/2014/main" id="{E45F706C-17FD-FF21-0FB4-E01D4B802745}"/>
-                        </a:ext>
-                      </a:extLst>
-                    </p:cNvPr>
-                    <p:cNvSpPr txBox="1">
-                      <a:spLocks noRot="1" noChangeAspect="1" noMove="1" noResize="1" noEditPoints="1" noAdjustHandles="1" noChangeArrowheads="1" noChangeShapeType="1" noTextEdit="1"/>
-                    </p:cNvSpPr>
-                    <p:nvPr/>
-                  </p:nvSpPr>
-                  <p:spPr>
-                    <a:xfrm>
-                      <a:off x="2806643" y="5833184"/>
-                      <a:ext cx="735330" cy="308546"/>
-                    </a:xfrm>
-                    <a:prstGeom prst="rect">
-                      <a:avLst/>
-                    </a:prstGeom>
-                    <a:blipFill>
-                      <a:blip r:embed="rId14"/>
-                      <a:stretch>
-                        <a:fillRect/>
-                      </a:stretch>
-                    </a:blipFill>
-                  </p:spPr>
-                  <p:txBody>
-                    <a:bodyPr/>
-                    <a:lstStyle/>
-                    <a:p>
-                      <a:r>
-                        <a:rPr lang="en-US">
-                          <a:noFill/>
-                        </a:rPr>
-                        <a:t> </a:t>
-                      </a:r>
-                    </a:p>
-                  </p:txBody>
-                </p:sp>
-              </mc:Fallback>
-            </mc:AlternateContent>
-            <mc:AlternateContent xmlns:mc="http://schemas.openxmlformats.org/markup-compatibility/2006">
-              <mc:Choice xmlns:a14="http://schemas.microsoft.com/office/drawing/2010/main" Requires="a14">
-                <p:sp>
-                  <p:nvSpPr>
-                    <p:cNvPr id="40" name="TextBox 39">
-                      <a:extLst>
-                        <a:ext uri="{FF2B5EF4-FFF2-40B4-BE49-F238E27FC236}">
-                          <a16:creationId xmlns:a16="http://schemas.microsoft.com/office/drawing/2014/main" id="{D7059601-887E-900B-5223-85EE2ED193A1}"/>
-                        </a:ext>
-                      </a:extLst>
-                    </p:cNvPr>
-                    <p:cNvSpPr txBox="1"/>
-                    <p:nvPr/>
-                  </p:nvSpPr>
-                  <p:spPr>
-                    <a:xfrm>
-                      <a:off x="3903525" y="5833184"/>
-                      <a:ext cx="957955" cy="307777"/>
-                    </a:xfrm>
-                    <a:prstGeom prst="rect">
-                      <a:avLst/>
-                    </a:prstGeom>
-                    <a:noFill/>
-                  </p:spPr>
-                  <p:txBody>
-                    <a:bodyPr wrap="none" rtlCol="0">
-                      <a:spAutoFit/>
-                    </a:bodyPr>
-                    <a:lstStyle/>
-                    <a:p>
-                      <a:pPr/>
-                      <a14:m>
-                        <m:oMathPara xmlns:m="http://schemas.openxmlformats.org/officeDocument/2006/math">
-                          <m:oMathParaPr>
-                            <m:jc m:val="centerGroup"/>
-                          </m:oMathParaPr>
-                          <m:oMath xmlns:m="http://schemas.openxmlformats.org/officeDocument/2006/math">
-                            <m:r>
-                              <a:rPr lang="en-US" sz="1400" i="1" smtClean="0">
-                                <a:latin typeface="Cambria Math" panose="02040503050406030204" pitchFamily="18" charset="0"/>
-                                <a:ea typeface="Cambria Math" panose="02040503050406030204" pitchFamily="18" charset="0"/>
-                              </a:rPr>
-                              <m:t>∀</m:t>
-                            </m:r>
-                            <m:r>
-                              <a:rPr lang="en-CA" sz="1400" b="0" i="1" smtClean="0">
-                                <a:latin typeface="Cambria Math" panose="02040503050406030204" pitchFamily="18" charset="0"/>
-                                <a:ea typeface="Cambria Math" panose="02040503050406030204" pitchFamily="18" charset="0"/>
-                              </a:rPr>
-                              <m:t>𝑖</m:t>
-                            </m:r>
-                            <m:r>
-                              <a:rPr lang="en-CA" sz="1400" b="0" i="1" smtClean="0">
-                                <a:latin typeface="Cambria Math" panose="02040503050406030204" pitchFamily="18" charset="0"/>
-                                <a:ea typeface="Cambria Math" panose="02040503050406030204" pitchFamily="18" charset="0"/>
-                              </a:rPr>
-                              <m:t>∈</m:t>
-                            </m:r>
-                            <m:sSup>
-                              <m:sSupPr>
-                                <m:ctrlPr>
-                                  <a:rPr lang="en-CA" sz="1400" b="0" i="1" smtClean="0">
-                                    <a:latin typeface="Cambria Math" panose="02040503050406030204" pitchFamily="18" charset="0"/>
-                                    <a:ea typeface="Cambria Math" panose="02040503050406030204" pitchFamily="18" charset="0"/>
-                                  </a:rPr>
-                                </m:ctrlPr>
-                              </m:sSupPr>
-                              <m:e>
-                                <m:r>
-                                  <a:rPr lang="en-CA" sz="1400" b="0" i="1" smtClean="0">
-                                    <a:latin typeface="Cambria Math" panose="02040503050406030204" pitchFamily="18" charset="0"/>
-                                    <a:ea typeface="Cambria Math" panose="02040503050406030204" pitchFamily="18" charset="0"/>
-                                  </a:rPr>
-                                  <m:t>𝐼</m:t>
-                                </m:r>
-                              </m:e>
-                              <m:sup>
-                                <m:r>
-                                  <a:rPr lang="en-CA" sz="1400" b="0" i="1" smtClean="0">
-                                    <a:latin typeface="Cambria Math" panose="02040503050406030204" pitchFamily="18" charset="0"/>
-                                    <a:ea typeface="Cambria Math" panose="02040503050406030204" pitchFamily="18" charset="0"/>
-                                  </a:rPr>
-                                  <m:t>𝑐𝑜𝑚</m:t>
-                                </m:r>
-                              </m:sup>
-                            </m:sSup>
-                          </m:oMath>
-                        </m:oMathPara>
-                      </a14:m>
-                      <a:endParaRPr lang="en-US" sz="1400" dirty="0"/>
-                    </a:p>
-                  </p:txBody>
-                </p:sp>
-              </mc:Choice>
-              <mc:Fallback>
-                <p:sp>
-                  <p:nvSpPr>
-                    <p:cNvPr id="40" name="TextBox 39">
-                      <a:extLst>
-                        <a:ext uri="{FF2B5EF4-FFF2-40B4-BE49-F238E27FC236}">
-                          <a16:creationId xmlns:a16="http://schemas.microsoft.com/office/drawing/2014/main" id="{D7059601-887E-900B-5223-85EE2ED193A1}"/>
-                        </a:ext>
-                      </a:extLst>
-                    </p:cNvPr>
-                    <p:cNvSpPr txBox="1">
-                      <a:spLocks noRot="1" noChangeAspect="1" noMove="1" noResize="1" noEditPoints="1" noAdjustHandles="1" noChangeArrowheads="1" noChangeShapeType="1" noTextEdit="1"/>
-                    </p:cNvSpPr>
-                    <p:nvPr/>
-                  </p:nvSpPr>
-                  <p:spPr>
-                    <a:xfrm>
-                      <a:off x="3903525" y="5833184"/>
-                      <a:ext cx="957955" cy="307777"/>
-                    </a:xfrm>
-                    <a:prstGeom prst="rect">
-                      <a:avLst/>
-                    </a:prstGeom>
-                    <a:blipFill>
-                      <a:blip r:embed="rId15"/>
-                      <a:stretch>
-                        <a:fillRect/>
-                      </a:stretch>
-                    </a:blipFill>
-                  </p:spPr>
-                  <p:txBody>
-                    <a:bodyPr/>
-                    <a:lstStyle/>
-                    <a:p>
-                      <a:r>
-                        <a:rPr lang="en-US">
-                          <a:noFill/>
-                        </a:rPr>
-                        <a:t> </a:t>
-                      </a:r>
-                    </a:p>
-                  </p:txBody>
-                </p:sp>
-              </mc:Fallback>
-            </mc:AlternateContent>
-            <p:sp>
-              <p:nvSpPr>
-                <p:cNvPr id="41" name="TextBox 40">
-                  <a:extLst>
-                    <a:ext uri="{FF2B5EF4-FFF2-40B4-BE49-F238E27FC236}">
-                      <a16:creationId xmlns:a16="http://schemas.microsoft.com/office/drawing/2014/main" id="{6AB51353-091E-7B9C-2C9D-9BC7D4DAFB5E}"/>
-                    </a:ext>
-                  </a:extLst>
-                </p:cNvPr>
-                <p:cNvSpPr txBox="1"/>
-                <p:nvPr/>
-              </p:nvSpPr>
-              <p:spPr>
-                <a:xfrm>
-                  <a:off x="3607974" y="5873881"/>
-                  <a:ext cx="229550" cy="307777"/>
-                </a:xfrm>
-                <a:prstGeom prst="rect">
-                  <a:avLst/>
-                </a:prstGeom>
-                <a:noFill/>
-              </p:spPr>
-              <p:txBody>
-                <a:bodyPr wrap="none" rtlCol="0">
-                  <a:spAutoFit/>
-                </a:bodyPr>
-                <a:lstStyle/>
-                <a:p>
-                  <a:r>
-                    <a:rPr lang="en-US" sz="1400" dirty="0"/>
-                    <a:t>,</a:t>
-                  </a:r>
-                </a:p>
-              </p:txBody>
-            </p:sp>
-            <p:sp>
-              <p:nvSpPr>
-                <p:cNvPr id="42" name="TextBox 41">
-                  <a:extLst>
-                    <a:ext uri="{FF2B5EF4-FFF2-40B4-BE49-F238E27FC236}">
-                      <a16:creationId xmlns:a16="http://schemas.microsoft.com/office/drawing/2014/main" id="{1C05ACB7-DDD7-4FD9-AECD-1438BCC85800}"/>
-                    </a:ext>
-                  </a:extLst>
-                </p:cNvPr>
-                <p:cNvSpPr txBox="1"/>
-                <p:nvPr/>
-              </p:nvSpPr>
-              <p:spPr>
-                <a:xfrm>
-                  <a:off x="2429318" y="5873881"/>
-                  <a:ext cx="229550" cy="307777"/>
-                </a:xfrm>
-                <a:prstGeom prst="rect">
-                  <a:avLst/>
-                </a:prstGeom>
-                <a:noFill/>
-              </p:spPr>
-              <p:txBody>
-                <a:bodyPr wrap="none" rtlCol="0">
-                  <a:spAutoFit/>
-                </a:bodyPr>
-                <a:lstStyle/>
-                <a:p>
-                  <a:r>
-                    <a:rPr lang="en-US" sz="1400" dirty="0"/>
-                    <a:t>,</a:t>
-                  </a:r>
-                </a:p>
-              </p:txBody>
-            </p:sp>
-            <p:sp>
-              <p:nvSpPr>
-                <p:cNvPr id="43" name="Left Bracket 42">
-                  <a:extLst>
-                    <a:ext uri="{FF2B5EF4-FFF2-40B4-BE49-F238E27FC236}">
-                      <a16:creationId xmlns:a16="http://schemas.microsoft.com/office/drawing/2014/main" id="{2BA823D6-558F-2F52-4216-820A76DC9247}"/>
-                    </a:ext>
-                  </a:extLst>
-                </p:cNvPr>
-                <p:cNvSpPr/>
-                <p:nvPr/>
-              </p:nvSpPr>
-              <p:spPr>
-                <a:xfrm rot="10800000">
-                  <a:off x="5004548" y="1057446"/>
-                  <a:ext cx="100580" cy="2878984"/>
-                </a:xfrm>
-                <a:prstGeom prst="leftBracket">
-                  <a:avLst/>
-                </a:prstGeom>
-                <a:ln w="19050"/>
-              </p:spPr>
-              <p:style>
-                <a:lnRef idx="1">
-                  <a:schemeClr val="dk1"/>
-                </a:lnRef>
-                <a:fillRef idx="0">
-                  <a:schemeClr val="dk1"/>
-                </a:fillRef>
-                <a:effectRef idx="0">
-                  <a:schemeClr val="dk1"/>
-                </a:effectRef>
-                <a:fontRef idx="minor">
-                  <a:schemeClr val="tx1"/>
-                </a:fontRef>
-              </p:style>
-              <p:txBody>
-                <a:bodyPr rtlCol="0" anchor="ctr"/>
-                <a:lstStyle/>
-                <a:p>
-                  <a:pPr algn="ctr"/>
-                  <a:endParaRPr lang="en-US" sz="1400"/>
-                </a:p>
-              </p:txBody>
-            </p:sp>
-            <mc:AlternateContent xmlns:mc="http://schemas.openxmlformats.org/markup-compatibility/2006">
-              <mc:Choice xmlns:a14="http://schemas.microsoft.com/office/drawing/2010/main" Requires="a14">
-                <p:sp>
-                  <p:nvSpPr>
-                    <p:cNvPr id="44" name="TextBox 43">
-                      <a:extLst>
-                        <a:ext uri="{FF2B5EF4-FFF2-40B4-BE49-F238E27FC236}">
-                          <a16:creationId xmlns:a16="http://schemas.microsoft.com/office/drawing/2014/main" id="{6028B1B6-2C97-D37E-BC5A-285E6AADE771}"/>
-                        </a:ext>
-                      </a:extLst>
-                    </p:cNvPr>
-                    <p:cNvSpPr txBox="1"/>
-                    <p:nvPr/>
-                  </p:nvSpPr>
-                  <p:spPr>
-                    <a:xfrm>
-                      <a:off x="280314" y="388166"/>
-                      <a:ext cx="2100255" cy="897362"/>
-                    </a:xfrm>
-                    <a:prstGeom prst="rect">
-                      <a:avLst/>
-                    </a:prstGeom>
-                    <a:noFill/>
-                  </p:spPr>
-                  <p:txBody>
-                    <a:bodyPr wrap="none" rtlCol="0">
-                      <a:spAutoFit/>
-                    </a:bodyPr>
-                    <a:lstStyle/>
-                    <a:p>
-                      <a:pPr/>
-                      <a14:m>
-                        <m:oMath xmlns:m="http://schemas.openxmlformats.org/officeDocument/2006/math">
-                          <m:r>
-                            <a:rPr lang="en-CA" b="0" i="1" smtClean="0">
-                              <a:latin typeface="Cambria Math" panose="02040503050406030204" pitchFamily="18" charset="0"/>
-                            </a:rPr>
-                            <m:t>𝑚𝑎𝑥</m:t>
-                          </m:r>
-                          <m:r>
-                            <a:rPr lang="en-CA" b="0" i="1" smtClean="0">
-                              <a:latin typeface="Cambria Math" panose="02040503050406030204" pitchFamily="18" charset="0"/>
-                            </a:rPr>
-                            <m:t>/</m:t>
-                          </m:r>
-                          <m:r>
-                            <a:rPr lang="en-CA" b="0" i="1" smtClean="0">
-                              <a:latin typeface="Cambria Math" panose="02040503050406030204" pitchFamily="18" charset="0"/>
-                            </a:rPr>
-                            <m:t>𝑚𝑖𝑛</m:t>
-                          </m:r>
-                        </m:oMath>
-                      </a14:m>
-                      <a:r>
-                        <a:rPr lang="en-US" dirty="0"/>
-                        <a:t> </a:t>
-                      </a:r>
-                      <a14:m>
-                        <m:oMath xmlns:m="http://schemas.openxmlformats.org/officeDocument/2006/math">
-                          <m:nary>
-                            <m:naryPr>
-                              <m:chr m:val="∑"/>
-                              <m:supHide m:val="on"/>
-                              <m:ctrlPr>
-                                <a:rPr lang="en-US" i="1" dirty="0" smtClean="0">
-                                  <a:latin typeface="Cambria Math" panose="02040503050406030204" pitchFamily="18" charset="0"/>
-                                </a:rPr>
-                              </m:ctrlPr>
-                            </m:naryPr>
-                            <m:sub>
-                              <m:eqArr>
-                                <m:eqArrPr>
-                                  <m:ctrlPr>
-                                    <a:rPr lang="en-CA" b="0" i="1" dirty="0" smtClean="0">
-                                      <a:latin typeface="Cambria Math" panose="02040503050406030204" pitchFamily="18" charset="0"/>
-                                    </a:rPr>
-                                  </m:ctrlPr>
-                                </m:eqArrPr>
-                                <m:e>
-                                  <m:r>
-                                    <m:rPr>
-                                      <m:brk m:alnAt="7"/>
-                                    </m:rPr>
-                                    <a:rPr lang="en-CA" b="0" i="1" dirty="0" smtClean="0">
-                                      <a:latin typeface="Cambria Math" panose="02040503050406030204" pitchFamily="18" charset="0"/>
-                                    </a:rPr>
-                                    <m:t>𝑗</m:t>
-                                  </m:r>
-                                  <m:r>
-                                    <a:rPr lang="en-CA" b="0" i="1" dirty="0" smtClean="0">
-                                      <a:latin typeface="Cambria Math" panose="02040503050406030204" pitchFamily="18" charset="0"/>
-                                      <a:ea typeface="Cambria Math" panose="02040503050406030204" pitchFamily="18" charset="0"/>
-                                    </a:rPr>
-                                    <m:t>∈</m:t>
-                                  </m:r>
-                                  <m:sSup>
-                                    <m:sSupPr>
-                                      <m:ctrlPr>
-                                        <a:rPr lang="en-CA" b="0" i="1" dirty="0" smtClean="0">
-                                          <a:latin typeface="Cambria Math" panose="02040503050406030204" pitchFamily="18" charset="0"/>
-                                          <a:ea typeface="Cambria Math" panose="02040503050406030204" pitchFamily="18" charset="0"/>
-                                        </a:rPr>
-                                      </m:ctrlPr>
-                                    </m:sSupPr>
-                                    <m:e>
-                                      <m:r>
-                                        <a:rPr lang="en-CA" b="0" i="1" dirty="0" smtClean="0">
-                                          <a:latin typeface="Cambria Math" panose="02040503050406030204" pitchFamily="18" charset="0"/>
-                                          <a:ea typeface="Cambria Math" panose="02040503050406030204" pitchFamily="18" charset="0"/>
-                                        </a:rPr>
-                                        <m:t>𝐽</m:t>
-                                      </m:r>
-                                    </m:e>
-                                    <m:sup>
-                                      <m:r>
-                                        <a:rPr lang="en-CA" b="0" i="1" dirty="0" smtClean="0">
-                                          <a:latin typeface="Cambria Math" panose="02040503050406030204" pitchFamily="18" charset="0"/>
-                                          <a:ea typeface="Cambria Math" panose="02040503050406030204" pitchFamily="18" charset="0"/>
-                                        </a:rPr>
-                                        <m:t>𝑘</m:t>
-                                      </m:r>
-                                    </m:sup>
-                                  </m:sSup>
-                                </m:e>
-                                <m:e>
-                                  <m:r>
-                                    <a:rPr lang="en-CA" b="0" i="1" dirty="0" smtClean="0">
-                                      <a:latin typeface="Cambria Math" panose="02040503050406030204" pitchFamily="18" charset="0"/>
-                                      <a:ea typeface="Cambria Math" panose="02040503050406030204" pitchFamily="18" charset="0"/>
-                                    </a:rPr>
-                                    <m:t>𝑘</m:t>
-                                  </m:r>
-                                  <m:r>
-                                    <a:rPr lang="en-CA" b="0" i="1" dirty="0" smtClean="0">
-                                      <a:latin typeface="Cambria Math" panose="02040503050406030204" pitchFamily="18" charset="0"/>
-                                      <a:ea typeface="Cambria Math" panose="02040503050406030204" pitchFamily="18" charset="0"/>
-                                    </a:rPr>
-                                    <m:t>∈</m:t>
-                                  </m:r>
-                                  <m:r>
-                                    <a:rPr lang="en-CA" b="0" i="1" dirty="0" smtClean="0">
-                                      <a:latin typeface="Cambria Math" panose="02040503050406030204" pitchFamily="18" charset="0"/>
-                                      <a:ea typeface="Cambria Math" panose="02040503050406030204" pitchFamily="18" charset="0"/>
-                                    </a:rPr>
-                                    <m:t>𝐾</m:t>
-                                  </m:r>
-                                </m:e>
-                              </m:eqArr>
-                            </m:sub>
-                            <m:sup/>
-                            <m:e>
-                              <m:sSubSup>
-                                <m:sSubSupPr>
-                                  <m:ctrlPr>
-                                    <a:rPr lang="en-US" i="1" dirty="0" smtClean="0">
-                                      <a:latin typeface="Cambria Math" panose="02040503050406030204" pitchFamily="18" charset="0"/>
-                                    </a:rPr>
-                                  </m:ctrlPr>
-                                </m:sSubSupPr>
-                                <m:e>
-                                  <m:r>
-                                    <a:rPr lang="en-CA" b="0" i="1" dirty="0" smtClean="0">
-                                      <a:latin typeface="Cambria Math" panose="02040503050406030204" pitchFamily="18" charset="0"/>
-                                    </a:rPr>
-                                    <m:t>𝑉</m:t>
-                                  </m:r>
-                                </m:e>
-                                <m:sub>
-                                  <m:r>
-                                    <a:rPr lang="en-CA" b="0" i="1" dirty="0" smtClean="0">
-                                      <a:latin typeface="Cambria Math" panose="02040503050406030204" pitchFamily="18" charset="0"/>
-                                    </a:rPr>
-                                    <m:t>𝑗</m:t>
-                                  </m:r>
-                                </m:sub>
-                                <m:sup>
-                                  <m:r>
-                                    <a:rPr lang="en-CA" b="0" i="1" dirty="0" smtClean="0">
-                                      <a:latin typeface="Cambria Math" panose="02040503050406030204" pitchFamily="18" charset="0"/>
-                                    </a:rPr>
-                                    <m:t>𝑘</m:t>
-                                  </m:r>
-                                </m:sup>
-                              </m:sSubSup>
-                            </m:e>
-                          </m:nary>
-                        </m:oMath>
-                      </a14:m>
-                      <a:r>
-                        <a:rPr lang="en-US" dirty="0"/>
-                        <a:t> </a:t>
-                      </a:r>
-                    </a:p>
-                    <a:p>
-                      <a:pPr/>
-                      <a:r>
-                        <a:rPr lang="en-US" dirty="0"/>
-                        <a:t>subject to</a:t>
-                      </a:r>
-                    </a:p>
-                  </p:txBody>
-                </p:sp>
-              </mc:Choice>
-              <mc:Fallback>
-                <p:sp>
-                  <p:nvSpPr>
-                    <p:cNvPr id="44" name="TextBox 43">
-                      <a:extLst>
-                        <a:ext uri="{FF2B5EF4-FFF2-40B4-BE49-F238E27FC236}">
-                          <a16:creationId xmlns:a16="http://schemas.microsoft.com/office/drawing/2014/main" id="{6028B1B6-2C97-D37E-BC5A-285E6AADE771}"/>
-                        </a:ext>
-                      </a:extLst>
-                    </p:cNvPr>
-                    <p:cNvSpPr txBox="1">
-                      <a:spLocks noRot="1" noChangeAspect="1" noMove="1" noResize="1" noEditPoints="1" noAdjustHandles="1" noChangeArrowheads="1" noChangeShapeType="1" noTextEdit="1"/>
-                    </p:cNvSpPr>
-                    <p:nvPr/>
-                  </p:nvSpPr>
-                  <p:spPr>
-                    <a:xfrm>
-                      <a:off x="280314" y="388166"/>
-                      <a:ext cx="2100255" cy="897362"/>
-                    </a:xfrm>
-                    <a:prstGeom prst="rect">
-                      <a:avLst/>
-                    </a:prstGeom>
-                    <a:blipFill>
-                      <a:blip r:embed="rId16"/>
-                      <a:stretch>
-                        <a:fillRect l="-2410" t="-45070" b="-15493"/>
-                      </a:stretch>
-                    </a:blipFill>
-                  </p:spPr>
-                  <p:txBody>
-                    <a:bodyPr/>
-                    <a:lstStyle/>
-                    <a:p>
-                      <a:r>
-                        <a:rPr lang="en-US">
-                          <a:noFill/>
-                        </a:rPr>
-                        <a:t> </a:t>
-                      </a:r>
-                    </a:p>
-                  </p:txBody>
-                </p:sp>
-              </mc:Fallback>
-            </mc:AlternateContent>
-            <p:sp>
-              <p:nvSpPr>
-                <p:cNvPr id="45" name="Left Bracket 44">
-                  <a:extLst>
-                    <a:ext uri="{FF2B5EF4-FFF2-40B4-BE49-F238E27FC236}">
-                      <a16:creationId xmlns:a16="http://schemas.microsoft.com/office/drawing/2014/main" id="{6F615FF1-C495-BAA6-522E-4945482E55E1}"/>
-                    </a:ext>
-                  </a:extLst>
-                </p:cNvPr>
-                <p:cNvSpPr/>
-                <p:nvPr/>
-              </p:nvSpPr>
-              <p:spPr>
-                <a:xfrm>
-                  <a:off x="1788038" y="1057733"/>
-                  <a:ext cx="126384" cy="2944818"/>
-                </a:xfrm>
-                <a:prstGeom prst="leftBracket">
-                  <a:avLst/>
-                </a:prstGeom>
-                <a:ln w="19050"/>
-              </p:spPr>
-              <p:style>
-                <a:lnRef idx="1">
-                  <a:schemeClr val="dk1"/>
-                </a:lnRef>
-                <a:fillRef idx="0">
-                  <a:schemeClr val="dk1"/>
-                </a:fillRef>
-                <a:effectRef idx="0">
-                  <a:schemeClr val="dk1"/>
-                </a:effectRef>
-                <a:fontRef idx="minor">
-                  <a:schemeClr val="tx1"/>
-                </a:fontRef>
-              </p:style>
-              <p:txBody>
-                <a:bodyPr rtlCol="0" anchor="ctr"/>
-                <a:lstStyle/>
-                <a:p>
-                  <a:pPr algn="ctr"/>
-                  <a:endParaRPr lang="en-US" sz="1400"/>
-                </a:p>
-              </p:txBody>
-            </p:sp>
-          </p:grpSp>
-          <mc:AlternateContent xmlns:mc="http://schemas.openxmlformats.org/markup-compatibility/2006">
-            <mc:Choice xmlns:a14="http://schemas.microsoft.com/office/drawing/2010/main" Requires="a14">
+                      </m:oMathPara>
+                    </a14:m>
+                    <a:endParaRPr lang="en-US" sz="1400" dirty="0"/>
+                  </a:p>
+                </p:txBody>
+              </p:sp>
+            </mc:Choice>
+            <mc:Fallback xmlns="">
               <p:sp>
                 <p:nvSpPr>
-                  <p:cNvPr id="27" name="TextBox 26">
+                  <p:cNvPr id="29" name="TextBox 28">
                     <a:extLst>
                       <a:ext uri="{FF2B5EF4-FFF2-40B4-BE49-F238E27FC236}">
-                        <a16:creationId xmlns:a16="http://schemas.microsoft.com/office/drawing/2014/main" id="{9E856C7E-1ECA-9719-A78D-0C71A734FE21}"/>
+                        <a16:creationId xmlns:a16="http://schemas.microsoft.com/office/drawing/2014/main" id="{93E5D75B-AF46-6379-053A-FA3695C833F3}"/>
+                      </a:ext>
+                    </a:extLst>
+                  </p:cNvPr>
+                  <p:cNvSpPr txBox="1">
+                    <a:spLocks noRot="1" noChangeAspect="1" noMove="1" noResize="1" noEditPoints="1" noAdjustHandles="1" noChangeArrowheads="1" noChangeShapeType="1" noTextEdit="1"/>
+                  </p:cNvSpPr>
+                  <p:nvPr/>
+                </p:nvSpPr>
+                <p:spPr>
+                  <a:xfrm>
+                    <a:off x="4179169" y="1841489"/>
+                    <a:ext cx="773610" cy="311560"/>
+                  </a:xfrm>
+                  <a:prstGeom prst="rect">
+                    <a:avLst/>
+                  </a:prstGeom>
+                  <a:blipFill>
+                    <a:blip r:embed="rId3"/>
+                    <a:stretch>
+                      <a:fillRect/>
+                    </a:stretch>
+                  </a:blipFill>
+                </p:spPr>
+                <p:txBody>
+                  <a:bodyPr/>
+                  <a:lstStyle/>
+                  <a:p>
+                    <a:r>
+                      <a:rPr lang="en-US">
+                        <a:noFill/>
+                      </a:rPr>
+                      <a:t> </a:t>
+                    </a:r>
+                  </a:p>
+                </p:txBody>
+              </p:sp>
+            </mc:Fallback>
+          </mc:AlternateContent>
+          <mc:AlternateContent xmlns:mc="http://schemas.openxmlformats.org/markup-compatibility/2006" xmlns:a14="http://schemas.microsoft.com/office/drawing/2010/main">
+            <mc:Choice Requires="a14">
+              <p:sp>
+                <p:nvSpPr>
+                  <p:cNvPr id="30" name="TextBox 29">
+                    <a:extLst>
+                      <a:ext uri="{FF2B5EF4-FFF2-40B4-BE49-F238E27FC236}">
+                        <a16:creationId xmlns:a16="http://schemas.microsoft.com/office/drawing/2014/main" id="{DBF9F7B2-1649-EE8D-1732-58CCA27595BA}"/>
                       </a:ext>
                     </a:extLst>
                   </p:cNvPr>
@@ -6025,8 +3956,8 @@
                 </p:nvSpPr>
                 <p:spPr>
                   <a:xfrm>
-                    <a:off x="2110239" y="1773804"/>
-                    <a:ext cx="2959143" cy="349391"/>
+                    <a:off x="1800722" y="2570010"/>
+                    <a:ext cx="1982594" cy="349391"/>
                   </a:xfrm>
                   <a:prstGeom prst="rect">
                     <a:avLst/>
@@ -6041,6 +3972,71 @@
                   <a:p>
                     <a14:m>
                       <m:oMath xmlns:m="http://schemas.openxmlformats.org/officeDocument/2006/math">
+                        <m:sSubSup>
+                          <m:sSubSupPr>
+                            <m:ctrlPr>
+                              <a:rPr lang="en-US" sz="1400" i="1" smtClean="0">
+                                <a:latin typeface="Cambria Math" panose="02040503050406030204" pitchFamily="18" charset="0"/>
+                              </a:rPr>
+                            </m:ctrlPr>
+                          </m:sSubSupPr>
+                          <m:e>
+                            <m:r>
+                              <a:rPr lang="en-CA" sz="1400" b="0" i="1" smtClean="0">
+                                <a:latin typeface="Cambria Math" panose="02040503050406030204" pitchFamily="18" charset="0"/>
+                              </a:rPr>
+                              <m:t>𝐿𝐵</m:t>
+                            </m:r>
+                          </m:e>
+                          <m:sub>
+                            <m:r>
+                              <a:rPr lang="en-CA" sz="1400" b="0" i="1" smtClean="0">
+                                <a:latin typeface="Cambria Math" panose="02040503050406030204" pitchFamily="18" charset="0"/>
+                              </a:rPr>
+                              <m:t>𝑗</m:t>
+                            </m:r>
+                          </m:sub>
+                          <m:sup>
+                            <m:r>
+                              <a:rPr lang="en-CA" sz="1400" b="0" i="1" smtClean="0">
+                                <a:latin typeface="Cambria Math" panose="02040503050406030204" pitchFamily="18" charset="0"/>
+                              </a:rPr>
+                              <m:t>𝑘</m:t>
+                            </m:r>
+                          </m:sup>
+                        </m:sSubSup>
+                        <m:sSup>
+                          <m:sSupPr>
+                            <m:ctrlPr>
+                              <a:rPr lang="en-US" sz="1400" i="1" smtClean="0">
+                                <a:latin typeface="Cambria Math" panose="02040503050406030204" pitchFamily="18" charset="0"/>
+                              </a:rPr>
+                            </m:ctrlPr>
+                          </m:sSupPr>
+                          <m:e>
+                            <m:r>
+                              <a:rPr lang="en-CA" sz="1400" b="0" i="1" smtClean="0">
+                                <a:latin typeface="Cambria Math" panose="02040503050406030204" pitchFamily="18" charset="0"/>
+                              </a:rPr>
+                              <m:t>𝑋</m:t>
+                            </m:r>
+                          </m:e>
+                          <m:sup>
+                            <m:r>
+                              <a:rPr lang="en-CA" sz="1400" b="0" i="1" smtClean="0">
+                                <a:latin typeface="Cambria Math" panose="02040503050406030204" pitchFamily="18" charset="0"/>
+                              </a:rPr>
+                              <m:t>𝑘</m:t>
+                            </m:r>
+                          </m:sup>
+                        </m:sSup>
+                        <m:r>
+                          <a:rPr lang="en-US" sz="1400" i="1" smtClean="0">
+                            <a:latin typeface="Cambria Math" panose="02040503050406030204" pitchFamily="18" charset="0"/>
+                            <a:ea typeface="Cambria Math" panose="02040503050406030204" pitchFamily="18" charset="0"/>
+                          </a:rPr>
+                          <m:t>≤</m:t>
+                        </m:r>
                         <m:sSubSup>
                           <m:sSubSupPr>
                             <m:ctrlPr>
@@ -6079,16 +4075,53 @@
                           </m:sup>
                         </m:sSubSup>
                         <m:r>
-                          <a:rPr lang="en-CA" sz="1400" b="0" i="1" smtClean="0">
+                          <a:rPr lang="en-US" sz="1400" i="1" smtClean="0">
                             <a:latin typeface="Cambria Math" panose="02040503050406030204" pitchFamily="18" charset="0"/>
                             <a:ea typeface="Cambria Math" panose="02040503050406030204" pitchFamily="18" charset="0"/>
                           </a:rPr>
-                          <m:t>=</m:t>
+                          <m:t>≤</m:t>
                         </m:r>
+                        <m:sSubSup>
+                          <m:sSubSupPr>
+                            <m:ctrlPr>
+                              <a:rPr lang="en-US" sz="1400" i="1" smtClean="0">
+                                <a:latin typeface="Cambria Math" panose="02040503050406030204" pitchFamily="18" charset="0"/>
+                                <a:ea typeface="Cambria Math" panose="02040503050406030204" pitchFamily="18" charset="0"/>
+                              </a:rPr>
+                            </m:ctrlPr>
+                          </m:sSubSupPr>
+                          <m:e>
+                            <m:r>
+                              <a:rPr lang="en-CA" sz="1400" b="0" i="1" smtClean="0">
+                                <a:latin typeface="Cambria Math" panose="02040503050406030204" pitchFamily="18" charset="0"/>
+                                <a:ea typeface="Cambria Math" panose="02040503050406030204" pitchFamily="18" charset="0"/>
+                              </a:rPr>
+                              <m:t>𝑈𝐵</m:t>
+                            </m:r>
+                          </m:e>
+                          <m:sub>
+                            <m:r>
+                              <a:rPr lang="en-CA" sz="1400" b="0" i="1" smtClean="0">
+                                <a:latin typeface="Cambria Math" panose="02040503050406030204" pitchFamily="18" charset="0"/>
+                                <a:ea typeface="Cambria Math" panose="02040503050406030204" pitchFamily="18" charset="0"/>
+                              </a:rPr>
+                              <m:t>𝑗</m:t>
+                            </m:r>
+                          </m:sub>
+                          <m:sup>
+                            <m:r>
+                              <a:rPr lang="en-CA" sz="1400" b="0" i="1" smtClean="0">
+                                <a:latin typeface="Cambria Math" panose="02040503050406030204" pitchFamily="18" charset="0"/>
+                                <a:ea typeface="Cambria Math" panose="02040503050406030204" pitchFamily="18" charset="0"/>
+                              </a:rPr>
+                              <m:t>𝑘</m:t>
+                            </m:r>
+                          </m:sup>
+                        </m:sSubSup>
                         <m:sSup>
                           <m:sSupPr>
                             <m:ctrlPr>
-                              <a:rPr lang="en-CA" sz="1400" b="0" i="1" smtClean="0">
+                              <a:rPr lang="en-US" sz="1400" i="1" smtClean="0">
                                 <a:latin typeface="Cambria Math" panose="02040503050406030204" pitchFamily="18" charset="0"/>
                                 <a:ea typeface="Cambria Math" panose="02040503050406030204" pitchFamily="18" charset="0"/>
                               </a:rPr>
@@ -6113,159 +4146,23 @@
                             </m:r>
                           </m:sup>
                         </m:sSup>
-                        <m:sSubSup>
-                          <m:sSubSupPr>
-                            <m:ctrlPr>
-                              <a:rPr lang="en-CA" sz="1400" b="0" i="1" smtClean="0">
-                                <a:latin typeface="Cambria Math" panose="02040503050406030204" pitchFamily="18" charset="0"/>
-                                <a:ea typeface="Cambria Math" panose="02040503050406030204" pitchFamily="18" charset="0"/>
-                              </a:rPr>
-                            </m:ctrlPr>
-                          </m:sSubSupPr>
-                          <m:e>
-                            <m:r>
-                              <a:rPr lang="en-CA" sz="1400" b="0" i="1" smtClean="0">
-                                <a:latin typeface="Cambria Math" panose="02040503050406030204" pitchFamily="18" charset="0"/>
-                                <a:ea typeface="Cambria Math" panose="02040503050406030204" pitchFamily="18" charset="0"/>
-                              </a:rPr>
-                              <m:t>𝑣</m:t>
-                            </m:r>
-                          </m:e>
-                          <m:sub>
-                            <m:r>
-                              <a:rPr lang="en-CA" sz="1400" b="0" i="1" smtClean="0">
-                                <a:latin typeface="Cambria Math" panose="02040503050406030204" pitchFamily="18" charset="0"/>
-                                <a:ea typeface="Cambria Math" panose="02040503050406030204" pitchFamily="18" charset="0"/>
-                              </a:rPr>
-                              <m:t>𝑗</m:t>
-                            </m:r>
-                          </m:sub>
-                          <m:sup>
-                            <m:r>
-                              <a:rPr lang="en-CA" sz="1400" b="0" i="1" smtClean="0">
-                                <a:latin typeface="Cambria Math" panose="02040503050406030204" pitchFamily="18" charset="0"/>
-                                <a:ea typeface="Cambria Math" panose="02040503050406030204" pitchFamily="18" charset="0"/>
-                              </a:rPr>
-                              <m:t>𝑘</m:t>
-                            </m:r>
-                          </m:sup>
-                        </m:sSubSup>
                       </m:oMath>
                     </a14:m>
                     <a:r>
-                      <a:rPr lang="en-US" sz="1400" dirty="0">
-                        <a:latin typeface="Cambria Math" panose="02040503050406030204" pitchFamily="18" charset="0"/>
-                        <a:ea typeface="Cambria Math" panose="02040503050406030204" pitchFamily="18" charset="0"/>
-                      </a:rPr>
-                      <a:t>,  </a:t>
+                      <a:rPr lang="en-US" sz="1400" dirty="0"/>
+                      <a:t>,</a:t>
                     </a:r>
-                    <a14:m>
-                      <m:oMath xmlns:m="http://schemas.openxmlformats.org/officeDocument/2006/math">
-                        <m:r>
-                          <a:rPr lang="en-CA" sz="1400" b="0" i="0" smtClean="0">
-                            <a:latin typeface="Cambria Math" panose="02040503050406030204" pitchFamily="18" charset="0"/>
-                            <a:ea typeface="Cambria Math" panose="02040503050406030204" pitchFamily="18" charset="0"/>
-                          </a:rPr>
-                          <m:t>                  </m:t>
-                        </m:r>
-                        <m:r>
-                          <a:rPr lang="en-US" sz="1400" i="1" smtClean="0">
-                            <a:latin typeface="Cambria Math" panose="02040503050406030204" pitchFamily="18" charset="0"/>
-                            <a:ea typeface="Cambria Math" panose="02040503050406030204" pitchFamily="18" charset="0"/>
-                          </a:rPr>
-                          <m:t>∀</m:t>
-                        </m:r>
-                        <m:r>
-                          <a:rPr lang="en-CA" sz="1400" b="0" i="1" smtClean="0">
-                            <a:latin typeface="Cambria Math" panose="02040503050406030204" pitchFamily="18" charset="0"/>
-                            <a:ea typeface="Cambria Math" panose="02040503050406030204" pitchFamily="18" charset="0"/>
-                          </a:rPr>
-                          <m:t>𝑗</m:t>
-                        </m:r>
-                        <m:r>
-                          <a:rPr lang="en-CA" sz="1400" b="0" i="1" smtClean="0">
-                            <a:latin typeface="Cambria Math" panose="02040503050406030204" pitchFamily="18" charset="0"/>
-                            <a:ea typeface="Cambria Math" panose="02040503050406030204" pitchFamily="18" charset="0"/>
-                          </a:rPr>
-                          <m:t>∈</m:t>
-                        </m:r>
-                        <m:sSup>
-                          <m:sSupPr>
-                            <m:ctrlPr>
-                              <a:rPr lang="en-CA" sz="1400" b="0" i="1" smtClean="0">
-                                <a:latin typeface="Cambria Math" panose="02040503050406030204" pitchFamily="18" charset="0"/>
-                                <a:ea typeface="Cambria Math" panose="02040503050406030204" pitchFamily="18" charset="0"/>
-                              </a:rPr>
-                            </m:ctrlPr>
-                          </m:sSupPr>
-                          <m:e>
-                            <m:r>
-                              <a:rPr lang="en-CA" sz="1400" b="0" i="1" smtClean="0">
-                                <a:latin typeface="Cambria Math" panose="02040503050406030204" pitchFamily="18" charset="0"/>
-                                <a:ea typeface="Cambria Math" panose="02040503050406030204" pitchFamily="18" charset="0"/>
-                              </a:rPr>
-                              <m:t>𝐽</m:t>
-                            </m:r>
-                          </m:e>
-                          <m:sup>
-                            <m:r>
-                              <a:rPr lang="en-CA" sz="1400" b="0" i="1" smtClean="0">
-                                <a:latin typeface="Cambria Math" panose="02040503050406030204" pitchFamily="18" charset="0"/>
-                                <a:ea typeface="Cambria Math" panose="02040503050406030204" pitchFamily="18" charset="0"/>
-                              </a:rPr>
-                              <m:t>𝑘</m:t>
-                            </m:r>
-                          </m:sup>
-                        </m:sSup>
-                      </m:oMath>
-                    </a14:m>
-                    <a:r>
-                      <a:rPr lang="en-US" sz="1400" dirty="0">
-                        <a:latin typeface="Cambria Math" panose="02040503050406030204" pitchFamily="18" charset="0"/>
-                        <a:ea typeface="Cambria Math" panose="02040503050406030204" pitchFamily="18" charset="0"/>
-                      </a:rPr>
-                      <a:t>, </a:t>
-                    </a:r>
-                    <a14:m>
-                      <m:oMath xmlns:m="http://schemas.openxmlformats.org/officeDocument/2006/math">
-                        <m:r>
-                          <a:rPr lang="en-CA" sz="1400" b="0" i="1" smtClean="0">
-                            <a:latin typeface="Cambria Math" panose="02040503050406030204" pitchFamily="18" charset="0"/>
-                            <a:ea typeface="Cambria Math" panose="02040503050406030204" pitchFamily="18" charset="0"/>
-                          </a:rPr>
-                          <m:t>𝑘</m:t>
-                        </m:r>
-                        <m:r>
-                          <a:rPr lang="en-CA" sz="1400" b="0" i="1" smtClean="0">
-                            <a:latin typeface="Cambria Math" panose="02040503050406030204" pitchFamily="18" charset="0"/>
-                            <a:ea typeface="Cambria Math" panose="02040503050406030204" pitchFamily="18" charset="0"/>
-                          </a:rPr>
-                          <m:t>∈</m:t>
-                        </m:r>
-                        <m:r>
-                          <a:rPr lang="en-CA" sz="1400" b="0" i="1" smtClean="0">
-                            <a:latin typeface="Cambria Math" panose="02040503050406030204" pitchFamily="18" charset="0"/>
-                            <a:ea typeface="Cambria Math" panose="02040503050406030204" pitchFamily="18" charset="0"/>
-                          </a:rPr>
-                          <m:t>𝐾</m:t>
-                        </m:r>
-                      </m:oMath>
-                    </a14:m>
-                    <a:endParaRPr lang="en-US" sz="1400" dirty="0">
-                      <a:latin typeface="Cambria Math" panose="02040503050406030204" pitchFamily="18" charset="0"/>
-                      <a:ea typeface="Cambria Math" panose="02040503050406030204" pitchFamily="18" charset="0"/>
-                    </a:endParaRPr>
                   </a:p>
                 </p:txBody>
               </p:sp>
             </mc:Choice>
-            <mc:Fallback>
+            <mc:Fallback xmlns="">
               <p:sp>
                 <p:nvSpPr>
-                  <p:cNvPr id="27" name="TextBox 26">
+                  <p:cNvPr id="30" name="TextBox 29">
                     <a:extLst>
                       <a:ext uri="{FF2B5EF4-FFF2-40B4-BE49-F238E27FC236}">
-                        <a16:creationId xmlns:a16="http://schemas.microsoft.com/office/drawing/2014/main" id="{9E856C7E-1ECA-9719-A78D-0C71A734FE21}"/>
+                        <a16:creationId xmlns:a16="http://schemas.microsoft.com/office/drawing/2014/main" id="{DBF9F7B2-1649-EE8D-1732-58CCA27595BA}"/>
                       </a:ext>
                     </a:extLst>
                   </p:cNvPr>
@@ -6276,16 +4173,16 @@
                 </p:nvSpPr>
                 <p:spPr>
                   <a:xfrm>
-                    <a:off x="2110239" y="1773804"/>
-                    <a:ext cx="2959143" cy="349391"/>
+                    <a:off x="1800722" y="2570010"/>
+                    <a:ext cx="1982594" cy="349391"/>
                   </a:xfrm>
                   <a:prstGeom prst="rect">
                     <a:avLst/>
                   </a:prstGeom>
                   <a:blipFill>
-                    <a:blip r:embed="rId17"/>
+                    <a:blip r:embed="rId4"/>
                     <a:stretch>
-                      <a:fillRect b="-14286"/>
+                      <a:fillRect b="-13793"/>
                     </a:stretch>
                   </a:blipFill>
                 </p:spPr>
@@ -6304,6 +4201,1920 @@
               </p:sp>
             </mc:Fallback>
           </mc:AlternateContent>
+          <mc:AlternateContent xmlns:mc="http://schemas.openxmlformats.org/markup-compatibility/2006" xmlns:a14="http://schemas.microsoft.com/office/drawing/2010/main">
+            <mc:Choice Requires="a14">
+              <p:sp>
+                <p:nvSpPr>
+                  <p:cNvPr id="31" name="TextBox 30">
+                    <a:extLst>
+                      <a:ext uri="{FF2B5EF4-FFF2-40B4-BE49-F238E27FC236}">
+                        <a16:creationId xmlns:a16="http://schemas.microsoft.com/office/drawing/2014/main" id="{E7E80130-5F7A-F0E0-68B6-C968502458B9}"/>
+                      </a:ext>
+                    </a:extLst>
+                  </p:cNvPr>
+                  <p:cNvSpPr txBox="1"/>
+                  <p:nvPr/>
+                </p:nvSpPr>
+                <p:spPr>
+                  <a:xfrm>
+                    <a:off x="4174361" y="2544233"/>
+                    <a:ext cx="778418" cy="311560"/>
+                  </a:xfrm>
+                  <a:prstGeom prst="rect">
+                    <a:avLst/>
+                  </a:prstGeom>
+                  <a:noFill/>
+                </p:spPr>
+                <p:txBody>
+                  <a:bodyPr wrap="none" rtlCol="0">
+                    <a:spAutoFit/>
+                  </a:bodyPr>
+                  <a:lstStyle/>
+                  <a:p>
+                    <a:pPr/>
+                    <a14:m>
+                      <m:oMathPara xmlns:m="http://schemas.openxmlformats.org/officeDocument/2006/math">
+                        <m:oMathParaPr>
+                          <m:jc m:val="centerGroup"/>
+                        </m:oMathParaPr>
+                        <m:oMath xmlns:m="http://schemas.openxmlformats.org/officeDocument/2006/math">
+                          <m:r>
+                            <a:rPr lang="en-US" sz="1400" i="1" smtClean="0">
+                              <a:latin typeface="Cambria Math" panose="02040503050406030204" pitchFamily="18" charset="0"/>
+                              <a:ea typeface="Cambria Math" panose="02040503050406030204" pitchFamily="18" charset="0"/>
+                            </a:rPr>
+                            <m:t>∀</m:t>
+                          </m:r>
+                          <m:r>
+                            <a:rPr lang="en-CA" sz="1400" b="0" i="1" smtClean="0">
+                              <a:latin typeface="Cambria Math" panose="02040503050406030204" pitchFamily="18" charset="0"/>
+                              <a:ea typeface="Cambria Math" panose="02040503050406030204" pitchFamily="18" charset="0"/>
+                            </a:rPr>
+                            <m:t>𝑗</m:t>
+                          </m:r>
+                          <m:r>
+                            <a:rPr lang="en-CA" sz="1400" b="0" i="1" smtClean="0">
+                              <a:latin typeface="Cambria Math" panose="02040503050406030204" pitchFamily="18" charset="0"/>
+                              <a:ea typeface="Cambria Math" panose="02040503050406030204" pitchFamily="18" charset="0"/>
+                            </a:rPr>
+                            <m:t>∈</m:t>
+                          </m:r>
+                          <m:sSup>
+                            <m:sSupPr>
+                              <m:ctrlPr>
+                                <a:rPr lang="en-CA" sz="1400" b="0" i="1" smtClean="0">
+                                  <a:latin typeface="Cambria Math" panose="02040503050406030204" pitchFamily="18" charset="0"/>
+                                  <a:ea typeface="Cambria Math" panose="02040503050406030204" pitchFamily="18" charset="0"/>
+                                </a:rPr>
+                              </m:ctrlPr>
+                            </m:sSupPr>
+                            <m:e>
+                              <m:r>
+                                <a:rPr lang="en-CA" sz="1400" b="0" i="1" smtClean="0">
+                                  <a:latin typeface="Cambria Math" panose="02040503050406030204" pitchFamily="18" charset="0"/>
+                                  <a:ea typeface="Cambria Math" panose="02040503050406030204" pitchFamily="18" charset="0"/>
+                                </a:rPr>
+                                <m:t>𝐽</m:t>
+                              </m:r>
+                            </m:e>
+                            <m:sup>
+                              <m:r>
+                                <a:rPr lang="en-CA" sz="1400" b="0" i="1" smtClean="0">
+                                  <a:latin typeface="Cambria Math" panose="02040503050406030204" pitchFamily="18" charset="0"/>
+                                  <a:ea typeface="Cambria Math" panose="02040503050406030204" pitchFamily="18" charset="0"/>
+                                </a:rPr>
+                                <m:t>𝑘</m:t>
+                              </m:r>
+                            </m:sup>
+                          </m:sSup>
+                        </m:oMath>
+                      </m:oMathPara>
+                    </a14:m>
+                    <a:endParaRPr lang="en-US" sz="1400" dirty="0"/>
+                  </a:p>
+                </p:txBody>
+              </p:sp>
+            </mc:Choice>
+            <mc:Fallback xmlns="">
+              <p:sp>
+                <p:nvSpPr>
+                  <p:cNvPr id="31" name="TextBox 30">
+                    <a:extLst>
+                      <a:ext uri="{FF2B5EF4-FFF2-40B4-BE49-F238E27FC236}">
+                        <a16:creationId xmlns:a16="http://schemas.microsoft.com/office/drawing/2014/main" id="{E7E80130-5F7A-F0E0-68B6-C968502458B9}"/>
+                      </a:ext>
+                    </a:extLst>
+                  </p:cNvPr>
+                  <p:cNvSpPr txBox="1">
+                    <a:spLocks noRot="1" noChangeAspect="1" noMove="1" noResize="1" noEditPoints="1" noAdjustHandles="1" noChangeArrowheads="1" noChangeShapeType="1" noTextEdit="1"/>
+                  </p:cNvSpPr>
+                  <p:nvPr/>
+                </p:nvSpPr>
+                <p:spPr>
+                  <a:xfrm>
+                    <a:off x="4174361" y="2544233"/>
+                    <a:ext cx="778418" cy="311560"/>
+                  </a:xfrm>
+                  <a:prstGeom prst="rect">
+                    <a:avLst/>
+                  </a:prstGeom>
+                  <a:blipFill>
+                    <a:blip r:embed="rId5"/>
+                    <a:stretch>
+                      <a:fillRect b="-3846"/>
+                    </a:stretch>
+                  </a:blipFill>
+                </p:spPr>
+                <p:txBody>
+                  <a:bodyPr/>
+                  <a:lstStyle/>
+                  <a:p>
+                    <a:r>
+                      <a:rPr lang="en-US">
+                        <a:noFill/>
+                      </a:rPr>
+                      <a:t> </a:t>
+                    </a:r>
+                  </a:p>
+                </p:txBody>
+              </p:sp>
+            </mc:Fallback>
+          </mc:AlternateContent>
+          <mc:AlternateContent xmlns:mc="http://schemas.openxmlformats.org/markup-compatibility/2006" xmlns:a14="http://schemas.microsoft.com/office/drawing/2010/main">
+            <mc:Choice Requires="a14">
+              <p:sp>
+                <p:nvSpPr>
+                  <p:cNvPr id="32" name="TextBox 31">
+                    <a:extLst>
+                      <a:ext uri="{FF2B5EF4-FFF2-40B4-BE49-F238E27FC236}">
+                        <a16:creationId xmlns:a16="http://schemas.microsoft.com/office/drawing/2014/main" id="{39F8F641-0EE6-BE06-D369-C6C437169DE8}"/>
+                      </a:ext>
+                    </a:extLst>
+                  </p:cNvPr>
+                  <p:cNvSpPr txBox="1"/>
+                  <p:nvPr/>
+                </p:nvSpPr>
+                <p:spPr>
+                  <a:xfrm>
+                    <a:off x="1955351" y="3030601"/>
+                    <a:ext cx="1407885" cy="325025"/>
+                  </a:xfrm>
+                  <a:prstGeom prst="rect">
+                    <a:avLst/>
+                  </a:prstGeom>
+                  <a:noFill/>
+                </p:spPr>
+                <p:txBody>
+                  <a:bodyPr wrap="none" rtlCol="0">
+                    <a:spAutoFit/>
+                  </a:bodyPr>
+                  <a:lstStyle/>
+                  <a:p>
+                    <a:pPr/>
+                    <a14:m>
+                      <m:oMathPara xmlns:m="http://schemas.openxmlformats.org/officeDocument/2006/math">
+                        <m:oMathParaPr>
+                          <m:jc m:val="centerGroup"/>
+                        </m:oMathParaPr>
+                        <m:oMath xmlns:m="http://schemas.openxmlformats.org/officeDocument/2006/math">
+                          <m:sSubSup>
+                            <m:sSubSupPr>
+                              <m:ctrlPr>
+                                <a:rPr lang="en-US" sz="1400" i="1" smtClean="0">
+                                  <a:latin typeface="Cambria Math" panose="02040503050406030204" pitchFamily="18" charset="0"/>
+                                </a:rPr>
+                              </m:ctrlPr>
+                            </m:sSubSupPr>
+                            <m:e>
+                              <m:r>
+                                <a:rPr lang="en-CA" sz="1400" b="0" i="1" smtClean="0">
+                                  <a:latin typeface="Cambria Math" panose="02040503050406030204" pitchFamily="18" charset="0"/>
+                                </a:rPr>
+                                <m:t>𝑉</m:t>
+                              </m:r>
+                            </m:e>
+                            <m:sub>
+                              <m:r>
+                                <a:rPr lang="en-CA" sz="1400" b="0" i="1" smtClean="0">
+                                  <a:latin typeface="Cambria Math" panose="02040503050406030204" pitchFamily="18" charset="0"/>
+                                </a:rPr>
+                                <m:t>𝑏𝑖𝑜𝑚𝑎𝑠𝑠</m:t>
+                              </m:r>
+                            </m:sub>
+                            <m:sup>
+                              <m:r>
+                                <a:rPr lang="en-CA" sz="1400" b="0" i="1" smtClean="0">
+                                  <a:latin typeface="Cambria Math" panose="02040503050406030204" pitchFamily="18" charset="0"/>
+                                </a:rPr>
+                                <m:t>𝑘</m:t>
+                              </m:r>
+                            </m:sup>
+                          </m:sSubSup>
+                          <m:r>
+                            <a:rPr lang="en-CA" sz="1400" b="0" i="1" smtClean="0">
+                              <a:latin typeface="Cambria Math" panose="02040503050406030204" pitchFamily="18" charset="0"/>
+                            </a:rPr>
+                            <m:t>=</m:t>
+                          </m:r>
+                          <m:sSup>
+                            <m:sSupPr>
+                              <m:ctrlPr>
+                                <a:rPr lang="en-CA" sz="1400" b="0" i="1" smtClean="0">
+                                  <a:latin typeface="Cambria Math" panose="02040503050406030204" pitchFamily="18" charset="0"/>
+                                </a:rPr>
+                              </m:ctrlPr>
+                            </m:sSupPr>
+                            <m:e>
+                              <m:r>
+                                <a:rPr lang="en-CA" sz="1400" b="0" i="1" smtClean="0">
+                                  <a:latin typeface="Cambria Math" panose="02040503050406030204" pitchFamily="18" charset="0"/>
+                                </a:rPr>
+                                <m:t>𝑋</m:t>
+                              </m:r>
+                            </m:e>
+                            <m:sup>
+                              <m:r>
+                                <a:rPr lang="en-CA" sz="1400" b="0" i="1" smtClean="0">
+                                  <a:latin typeface="Cambria Math" panose="02040503050406030204" pitchFamily="18" charset="0"/>
+                                </a:rPr>
+                                <m:t>𝑘</m:t>
+                              </m:r>
+                            </m:sup>
+                          </m:sSup>
+                          <m:r>
+                            <a:rPr lang="en-CA" sz="1400" b="0" i="1" smtClean="0">
+                              <a:latin typeface="Cambria Math" panose="02040503050406030204" pitchFamily="18" charset="0"/>
+                              <a:ea typeface="Cambria Math" panose="02040503050406030204" pitchFamily="18" charset="0"/>
+                            </a:rPr>
+                            <m:t>𝜇</m:t>
+                          </m:r>
+                        </m:oMath>
+                      </m:oMathPara>
+                    </a14:m>
+                    <a:endParaRPr lang="en-US" sz="1400" dirty="0"/>
+                  </a:p>
+                </p:txBody>
+              </p:sp>
+            </mc:Choice>
+            <mc:Fallback xmlns="">
+              <p:sp>
+                <p:nvSpPr>
+                  <p:cNvPr id="32" name="TextBox 31">
+                    <a:extLst>
+                      <a:ext uri="{FF2B5EF4-FFF2-40B4-BE49-F238E27FC236}">
+                        <a16:creationId xmlns:a16="http://schemas.microsoft.com/office/drawing/2014/main" id="{39F8F641-0EE6-BE06-D369-C6C437169DE8}"/>
+                      </a:ext>
+                    </a:extLst>
+                  </p:cNvPr>
+                  <p:cNvSpPr txBox="1">
+                    <a:spLocks noRot="1" noChangeAspect="1" noMove="1" noResize="1" noEditPoints="1" noAdjustHandles="1" noChangeArrowheads="1" noChangeShapeType="1" noTextEdit="1"/>
+                  </p:cNvSpPr>
+                  <p:nvPr/>
+                </p:nvSpPr>
+                <p:spPr>
+                  <a:xfrm>
+                    <a:off x="1955351" y="3030601"/>
+                    <a:ext cx="1407885" cy="325025"/>
+                  </a:xfrm>
+                  <a:prstGeom prst="rect">
+                    <a:avLst/>
+                  </a:prstGeom>
+                  <a:blipFill>
+                    <a:blip r:embed="rId6"/>
+                    <a:stretch>
+                      <a:fillRect/>
+                    </a:stretch>
+                  </a:blipFill>
+                </p:spPr>
+                <p:txBody>
+                  <a:bodyPr/>
+                  <a:lstStyle/>
+                  <a:p>
+                    <a:r>
+                      <a:rPr lang="en-US">
+                        <a:noFill/>
+                      </a:rPr>
+                      <a:t> </a:t>
+                    </a:r>
+                  </a:p>
+                </p:txBody>
+              </p:sp>
+            </mc:Fallback>
+          </mc:AlternateContent>
+          <mc:AlternateContent xmlns:mc="http://schemas.openxmlformats.org/markup-compatibility/2006" xmlns:a14="http://schemas.microsoft.com/office/drawing/2010/main">
+            <mc:Choice Requires="a14">
+              <p:sp>
+                <p:nvSpPr>
+                  <p:cNvPr id="33" name="TextBox 32">
+                    <a:extLst>
+                      <a:ext uri="{FF2B5EF4-FFF2-40B4-BE49-F238E27FC236}">
+                        <a16:creationId xmlns:a16="http://schemas.microsoft.com/office/drawing/2014/main" id="{B27348F5-D528-FF99-BC15-88F91B7FE3EC}"/>
+                      </a:ext>
+                    </a:extLst>
+                  </p:cNvPr>
+                  <p:cNvSpPr txBox="1"/>
+                  <p:nvPr/>
+                </p:nvSpPr>
+                <p:spPr>
+                  <a:xfrm>
+                    <a:off x="2116897" y="3601662"/>
+                    <a:ext cx="1031571" cy="311560"/>
+                  </a:xfrm>
+                  <a:prstGeom prst="rect">
+                    <a:avLst/>
+                  </a:prstGeom>
+                  <a:noFill/>
+                </p:spPr>
+                <p:txBody>
+                  <a:bodyPr wrap="square" rtlCol="0">
+                    <a:spAutoFit/>
+                  </a:bodyPr>
+                  <a:lstStyle/>
+                  <a:p>
+                    <a:pPr/>
+                    <a14:m>
+                      <m:oMathPara xmlns:m="http://schemas.openxmlformats.org/officeDocument/2006/math">
+                        <m:oMathParaPr>
+                          <m:jc m:val="centerGroup"/>
+                        </m:oMathParaPr>
+                        <m:oMath xmlns:m="http://schemas.openxmlformats.org/officeDocument/2006/math">
+                          <m:sSup>
+                            <m:sSupPr>
+                              <m:ctrlPr>
+                                <a:rPr lang="en-US" sz="1400" i="1" smtClean="0">
+                                  <a:latin typeface="Cambria Math" panose="02040503050406030204" pitchFamily="18" charset="0"/>
+                                </a:rPr>
+                              </m:ctrlPr>
+                            </m:sSupPr>
+                            <m:e>
+                              <m:r>
+                                <a:rPr lang="en-CA" sz="1400" b="0" i="1" smtClean="0">
+                                  <a:latin typeface="Cambria Math" panose="02040503050406030204" pitchFamily="18" charset="0"/>
+                                </a:rPr>
+                                <m:t>𝑋</m:t>
+                              </m:r>
+                            </m:e>
+                            <m:sup>
+                              <m:r>
+                                <a:rPr lang="en-CA" sz="1400" b="0" i="1" smtClean="0">
+                                  <a:latin typeface="Cambria Math" panose="02040503050406030204" pitchFamily="18" charset="0"/>
+                                </a:rPr>
+                                <m:t>𝑘</m:t>
+                              </m:r>
+                            </m:sup>
+                          </m:sSup>
+                          <m:r>
+                            <a:rPr lang="en-US" sz="1400" i="1" smtClean="0">
+                              <a:latin typeface="Cambria Math" panose="02040503050406030204" pitchFamily="18" charset="0"/>
+                              <a:ea typeface="Cambria Math" panose="02040503050406030204" pitchFamily="18" charset="0"/>
+                            </a:rPr>
+                            <m:t>≥</m:t>
+                          </m:r>
+                          <m:r>
+                            <a:rPr lang="en-CA" sz="1400" b="0" i="1" smtClean="0">
+                              <a:latin typeface="Cambria Math" panose="02040503050406030204" pitchFamily="18" charset="0"/>
+                              <a:ea typeface="Cambria Math" panose="02040503050406030204" pitchFamily="18" charset="0"/>
+                            </a:rPr>
+                            <m:t>0</m:t>
+                          </m:r>
+                        </m:oMath>
+                      </m:oMathPara>
+                    </a14:m>
+                    <a:endParaRPr lang="en-US" sz="1400" dirty="0"/>
+                  </a:p>
+                </p:txBody>
+              </p:sp>
+            </mc:Choice>
+            <mc:Fallback xmlns="">
+              <p:sp>
+                <p:nvSpPr>
+                  <p:cNvPr id="8" name="TextBox 7">
+                    <a:extLst>
+                      <a:ext uri="{FF2B5EF4-FFF2-40B4-BE49-F238E27FC236}">
+                        <a16:creationId xmlns:a16="http://schemas.microsoft.com/office/drawing/2014/main" id="{DFD53736-C1F2-CA87-2D6B-04B5B8C4F5D6}"/>
+                      </a:ext>
+                    </a:extLst>
+                  </p:cNvPr>
+                  <p:cNvSpPr txBox="1">
+                    <a:spLocks noRot="1" noChangeAspect="1" noMove="1" noResize="1" noEditPoints="1" noAdjustHandles="1" noChangeArrowheads="1" noChangeShapeType="1" noTextEdit="1"/>
+                  </p:cNvSpPr>
+                  <p:nvPr/>
+                </p:nvSpPr>
+                <p:spPr>
+                  <a:xfrm>
+                    <a:off x="2116897" y="3601662"/>
+                    <a:ext cx="1031571" cy="311560"/>
+                  </a:xfrm>
+                  <a:prstGeom prst="rect">
+                    <a:avLst/>
+                  </a:prstGeom>
+                  <a:blipFill>
+                    <a:blip r:embed="rId8"/>
+                    <a:stretch>
+                      <a:fillRect/>
+                    </a:stretch>
+                  </a:blipFill>
+                </p:spPr>
+                <p:txBody>
+                  <a:bodyPr/>
+                  <a:lstStyle/>
+                  <a:p>
+                    <a:r>
+                      <a:rPr lang="en-US">
+                        <a:noFill/>
+                      </a:rPr>
+                      <a:t> </a:t>
+                    </a:r>
+                  </a:p>
+                </p:txBody>
+              </p:sp>
+            </mc:Fallback>
+          </mc:AlternateContent>
+          <mc:AlternateContent xmlns:mc="http://schemas.openxmlformats.org/markup-compatibility/2006" xmlns:a14="http://schemas.microsoft.com/office/drawing/2010/main">
+            <mc:Choice Requires="a14">
+              <p:sp>
+                <p:nvSpPr>
+                  <p:cNvPr id="34" name="TextBox 33">
+                    <a:extLst>
+                      <a:ext uri="{FF2B5EF4-FFF2-40B4-BE49-F238E27FC236}">
+                        <a16:creationId xmlns:a16="http://schemas.microsoft.com/office/drawing/2014/main" id="{CF7B7383-9465-856D-BB67-90FB4B48B704}"/>
+                      </a:ext>
+                    </a:extLst>
+                  </p:cNvPr>
+                  <p:cNvSpPr txBox="1"/>
+                  <p:nvPr/>
+                </p:nvSpPr>
+                <p:spPr>
+                  <a:xfrm>
+                    <a:off x="5163399" y="2381244"/>
+                    <a:ext cx="784061" cy="307777"/>
+                  </a:xfrm>
+                  <a:prstGeom prst="rect">
+                    <a:avLst/>
+                  </a:prstGeom>
+                  <a:noFill/>
+                </p:spPr>
+                <p:txBody>
+                  <a:bodyPr wrap="none" rtlCol="0">
+                    <a:spAutoFit/>
+                  </a:bodyPr>
+                  <a:lstStyle/>
+                  <a:p>
+                    <a:pPr/>
+                    <a14:m>
+                      <m:oMathPara xmlns:m="http://schemas.openxmlformats.org/officeDocument/2006/math">
+                        <m:oMathParaPr>
+                          <m:jc m:val="centerGroup"/>
+                        </m:oMathParaPr>
+                        <m:oMath xmlns:m="http://schemas.openxmlformats.org/officeDocument/2006/math">
+                          <m:r>
+                            <a:rPr lang="en-US" sz="1400" i="1" smtClean="0">
+                              <a:latin typeface="Cambria Math" panose="02040503050406030204" pitchFamily="18" charset="0"/>
+                              <a:ea typeface="Cambria Math" panose="02040503050406030204" pitchFamily="18" charset="0"/>
+                            </a:rPr>
+                            <m:t>∀</m:t>
+                          </m:r>
+                          <m:r>
+                            <a:rPr lang="en-CA" sz="1400" b="0" i="1" smtClean="0">
+                              <a:latin typeface="Cambria Math" panose="02040503050406030204" pitchFamily="18" charset="0"/>
+                              <a:ea typeface="Cambria Math" panose="02040503050406030204" pitchFamily="18" charset="0"/>
+                            </a:rPr>
+                            <m:t>𝑘</m:t>
+                          </m:r>
+                          <m:r>
+                            <a:rPr lang="en-CA" sz="1400" b="0" i="1" smtClean="0">
+                              <a:latin typeface="Cambria Math" panose="02040503050406030204" pitchFamily="18" charset="0"/>
+                              <a:ea typeface="Cambria Math" panose="02040503050406030204" pitchFamily="18" charset="0"/>
+                            </a:rPr>
+                            <m:t>∈</m:t>
+                          </m:r>
+                          <m:r>
+                            <a:rPr lang="en-CA" sz="1400" b="0" i="1" smtClean="0">
+                              <a:latin typeface="Cambria Math" panose="02040503050406030204" pitchFamily="18" charset="0"/>
+                              <a:ea typeface="Cambria Math" panose="02040503050406030204" pitchFamily="18" charset="0"/>
+                            </a:rPr>
+                            <m:t>𝐾</m:t>
+                          </m:r>
+                        </m:oMath>
+                      </m:oMathPara>
+                    </a14:m>
+                    <a:endParaRPr lang="en-US" sz="1400" dirty="0"/>
+                  </a:p>
+                </p:txBody>
+              </p:sp>
+            </mc:Choice>
+            <mc:Fallback xmlns="">
+              <p:sp>
+                <p:nvSpPr>
+                  <p:cNvPr id="9" name="TextBox 8">
+                    <a:extLst>
+                      <a:ext uri="{FF2B5EF4-FFF2-40B4-BE49-F238E27FC236}">
+                        <a16:creationId xmlns:a16="http://schemas.microsoft.com/office/drawing/2014/main" id="{1AB149D9-5EFA-775D-943D-E91493264173}"/>
+                      </a:ext>
+                    </a:extLst>
+                  </p:cNvPr>
+                  <p:cNvSpPr txBox="1">
+                    <a:spLocks noRot="1" noChangeAspect="1" noMove="1" noResize="1" noEditPoints="1" noAdjustHandles="1" noChangeArrowheads="1" noChangeShapeType="1" noTextEdit="1"/>
+                  </p:cNvSpPr>
+                  <p:nvPr/>
+                </p:nvSpPr>
+                <p:spPr>
+                  <a:xfrm>
+                    <a:off x="5163399" y="2381244"/>
+                    <a:ext cx="784061" cy="307777"/>
+                  </a:xfrm>
+                  <a:prstGeom prst="rect">
+                    <a:avLst/>
+                  </a:prstGeom>
+                  <a:blipFill>
+                    <a:blip r:embed="rId9"/>
+                    <a:stretch>
+                      <a:fillRect/>
+                    </a:stretch>
+                  </a:blipFill>
+                </p:spPr>
+                <p:txBody>
+                  <a:bodyPr/>
+                  <a:lstStyle/>
+                  <a:p>
+                    <a:r>
+                      <a:rPr lang="en-US">
+                        <a:noFill/>
+                      </a:rPr>
+                      <a:t> </a:t>
+                    </a:r>
+                  </a:p>
+                </p:txBody>
+              </p:sp>
+            </mc:Fallback>
+          </mc:AlternateContent>
+          <mc:AlternateContent xmlns:mc="http://schemas.openxmlformats.org/markup-compatibility/2006" xmlns:a14="http://schemas.microsoft.com/office/drawing/2010/main">
+            <mc:Choice Requires="a14">
+              <p:sp>
+                <p:nvSpPr>
+                  <p:cNvPr id="35" name="TextBox 34">
+                    <a:extLst>
+                      <a:ext uri="{FF2B5EF4-FFF2-40B4-BE49-F238E27FC236}">
+                        <a16:creationId xmlns:a16="http://schemas.microsoft.com/office/drawing/2014/main" id="{ACE5424B-6C77-5434-036B-0FF5EA259CE1}"/>
+                      </a:ext>
+                    </a:extLst>
+                  </p:cNvPr>
+                  <p:cNvSpPr txBox="1"/>
+                  <p:nvPr/>
+                </p:nvSpPr>
+                <p:spPr>
+                  <a:xfrm>
+                    <a:off x="1820319" y="4046035"/>
+                    <a:ext cx="2084930" cy="615168"/>
+                  </a:xfrm>
+                  <a:prstGeom prst="rect">
+                    <a:avLst/>
+                  </a:prstGeom>
+                  <a:noFill/>
+                </p:spPr>
+                <p:txBody>
+                  <a:bodyPr wrap="none" rtlCol="0">
+                    <a:spAutoFit/>
+                  </a:bodyPr>
+                  <a:lstStyle/>
+                  <a:p>
+                    <a:pPr/>
+                    <a14:m>
+                      <m:oMathPara xmlns:m="http://schemas.openxmlformats.org/officeDocument/2006/math">
+                        <m:oMathParaPr>
+                          <m:jc m:val="centerGroup"/>
+                        </m:oMathParaPr>
+                        <m:oMath xmlns:m="http://schemas.openxmlformats.org/officeDocument/2006/math">
+                          <m:sSubSup>
+                            <m:sSubSupPr>
+                              <m:ctrlPr>
+                                <a:rPr lang="en-US" sz="1400" i="1" smtClean="0">
+                                  <a:latin typeface="Cambria Math" panose="02040503050406030204" pitchFamily="18" charset="0"/>
+                                </a:rPr>
+                              </m:ctrlPr>
+                            </m:sSubSupPr>
+                            <m:e>
+                              <m:r>
+                                <a:rPr lang="en-CA" sz="1400" b="0" i="1" smtClean="0">
+                                  <a:latin typeface="Cambria Math" panose="02040503050406030204" pitchFamily="18" charset="0"/>
+                                </a:rPr>
+                                <m:t>𝑢</m:t>
+                              </m:r>
+                            </m:e>
+                            <m:sub>
+                              <m:r>
+                                <a:rPr lang="en-CA" sz="1400" b="0" i="1" smtClean="0">
+                                  <a:latin typeface="Cambria Math" panose="02040503050406030204" pitchFamily="18" charset="0"/>
+                                </a:rPr>
+                                <m:t>𝑖</m:t>
+                              </m:r>
+                            </m:sub>
+                            <m:sup>
+                              <m:r>
+                                <a:rPr lang="en-CA" sz="1400" b="0" i="1" smtClean="0">
+                                  <a:latin typeface="Cambria Math" panose="02040503050406030204" pitchFamily="18" charset="0"/>
+                                </a:rPr>
+                                <m:t>𝑐</m:t>
+                              </m:r>
+                            </m:sup>
+                          </m:sSubSup>
+                          <m:r>
+                            <a:rPr lang="en-CA" sz="1400" b="0" i="1" smtClean="0">
+                              <a:latin typeface="Cambria Math" panose="02040503050406030204" pitchFamily="18" charset="0"/>
+                            </a:rPr>
+                            <m:t>−</m:t>
+                          </m:r>
+                          <m:sSubSup>
+                            <m:sSubSupPr>
+                              <m:ctrlPr>
+                                <a:rPr lang="en-CA" sz="1400" b="0" i="1" smtClean="0">
+                                  <a:latin typeface="Cambria Math" panose="02040503050406030204" pitchFamily="18" charset="0"/>
+                                </a:rPr>
+                              </m:ctrlPr>
+                            </m:sSubSupPr>
+                            <m:e>
+                              <m:r>
+                                <a:rPr lang="en-CA" sz="1400" b="0" i="1" smtClean="0">
+                                  <a:latin typeface="Cambria Math" panose="02040503050406030204" pitchFamily="18" charset="0"/>
+                                </a:rPr>
+                                <m:t>𝑒</m:t>
+                              </m:r>
+                            </m:e>
+                            <m:sub>
+                              <m:r>
+                                <a:rPr lang="en-CA" sz="1400" b="0" i="1" smtClean="0">
+                                  <a:latin typeface="Cambria Math" panose="02040503050406030204" pitchFamily="18" charset="0"/>
+                                </a:rPr>
+                                <m:t>𝑖</m:t>
+                              </m:r>
+                            </m:sub>
+                            <m:sup>
+                              <m:r>
+                                <a:rPr lang="en-CA" sz="1400" b="0" i="1" smtClean="0">
+                                  <a:latin typeface="Cambria Math" panose="02040503050406030204" pitchFamily="18" charset="0"/>
+                                </a:rPr>
+                                <m:t>𝑐</m:t>
+                              </m:r>
+                            </m:sup>
+                          </m:sSubSup>
+                          <m:r>
+                            <a:rPr lang="en-CA" sz="1400" b="0" i="1" smtClean="0">
+                              <a:latin typeface="Cambria Math" panose="02040503050406030204" pitchFamily="18" charset="0"/>
+                            </a:rPr>
+                            <m:t>+</m:t>
+                          </m:r>
+                          <m:nary>
+                            <m:naryPr>
+                              <m:chr m:val="∑"/>
+                              <m:supHide m:val="on"/>
+                              <m:ctrlPr>
+                                <a:rPr lang="en-CA" sz="1400" b="0" i="1" smtClean="0">
+                                  <a:latin typeface="Cambria Math" panose="02040503050406030204" pitchFamily="18" charset="0"/>
+                                </a:rPr>
+                              </m:ctrlPr>
+                            </m:naryPr>
+                            <m:sub>
+                              <m:r>
+                                <m:rPr>
+                                  <m:brk m:alnAt="7"/>
+                                </m:rPr>
+                                <a:rPr lang="en-CA" sz="1400" b="0" i="1" smtClean="0">
+                                  <a:latin typeface="Cambria Math" panose="02040503050406030204" pitchFamily="18" charset="0"/>
+                                </a:rPr>
+                                <m:t>𝑘</m:t>
+                              </m:r>
+                              <m:r>
+                                <a:rPr lang="en-CA" sz="1400" b="0" i="1" smtClean="0">
+                                  <a:latin typeface="Cambria Math" panose="02040503050406030204" pitchFamily="18" charset="0"/>
+                                  <a:ea typeface="Cambria Math" panose="02040503050406030204" pitchFamily="18" charset="0"/>
+                                </a:rPr>
+                                <m:t>∈</m:t>
+                              </m:r>
+                              <m:r>
+                                <a:rPr lang="en-CA" sz="1400" b="0" i="1" smtClean="0">
+                                  <a:latin typeface="Cambria Math" panose="02040503050406030204" pitchFamily="18" charset="0"/>
+                                  <a:ea typeface="Cambria Math" panose="02040503050406030204" pitchFamily="18" charset="0"/>
+                                </a:rPr>
+                                <m:t>𝐾</m:t>
+                              </m:r>
+                            </m:sub>
+                            <m:sup/>
+                            <m:e>
+                              <m:sSubSup>
+                                <m:sSubSupPr>
+                                  <m:ctrlPr>
+                                    <a:rPr lang="en-CA" sz="1400" b="0" i="1" smtClean="0">
+                                      <a:latin typeface="Cambria Math" panose="02040503050406030204" pitchFamily="18" charset="0"/>
+                                    </a:rPr>
+                                  </m:ctrlPr>
+                                </m:sSubSupPr>
+                                <m:e>
+                                  <m:r>
+                                    <a:rPr lang="en-CA" sz="1400" b="0" i="1" smtClean="0">
+                                      <a:latin typeface="Cambria Math" panose="02040503050406030204" pitchFamily="18" charset="0"/>
+                                    </a:rPr>
+                                    <m:t>𝑉</m:t>
+                                  </m:r>
+                                </m:e>
+                                <m:sub>
+                                  <m:r>
+                                    <a:rPr lang="en-CA" sz="1400" b="0" i="1" smtClean="0">
+                                      <a:latin typeface="Cambria Math" panose="02040503050406030204" pitchFamily="18" charset="0"/>
+                                    </a:rPr>
+                                    <m:t>𝑒𝑥</m:t>
+                                  </m:r>
+                                  <m:r>
+                                    <a:rPr lang="en-CA" sz="1400" b="0" i="1" smtClean="0">
+                                      <a:latin typeface="Cambria Math" panose="02040503050406030204" pitchFamily="18" charset="0"/>
+                                    </a:rPr>
+                                    <m:t>(</m:t>
+                                  </m:r>
+                                  <m:r>
+                                    <a:rPr lang="en-CA" sz="1400" b="0" i="1" smtClean="0">
+                                      <a:latin typeface="Cambria Math" panose="02040503050406030204" pitchFamily="18" charset="0"/>
+                                    </a:rPr>
+                                    <m:t>𝑖</m:t>
+                                  </m:r>
+                                  <m:r>
+                                    <a:rPr lang="en-CA" sz="1400" b="0" i="1" smtClean="0">
+                                      <a:latin typeface="Cambria Math" panose="02040503050406030204" pitchFamily="18" charset="0"/>
+                                    </a:rPr>
+                                    <m:t>)</m:t>
+                                  </m:r>
+                                </m:sub>
+                                <m:sup>
+                                  <m:r>
+                                    <a:rPr lang="en-CA" sz="1400" b="0" i="1" smtClean="0">
+                                      <a:latin typeface="Cambria Math" panose="02040503050406030204" pitchFamily="18" charset="0"/>
+                                    </a:rPr>
+                                    <m:t>𝑘</m:t>
+                                  </m:r>
+                                </m:sup>
+                              </m:sSubSup>
+                              <m:r>
+                                <a:rPr lang="en-CA" sz="1400" b="0" i="1" smtClean="0">
+                                  <a:latin typeface="Cambria Math" panose="02040503050406030204" pitchFamily="18" charset="0"/>
+                                </a:rPr>
+                                <m:t>=0,</m:t>
+                              </m:r>
+                            </m:e>
+                          </m:nary>
+                        </m:oMath>
+                      </m:oMathPara>
+                    </a14:m>
+                    <a:endParaRPr lang="en-US" sz="1400" dirty="0"/>
+                  </a:p>
+                </p:txBody>
+              </p:sp>
+            </mc:Choice>
+            <mc:Fallback xmlns="">
+              <p:sp>
+                <p:nvSpPr>
+                  <p:cNvPr id="35" name="TextBox 34">
+                    <a:extLst>
+                      <a:ext uri="{FF2B5EF4-FFF2-40B4-BE49-F238E27FC236}">
+                        <a16:creationId xmlns:a16="http://schemas.microsoft.com/office/drawing/2014/main" id="{ACE5424B-6C77-5434-036B-0FF5EA259CE1}"/>
+                      </a:ext>
+                    </a:extLst>
+                  </p:cNvPr>
+                  <p:cNvSpPr txBox="1">
+                    <a:spLocks noRot="1" noChangeAspect="1" noMove="1" noResize="1" noEditPoints="1" noAdjustHandles="1" noChangeArrowheads="1" noChangeShapeType="1" noTextEdit="1"/>
+                  </p:cNvSpPr>
+                  <p:nvPr/>
+                </p:nvSpPr>
+                <p:spPr>
+                  <a:xfrm>
+                    <a:off x="1820319" y="4046035"/>
+                    <a:ext cx="2084930" cy="615168"/>
+                  </a:xfrm>
+                  <a:prstGeom prst="rect">
+                    <a:avLst/>
+                  </a:prstGeom>
+                  <a:blipFill>
+                    <a:blip r:embed="rId10"/>
+                    <a:stretch>
+                      <a:fillRect t="-118367" b="-169388"/>
+                    </a:stretch>
+                  </a:blipFill>
+                </p:spPr>
+                <p:txBody>
+                  <a:bodyPr/>
+                  <a:lstStyle/>
+                  <a:p>
+                    <a:r>
+                      <a:rPr lang="en-US">
+                        <a:noFill/>
+                      </a:rPr>
+                      <a:t> </a:t>
+                    </a:r>
+                  </a:p>
+                </p:txBody>
+              </p:sp>
+            </mc:Fallback>
+          </mc:AlternateContent>
+          <mc:AlternateContent xmlns:mc="http://schemas.openxmlformats.org/markup-compatibility/2006" xmlns:a14="http://schemas.microsoft.com/office/drawing/2010/main">
+            <mc:Choice Requires="a14">
+              <p:sp>
+                <p:nvSpPr>
+                  <p:cNvPr id="36" name="TextBox 35">
+                    <a:extLst>
+                      <a:ext uri="{FF2B5EF4-FFF2-40B4-BE49-F238E27FC236}">
+                        <a16:creationId xmlns:a16="http://schemas.microsoft.com/office/drawing/2014/main" id="{FD1A5D67-6FB1-159B-EF6B-AA66036CD687}"/>
+                      </a:ext>
+                    </a:extLst>
+                  </p:cNvPr>
+                  <p:cNvSpPr txBox="1"/>
+                  <p:nvPr/>
+                </p:nvSpPr>
+                <p:spPr>
+                  <a:xfrm>
+                    <a:off x="4228634" y="4126731"/>
+                    <a:ext cx="957955" cy="307777"/>
+                  </a:xfrm>
+                  <a:prstGeom prst="rect">
+                    <a:avLst/>
+                  </a:prstGeom>
+                  <a:noFill/>
+                </p:spPr>
+                <p:txBody>
+                  <a:bodyPr wrap="none" rtlCol="0">
+                    <a:spAutoFit/>
+                  </a:bodyPr>
+                  <a:lstStyle/>
+                  <a:p>
+                    <a:pPr/>
+                    <a14:m>
+                      <m:oMathPara xmlns:m="http://schemas.openxmlformats.org/officeDocument/2006/math">
+                        <m:oMathParaPr>
+                          <m:jc m:val="centerGroup"/>
+                        </m:oMathParaPr>
+                        <m:oMath xmlns:m="http://schemas.openxmlformats.org/officeDocument/2006/math">
+                          <m:r>
+                            <a:rPr lang="en-US" sz="1400" i="1" smtClean="0">
+                              <a:latin typeface="Cambria Math" panose="02040503050406030204" pitchFamily="18" charset="0"/>
+                              <a:ea typeface="Cambria Math" panose="02040503050406030204" pitchFamily="18" charset="0"/>
+                            </a:rPr>
+                            <m:t>∀</m:t>
+                          </m:r>
+                          <m:r>
+                            <a:rPr lang="en-CA" sz="1400" b="0" i="1" smtClean="0">
+                              <a:latin typeface="Cambria Math" panose="02040503050406030204" pitchFamily="18" charset="0"/>
+                              <a:ea typeface="Cambria Math" panose="02040503050406030204" pitchFamily="18" charset="0"/>
+                            </a:rPr>
+                            <m:t>𝑖</m:t>
+                          </m:r>
+                          <m:r>
+                            <a:rPr lang="en-CA" sz="1400" b="0" i="1" smtClean="0">
+                              <a:latin typeface="Cambria Math" panose="02040503050406030204" pitchFamily="18" charset="0"/>
+                              <a:ea typeface="Cambria Math" panose="02040503050406030204" pitchFamily="18" charset="0"/>
+                            </a:rPr>
+                            <m:t>∈</m:t>
+                          </m:r>
+                          <m:sSup>
+                            <m:sSupPr>
+                              <m:ctrlPr>
+                                <a:rPr lang="en-CA" sz="1400" b="0" i="1" smtClean="0">
+                                  <a:latin typeface="Cambria Math" panose="02040503050406030204" pitchFamily="18" charset="0"/>
+                                  <a:ea typeface="Cambria Math" panose="02040503050406030204" pitchFamily="18" charset="0"/>
+                                </a:rPr>
+                              </m:ctrlPr>
+                            </m:sSupPr>
+                            <m:e>
+                              <m:r>
+                                <a:rPr lang="en-CA" sz="1400" b="0" i="1" smtClean="0">
+                                  <a:latin typeface="Cambria Math" panose="02040503050406030204" pitchFamily="18" charset="0"/>
+                                  <a:ea typeface="Cambria Math" panose="02040503050406030204" pitchFamily="18" charset="0"/>
+                                </a:rPr>
+                                <m:t>𝐼</m:t>
+                              </m:r>
+                            </m:e>
+                            <m:sup>
+                              <m:r>
+                                <a:rPr lang="en-CA" sz="1400" b="0" i="1" smtClean="0">
+                                  <a:latin typeface="Cambria Math" panose="02040503050406030204" pitchFamily="18" charset="0"/>
+                                  <a:ea typeface="Cambria Math" panose="02040503050406030204" pitchFamily="18" charset="0"/>
+                                </a:rPr>
+                                <m:t>𝑐𝑜𝑚</m:t>
+                              </m:r>
+                            </m:sup>
+                          </m:sSup>
+                        </m:oMath>
+                      </m:oMathPara>
+                    </a14:m>
+                    <a:endParaRPr lang="en-US" sz="1400" dirty="0"/>
+                  </a:p>
+                </p:txBody>
+              </p:sp>
+            </mc:Choice>
+            <mc:Fallback xmlns="">
+              <p:sp>
+                <p:nvSpPr>
+                  <p:cNvPr id="36" name="TextBox 35">
+                    <a:extLst>
+                      <a:ext uri="{FF2B5EF4-FFF2-40B4-BE49-F238E27FC236}">
+                        <a16:creationId xmlns:a16="http://schemas.microsoft.com/office/drawing/2014/main" id="{FD1A5D67-6FB1-159B-EF6B-AA66036CD687}"/>
+                      </a:ext>
+                    </a:extLst>
+                  </p:cNvPr>
+                  <p:cNvSpPr txBox="1">
+                    <a:spLocks noRot="1" noChangeAspect="1" noMove="1" noResize="1" noEditPoints="1" noAdjustHandles="1" noChangeArrowheads="1" noChangeShapeType="1" noTextEdit="1"/>
+                  </p:cNvSpPr>
+                  <p:nvPr/>
+                </p:nvSpPr>
+                <p:spPr>
+                  <a:xfrm>
+                    <a:off x="4228634" y="4126731"/>
+                    <a:ext cx="957955" cy="307777"/>
+                  </a:xfrm>
+                  <a:prstGeom prst="rect">
+                    <a:avLst/>
+                  </a:prstGeom>
+                  <a:blipFill>
+                    <a:blip r:embed="rId11"/>
+                    <a:stretch>
+                      <a:fillRect/>
+                    </a:stretch>
+                  </a:blipFill>
+                </p:spPr>
+                <p:txBody>
+                  <a:bodyPr/>
+                  <a:lstStyle/>
+                  <a:p>
+                    <a:r>
+                      <a:rPr lang="en-US">
+                        <a:noFill/>
+                      </a:rPr>
+                      <a:t> </a:t>
+                    </a:r>
+                  </a:p>
+                </p:txBody>
+              </p:sp>
+            </mc:Fallback>
+          </mc:AlternateContent>
+          <mc:AlternateContent xmlns:mc="http://schemas.openxmlformats.org/markup-compatibility/2006" xmlns:a14="http://schemas.microsoft.com/office/drawing/2010/main">
+            <mc:Choice Requires="a14">
+              <p:sp>
+                <p:nvSpPr>
+                  <p:cNvPr id="37" name="TextBox 36">
+                    <a:extLst>
+                      <a:ext uri="{FF2B5EF4-FFF2-40B4-BE49-F238E27FC236}">
+                        <a16:creationId xmlns:a16="http://schemas.microsoft.com/office/drawing/2014/main" id="{D292B7C3-C5EA-ED8A-A8E4-2C20582995BD}"/>
+                      </a:ext>
+                    </a:extLst>
+                  </p:cNvPr>
+                  <p:cNvSpPr txBox="1"/>
+                  <p:nvPr/>
+                </p:nvSpPr>
+                <p:spPr>
+                  <a:xfrm>
+                    <a:off x="1894530" y="4687802"/>
+                    <a:ext cx="1155957" cy="615168"/>
+                  </a:xfrm>
+                  <a:prstGeom prst="rect">
+                    <a:avLst/>
+                  </a:prstGeom>
+                  <a:noFill/>
+                </p:spPr>
+                <p:txBody>
+                  <a:bodyPr wrap="none" rtlCol="0">
+                    <a:spAutoFit/>
+                  </a:bodyPr>
+                  <a:lstStyle/>
+                  <a:p>
+                    <a:pPr/>
+                    <a14:m>
+                      <m:oMathPara xmlns:m="http://schemas.openxmlformats.org/officeDocument/2006/math">
+                        <m:oMathParaPr>
+                          <m:jc m:val="centerGroup"/>
+                        </m:oMathParaPr>
+                        <m:oMath xmlns:m="http://schemas.openxmlformats.org/officeDocument/2006/math">
+                          <m:nary>
+                            <m:naryPr>
+                              <m:chr m:val="∑"/>
+                              <m:supHide m:val="on"/>
+                              <m:ctrlPr>
+                                <a:rPr lang="en-CA" sz="1400" b="0" i="1" smtClean="0">
+                                  <a:latin typeface="Cambria Math" panose="02040503050406030204" pitchFamily="18" charset="0"/>
+                                </a:rPr>
+                              </m:ctrlPr>
+                            </m:naryPr>
+                            <m:sub>
+                              <m:r>
+                                <m:rPr>
+                                  <m:brk m:alnAt="7"/>
+                                </m:rPr>
+                                <a:rPr lang="en-CA" sz="1400" b="0" i="1" smtClean="0">
+                                  <a:latin typeface="Cambria Math" panose="02040503050406030204" pitchFamily="18" charset="0"/>
+                                </a:rPr>
+                                <m:t>𝑘</m:t>
+                              </m:r>
+                              <m:r>
+                                <a:rPr lang="en-CA" sz="1400" b="0" i="1" smtClean="0">
+                                  <a:latin typeface="Cambria Math" panose="02040503050406030204" pitchFamily="18" charset="0"/>
+                                  <a:ea typeface="Cambria Math" panose="02040503050406030204" pitchFamily="18" charset="0"/>
+                                </a:rPr>
+                                <m:t>∈</m:t>
+                              </m:r>
+                              <m:r>
+                                <a:rPr lang="en-CA" sz="1400" b="0" i="1" smtClean="0">
+                                  <a:latin typeface="Cambria Math" panose="02040503050406030204" pitchFamily="18" charset="0"/>
+                                  <a:ea typeface="Cambria Math" panose="02040503050406030204" pitchFamily="18" charset="0"/>
+                                </a:rPr>
+                                <m:t>𝐾</m:t>
+                              </m:r>
+                            </m:sub>
+                            <m:sup/>
+                            <m:e>
+                              <m:sSup>
+                                <m:sSupPr>
+                                  <m:ctrlPr>
+                                    <a:rPr lang="en-CA" sz="1400" b="0" i="1" smtClean="0">
+                                      <a:latin typeface="Cambria Math" panose="02040503050406030204" pitchFamily="18" charset="0"/>
+                                    </a:rPr>
+                                  </m:ctrlPr>
+                                </m:sSupPr>
+                                <m:e>
+                                  <m:r>
+                                    <a:rPr lang="en-CA" sz="1400" b="0" i="1" smtClean="0">
+                                      <a:latin typeface="Cambria Math" panose="02040503050406030204" pitchFamily="18" charset="0"/>
+                                    </a:rPr>
+                                    <m:t>𝑋</m:t>
+                                  </m:r>
+                                </m:e>
+                                <m:sup>
+                                  <m:r>
+                                    <a:rPr lang="en-CA" sz="1400" b="0" i="1" smtClean="0">
+                                      <a:latin typeface="Cambria Math" panose="02040503050406030204" pitchFamily="18" charset="0"/>
+                                    </a:rPr>
+                                    <m:t>𝑘</m:t>
+                                  </m:r>
+                                </m:sup>
+                              </m:sSup>
+                              <m:r>
+                                <a:rPr lang="en-CA" sz="1400" b="0" i="1" smtClean="0">
+                                  <a:latin typeface="Cambria Math" panose="02040503050406030204" pitchFamily="18" charset="0"/>
+                                </a:rPr>
+                                <m:t>=</m:t>
+                              </m:r>
+                              <m:sSub>
+                                <m:sSubPr>
+                                  <m:ctrlPr>
+                                    <a:rPr lang="en-CA" sz="1400" b="0" i="1" smtClean="0">
+                                      <a:latin typeface="Cambria Math" panose="02040503050406030204" pitchFamily="18" charset="0"/>
+                                    </a:rPr>
+                                  </m:ctrlPr>
+                                </m:sSubPr>
+                                <m:e>
+                                  <m:r>
+                                    <a:rPr lang="en-CA" sz="1400" b="0" i="1" smtClean="0">
+                                      <a:latin typeface="Cambria Math" panose="02040503050406030204" pitchFamily="18" charset="0"/>
+                                    </a:rPr>
+                                    <m:t>𝑋</m:t>
+                                  </m:r>
+                                </m:e>
+                                <m:sub>
+                                  <m:r>
+                                    <a:rPr lang="en-CA" sz="1400" b="0" i="1" smtClean="0">
+                                      <a:latin typeface="Cambria Math" panose="02040503050406030204" pitchFamily="18" charset="0"/>
+                                    </a:rPr>
+                                    <m:t>0</m:t>
+                                  </m:r>
+                                </m:sub>
+                              </m:sSub>
+                            </m:e>
+                          </m:nary>
+                        </m:oMath>
+                      </m:oMathPara>
+                    </a14:m>
+                    <a:endParaRPr lang="en-US" sz="1400" dirty="0"/>
+                  </a:p>
+                </p:txBody>
+              </p:sp>
+            </mc:Choice>
+            <mc:Fallback xmlns="">
+              <p:sp>
+                <p:nvSpPr>
+                  <p:cNvPr id="37" name="TextBox 36">
+                    <a:extLst>
+                      <a:ext uri="{FF2B5EF4-FFF2-40B4-BE49-F238E27FC236}">
+                        <a16:creationId xmlns:a16="http://schemas.microsoft.com/office/drawing/2014/main" id="{D292B7C3-C5EA-ED8A-A8E4-2C20582995BD}"/>
+                      </a:ext>
+                    </a:extLst>
+                  </p:cNvPr>
+                  <p:cNvSpPr txBox="1">
+                    <a:spLocks noRot="1" noChangeAspect="1" noMove="1" noResize="1" noEditPoints="1" noAdjustHandles="1" noChangeArrowheads="1" noChangeShapeType="1" noTextEdit="1"/>
+                  </p:cNvSpPr>
+                  <p:nvPr/>
+                </p:nvSpPr>
+                <p:spPr>
+                  <a:xfrm>
+                    <a:off x="1894530" y="4687802"/>
+                    <a:ext cx="1155957" cy="615168"/>
+                  </a:xfrm>
+                  <a:prstGeom prst="rect">
+                    <a:avLst/>
+                  </a:prstGeom>
+                  <a:blipFill>
+                    <a:blip r:embed="rId12"/>
+                    <a:stretch>
+                      <a:fillRect l="-47826" t="-118367" b="-171429"/>
+                    </a:stretch>
+                  </a:blipFill>
+                </p:spPr>
+                <p:txBody>
+                  <a:bodyPr/>
+                  <a:lstStyle/>
+                  <a:p>
+                    <a:r>
+                      <a:rPr lang="en-US">
+                        <a:noFill/>
+                      </a:rPr>
+                      <a:t> </a:t>
+                    </a:r>
+                  </a:p>
+                </p:txBody>
+              </p:sp>
+            </mc:Fallback>
+          </mc:AlternateContent>
+          <mc:AlternateContent xmlns:mc="http://schemas.openxmlformats.org/markup-compatibility/2006" xmlns:a14="http://schemas.microsoft.com/office/drawing/2010/main">
+            <mc:Choice Requires="a14">
+              <p:sp>
+                <p:nvSpPr>
+                  <p:cNvPr id="38" name="TextBox 37">
+                    <a:extLst>
+                      <a:ext uri="{FF2B5EF4-FFF2-40B4-BE49-F238E27FC236}">
+                        <a16:creationId xmlns:a16="http://schemas.microsoft.com/office/drawing/2014/main" id="{C271DC36-BA7E-88AC-5820-8970A16F3FB8}"/>
+                      </a:ext>
+                    </a:extLst>
+                  </p:cNvPr>
+                  <p:cNvSpPr txBox="1"/>
+                  <p:nvPr/>
+                </p:nvSpPr>
+                <p:spPr>
+                  <a:xfrm>
+                    <a:off x="1905317" y="5813057"/>
+                    <a:ext cx="327334" cy="307777"/>
+                  </a:xfrm>
+                  <a:prstGeom prst="rect">
+                    <a:avLst/>
+                  </a:prstGeom>
+                  <a:noFill/>
+                </p:spPr>
+                <p:txBody>
+                  <a:bodyPr wrap="none" rtlCol="0">
+                    <a:spAutoFit/>
+                  </a:bodyPr>
+                  <a:lstStyle/>
+                  <a:p>
+                    <a:pPr/>
+                    <a14:m>
+                      <m:oMathPara xmlns:m="http://schemas.openxmlformats.org/officeDocument/2006/math">
+                        <m:oMathParaPr>
+                          <m:jc m:val="centerGroup"/>
+                        </m:oMathParaPr>
+                        <m:oMath xmlns:m="http://schemas.openxmlformats.org/officeDocument/2006/math">
+                          <m:r>
+                            <a:rPr lang="en-US" sz="1400" i="1" smtClean="0">
+                              <a:latin typeface="Cambria Math" panose="02040503050406030204" pitchFamily="18" charset="0"/>
+                              <a:ea typeface="Cambria Math" panose="02040503050406030204" pitchFamily="18" charset="0"/>
+                            </a:rPr>
+                            <m:t>𝜇</m:t>
+                          </m:r>
+                        </m:oMath>
+                      </m:oMathPara>
+                    </a14:m>
+                    <a:endParaRPr lang="en-US" sz="1400" dirty="0"/>
+                  </a:p>
+                </p:txBody>
+              </p:sp>
+            </mc:Choice>
+            <mc:Fallback xmlns="">
+              <p:sp>
+                <p:nvSpPr>
+                  <p:cNvPr id="38" name="TextBox 37">
+                    <a:extLst>
+                      <a:ext uri="{FF2B5EF4-FFF2-40B4-BE49-F238E27FC236}">
+                        <a16:creationId xmlns:a16="http://schemas.microsoft.com/office/drawing/2014/main" id="{C271DC36-BA7E-88AC-5820-8970A16F3FB8}"/>
+                      </a:ext>
+                    </a:extLst>
+                  </p:cNvPr>
+                  <p:cNvSpPr txBox="1">
+                    <a:spLocks noRot="1" noChangeAspect="1" noMove="1" noResize="1" noEditPoints="1" noAdjustHandles="1" noChangeArrowheads="1" noChangeShapeType="1" noTextEdit="1"/>
+                  </p:cNvSpPr>
+                  <p:nvPr/>
+                </p:nvSpPr>
+                <p:spPr>
+                  <a:xfrm>
+                    <a:off x="1905317" y="5813057"/>
+                    <a:ext cx="327334" cy="307777"/>
+                  </a:xfrm>
+                  <a:prstGeom prst="rect">
+                    <a:avLst/>
+                  </a:prstGeom>
+                  <a:blipFill>
+                    <a:blip r:embed="rId13"/>
+                    <a:stretch>
+                      <a:fillRect/>
+                    </a:stretch>
+                  </a:blipFill>
+                </p:spPr>
+                <p:txBody>
+                  <a:bodyPr/>
+                  <a:lstStyle/>
+                  <a:p>
+                    <a:r>
+                      <a:rPr lang="en-US">
+                        <a:noFill/>
+                      </a:rPr>
+                      <a:t> </a:t>
+                    </a:r>
+                  </a:p>
+                </p:txBody>
+              </p:sp>
+            </mc:Fallback>
+          </mc:AlternateContent>
+          <mc:AlternateContent xmlns:mc="http://schemas.openxmlformats.org/markup-compatibility/2006" xmlns:a14="http://schemas.microsoft.com/office/drawing/2010/main">
+            <mc:Choice Requires="a14">
+              <p:sp>
+                <p:nvSpPr>
+                  <p:cNvPr id="39" name="TextBox 38">
+                    <a:extLst>
+                      <a:ext uri="{FF2B5EF4-FFF2-40B4-BE49-F238E27FC236}">
+                        <a16:creationId xmlns:a16="http://schemas.microsoft.com/office/drawing/2014/main" id="{E45F706C-17FD-FF21-0FB4-E01D4B802745}"/>
+                      </a:ext>
+                    </a:extLst>
+                  </p:cNvPr>
+                  <p:cNvSpPr txBox="1"/>
+                  <p:nvPr/>
+                </p:nvSpPr>
+                <p:spPr>
+                  <a:xfrm>
+                    <a:off x="2806643" y="5833184"/>
+                    <a:ext cx="735330" cy="308546"/>
+                  </a:xfrm>
+                  <a:prstGeom prst="rect">
+                    <a:avLst/>
+                  </a:prstGeom>
+                  <a:noFill/>
+                </p:spPr>
+                <p:txBody>
+                  <a:bodyPr wrap="none" rtlCol="0">
+                    <a:spAutoFit/>
+                  </a:bodyPr>
+                  <a:lstStyle/>
+                  <a:p>
+                    <a:pPr/>
+                    <a14:m>
+                      <m:oMathPara xmlns:m="http://schemas.openxmlformats.org/officeDocument/2006/math">
+                        <m:oMathParaPr>
+                          <m:jc m:val="centerGroup"/>
+                        </m:oMathParaPr>
+                        <m:oMath xmlns:m="http://schemas.openxmlformats.org/officeDocument/2006/math">
+                          <m:sSubSup>
+                            <m:sSubSupPr>
+                              <m:ctrlPr>
+                                <a:rPr lang="en-US" sz="1400" i="1" smtClean="0">
+                                  <a:latin typeface="Cambria Math" panose="02040503050406030204" pitchFamily="18" charset="0"/>
+                                </a:rPr>
+                              </m:ctrlPr>
+                            </m:sSubSupPr>
+                            <m:e>
+                              <m:r>
+                                <a:rPr lang="en-CA" sz="1400" b="0" i="1" smtClean="0">
+                                  <a:latin typeface="Cambria Math" panose="02040503050406030204" pitchFamily="18" charset="0"/>
+                                </a:rPr>
+                                <m:t>𝑒</m:t>
+                              </m:r>
+                            </m:e>
+                            <m:sub>
+                              <m:r>
+                                <a:rPr lang="en-CA" sz="1400" b="0" i="1" smtClean="0">
+                                  <a:latin typeface="Cambria Math" panose="02040503050406030204" pitchFamily="18" charset="0"/>
+                                </a:rPr>
+                                <m:t>𝑖</m:t>
+                              </m:r>
+                            </m:sub>
+                            <m:sup>
+                              <m:r>
+                                <a:rPr lang="en-CA" sz="1400" b="0" i="1" smtClean="0">
+                                  <a:latin typeface="Cambria Math" panose="02040503050406030204" pitchFamily="18" charset="0"/>
+                                </a:rPr>
+                                <m:t>𝑐</m:t>
+                              </m:r>
+                            </m:sup>
+                          </m:sSubSup>
+                          <m:r>
+                            <a:rPr lang="en-US" sz="1400" i="1" smtClean="0">
+                              <a:latin typeface="Cambria Math" panose="02040503050406030204" pitchFamily="18" charset="0"/>
+                              <a:ea typeface="Cambria Math" panose="02040503050406030204" pitchFamily="18" charset="0"/>
+                            </a:rPr>
+                            <m:t>≥</m:t>
+                          </m:r>
+                          <m:r>
+                            <a:rPr lang="en-CA" sz="1400" b="0" i="1" smtClean="0">
+                              <a:latin typeface="Cambria Math" panose="02040503050406030204" pitchFamily="18" charset="0"/>
+                              <a:ea typeface="Cambria Math" panose="02040503050406030204" pitchFamily="18" charset="0"/>
+                            </a:rPr>
+                            <m:t>0</m:t>
+                          </m:r>
+                        </m:oMath>
+                      </m:oMathPara>
+                    </a14:m>
+                    <a:endParaRPr lang="en-US" sz="1400" dirty="0"/>
+                  </a:p>
+                </p:txBody>
+              </p:sp>
+            </mc:Choice>
+            <mc:Fallback xmlns="">
+              <p:sp>
+                <p:nvSpPr>
+                  <p:cNvPr id="39" name="TextBox 38">
+                    <a:extLst>
+                      <a:ext uri="{FF2B5EF4-FFF2-40B4-BE49-F238E27FC236}">
+                        <a16:creationId xmlns:a16="http://schemas.microsoft.com/office/drawing/2014/main" id="{E45F706C-17FD-FF21-0FB4-E01D4B802745}"/>
+                      </a:ext>
+                    </a:extLst>
+                  </p:cNvPr>
+                  <p:cNvSpPr txBox="1">
+                    <a:spLocks noRot="1" noChangeAspect="1" noMove="1" noResize="1" noEditPoints="1" noAdjustHandles="1" noChangeArrowheads="1" noChangeShapeType="1" noTextEdit="1"/>
+                  </p:cNvSpPr>
+                  <p:nvPr/>
+                </p:nvSpPr>
+                <p:spPr>
+                  <a:xfrm>
+                    <a:off x="2806643" y="5833184"/>
+                    <a:ext cx="735330" cy="308546"/>
+                  </a:xfrm>
+                  <a:prstGeom prst="rect">
+                    <a:avLst/>
+                  </a:prstGeom>
+                  <a:blipFill>
+                    <a:blip r:embed="rId14"/>
+                    <a:stretch>
+                      <a:fillRect/>
+                    </a:stretch>
+                  </a:blipFill>
+                </p:spPr>
+                <p:txBody>
+                  <a:bodyPr/>
+                  <a:lstStyle/>
+                  <a:p>
+                    <a:r>
+                      <a:rPr lang="en-US">
+                        <a:noFill/>
+                      </a:rPr>
+                      <a:t> </a:t>
+                    </a:r>
+                  </a:p>
+                </p:txBody>
+              </p:sp>
+            </mc:Fallback>
+          </mc:AlternateContent>
+          <mc:AlternateContent xmlns:mc="http://schemas.openxmlformats.org/markup-compatibility/2006" xmlns:a14="http://schemas.microsoft.com/office/drawing/2010/main">
+            <mc:Choice Requires="a14">
+              <p:sp>
+                <p:nvSpPr>
+                  <p:cNvPr id="40" name="TextBox 39">
+                    <a:extLst>
+                      <a:ext uri="{FF2B5EF4-FFF2-40B4-BE49-F238E27FC236}">
+                        <a16:creationId xmlns:a16="http://schemas.microsoft.com/office/drawing/2014/main" id="{D7059601-887E-900B-5223-85EE2ED193A1}"/>
+                      </a:ext>
+                    </a:extLst>
+                  </p:cNvPr>
+                  <p:cNvSpPr txBox="1"/>
+                  <p:nvPr/>
+                </p:nvSpPr>
+                <p:spPr>
+                  <a:xfrm>
+                    <a:off x="3903525" y="5833184"/>
+                    <a:ext cx="957955" cy="307777"/>
+                  </a:xfrm>
+                  <a:prstGeom prst="rect">
+                    <a:avLst/>
+                  </a:prstGeom>
+                  <a:noFill/>
+                </p:spPr>
+                <p:txBody>
+                  <a:bodyPr wrap="none" rtlCol="0">
+                    <a:spAutoFit/>
+                  </a:bodyPr>
+                  <a:lstStyle/>
+                  <a:p>
+                    <a:pPr/>
+                    <a14:m>
+                      <m:oMathPara xmlns:m="http://schemas.openxmlformats.org/officeDocument/2006/math">
+                        <m:oMathParaPr>
+                          <m:jc m:val="centerGroup"/>
+                        </m:oMathParaPr>
+                        <m:oMath xmlns:m="http://schemas.openxmlformats.org/officeDocument/2006/math">
+                          <m:r>
+                            <a:rPr lang="en-US" sz="1400" i="1" smtClean="0">
+                              <a:latin typeface="Cambria Math" panose="02040503050406030204" pitchFamily="18" charset="0"/>
+                              <a:ea typeface="Cambria Math" panose="02040503050406030204" pitchFamily="18" charset="0"/>
+                            </a:rPr>
+                            <m:t>∀</m:t>
+                          </m:r>
+                          <m:r>
+                            <a:rPr lang="en-CA" sz="1400" b="0" i="1" smtClean="0">
+                              <a:latin typeface="Cambria Math" panose="02040503050406030204" pitchFamily="18" charset="0"/>
+                              <a:ea typeface="Cambria Math" panose="02040503050406030204" pitchFamily="18" charset="0"/>
+                            </a:rPr>
+                            <m:t>𝑖</m:t>
+                          </m:r>
+                          <m:r>
+                            <a:rPr lang="en-CA" sz="1400" b="0" i="1" smtClean="0">
+                              <a:latin typeface="Cambria Math" panose="02040503050406030204" pitchFamily="18" charset="0"/>
+                              <a:ea typeface="Cambria Math" panose="02040503050406030204" pitchFamily="18" charset="0"/>
+                            </a:rPr>
+                            <m:t>∈</m:t>
+                          </m:r>
+                          <m:sSup>
+                            <m:sSupPr>
+                              <m:ctrlPr>
+                                <a:rPr lang="en-CA" sz="1400" b="0" i="1" smtClean="0">
+                                  <a:latin typeface="Cambria Math" panose="02040503050406030204" pitchFamily="18" charset="0"/>
+                                  <a:ea typeface="Cambria Math" panose="02040503050406030204" pitchFamily="18" charset="0"/>
+                                </a:rPr>
+                              </m:ctrlPr>
+                            </m:sSupPr>
+                            <m:e>
+                              <m:r>
+                                <a:rPr lang="en-CA" sz="1400" b="0" i="1" smtClean="0">
+                                  <a:latin typeface="Cambria Math" panose="02040503050406030204" pitchFamily="18" charset="0"/>
+                                  <a:ea typeface="Cambria Math" panose="02040503050406030204" pitchFamily="18" charset="0"/>
+                                </a:rPr>
+                                <m:t>𝐼</m:t>
+                              </m:r>
+                            </m:e>
+                            <m:sup>
+                              <m:r>
+                                <a:rPr lang="en-CA" sz="1400" b="0" i="1" smtClean="0">
+                                  <a:latin typeface="Cambria Math" panose="02040503050406030204" pitchFamily="18" charset="0"/>
+                                  <a:ea typeface="Cambria Math" panose="02040503050406030204" pitchFamily="18" charset="0"/>
+                                </a:rPr>
+                                <m:t>𝑐𝑜𝑚</m:t>
+                              </m:r>
+                            </m:sup>
+                          </m:sSup>
+                        </m:oMath>
+                      </m:oMathPara>
+                    </a14:m>
+                    <a:endParaRPr lang="en-US" sz="1400" dirty="0"/>
+                  </a:p>
+                </p:txBody>
+              </p:sp>
+            </mc:Choice>
+            <mc:Fallback xmlns="">
+              <p:sp>
+                <p:nvSpPr>
+                  <p:cNvPr id="40" name="TextBox 39">
+                    <a:extLst>
+                      <a:ext uri="{FF2B5EF4-FFF2-40B4-BE49-F238E27FC236}">
+                        <a16:creationId xmlns:a16="http://schemas.microsoft.com/office/drawing/2014/main" id="{D7059601-887E-900B-5223-85EE2ED193A1}"/>
+                      </a:ext>
+                    </a:extLst>
+                  </p:cNvPr>
+                  <p:cNvSpPr txBox="1">
+                    <a:spLocks noRot="1" noChangeAspect="1" noMove="1" noResize="1" noEditPoints="1" noAdjustHandles="1" noChangeArrowheads="1" noChangeShapeType="1" noTextEdit="1"/>
+                  </p:cNvSpPr>
+                  <p:nvPr/>
+                </p:nvSpPr>
+                <p:spPr>
+                  <a:xfrm>
+                    <a:off x="3903525" y="5833184"/>
+                    <a:ext cx="957955" cy="307777"/>
+                  </a:xfrm>
+                  <a:prstGeom prst="rect">
+                    <a:avLst/>
+                  </a:prstGeom>
+                  <a:blipFill>
+                    <a:blip r:embed="rId15"/>
+                    <a:stretch>
+                      <a:fillRect/>
+                    </a:stretch>
+                  </a:blipFill>
+                </p:spPr>
+                <p:txBody>
+                  <a:bodyPr/>
+                  <a:lstStyle/>
+                  <a:p>
+                    <a:r>
+                      <a:rPr lang="en-US">
+                        <a:noFill/>
+                      </a:rPr>
+                      <a:t> </a:t>
+                    </a:r>
+                  </a:p>
+                </p:txBody>
+              </p:sp>
+            </mc:Fallback>
+          </mc:AlternateContent>
+          <p:sp>
+            <p:nvSpPr>
+              <p:cNvPr id="41" name="TextBox 40">
+                <a:extLst>
+                  <a:ext uri="{FF2B5EF4-FFF2-40B4-BE49-F238E27FC236}">
+                    <a16:creationId xmlns:a16="http://schemas.microsoft.com/office/drawing/2014/main" id="{6AB51353-091E-7B9C-2C9D-9BC7D4DAFB5E}"/>
+                  </a:ext>
+                </a:extLst>
+              </p:cNvPr>
+              <p:cNvSpPr txBox="1"/>
+              <p:nvPr/>
+            </p:nvSpPr>
+            <p:spPr>
+              <a:xfrm>
+                <a:off x="3607974" y="5873881"/>
+                <a:ext cx="229550" cy="307777"/>
+              </a:xfrm>
+              <a:prstGeom prst="rect">
+                <a:avLst/>
+              </a:prstGeom>
+              <a:noFill/>
+            </p:spPr>
+            <p:txBody>
+              <a:bodyPr wrap="none" rtlCol="0">
+                <a:spAutoFit/>
+              </a:bodyPr>
+              <a:lstStyle/>
+              <a:p>
+                <a:r>
+                  <a:rPr lang="en-US" sz="1400" dirty="0"/>
+                  <a:t>,</a:t>
+                </a:r>
+              </a:p>
+            </p:txBody>
+          </p:sp>
+          <p:sp>
+            <p:nvSpPr>
+              <p:cNvPr id="42" name="TextBox 41">
+                <a:extLst>
+                  <a:ext uri="{FF2B5EF4-FFF2-40B4-BE49-F238E27FC236}">
+                    <a16:creationId xmlns:a16="http://schemas.microsoft.com/office/drawing/2014/main" id="{1C05ACB7-DDD7-4FD9-AECD-1438BCC85800}"/>
+                  </a:ext>
+                </a:extLst>
+              </p:cNvPr>
+              <p:cNvSpPr txBox="1"/>
+              <p:nvPr/>
+            </p:nvSpPr>
+            <p:spPr>
+              <a:xfrm>
+                <a:off x="2429318" y="5873881"/>
+                <a:ext cx="229550" cy="307777"/>
+              </a:xfrm>
+              <a:prstGeom prst="rect">
+                <a:avLst/>
+              </a:prstGeom>
+              <a:noFill/>
+            </p:spPr>
+            <p:txBody>
+              <a:bodyPr wrap="none" rtlCol="0">
+                <a:spAutoFit/>
+              </a:bodyPr>
+              <a:lstStyle/>
+              <a:p>
+                <a:r>
+                  <a:rPr lang="en-US" sz="1400" dirty="0"/>
+                  <a:t>,</a:t>
+                </a:r>
+              </a:p>
+            </p:txBody>
+          </p:sp>
+          <p:sp>
+            <p:nvSpPr>
+              <p:cNvPr id="43" name="Left Bracket 42">
+                <a:extLst>
+                  <a:ext uri="{FF2B5EF4-FFF2-40B4-BE49-F238E27FC236}">
+                    <a16:creationId xmlns:a16="http://schemas.microsoft.com/office/drawing/2014/main" id="{2BA823D6-558F-2F52-4216-820A76DC9247}"/>
+                  </a:ext>
+                </a:extLst>
+              </p:cNvPr>
+              <p:cNvSpPr/>
+              <p:nvPr/>
+            </p:nvSpPr>
+            <p:spPr>
+              <a:xfrm rot="10800000">
+                <a:off x="4861480" y="1643556"/>
+                <a:ext cx="243648" cy="2292873"/>
+              </a:xfrm>
+              <a:prstGeom prst="leftBracket">
+                <a:avLst/>
+              </a:prstGeom>
+              <a:ln w="19050"/>
+            </p:spPr>
+            <p:style>
+              <a:lnRef idx="1">
+                <a:schemeClr val="dk1"/>
+              </a:lnRef>
+              <a:fillRef idx="0">
+                <a:schemeClr val="dk1"/>
+              </a:fillRef>
+              <a:effectRef idx="0">
+                <a:schemeClr val="dk1"/>
+              </a:effectRef>
+              <a:fontRef idx="minor">
+                <a:schemeClr val="tx1"/>
+              </a:fontRef>
+            </p:style>
+            <p:txBody>
+              <a:bodyPr rtlCol="0" anchor="ctr"/>
+              <a:lstStyle/>
+              <a:p>
+                <a:pPr algn="ctr"/>
+                <a:endParaRPr lang="en-US" sz="1400"/>
+              </a:p>
+            </p:txBody>
+          </p:sp>
+          <mc:AlternateContent xmlns:mc="http://schemas.openxmlformats.org/markup-compatibility/2006">
+            <mc:Choice xmlns:a14="http://schemas.microsoft.com/office/drawing/2010/main" Requires="a14">
+              <p:sp>
+                <p:nvSpPr>
+                  <p:cNvPr id="44" name="TextBox 43">
+                    <a:extLst>
+                      <a:ext uri="{FF2B5EF4-FFF2-40B4-BE49-F238E27FC236}">
+                        <a16:creationId xmlns:a16="http://schemas.microsoft.com/office/drawing/2014/main" id="{6028B1B6-2C97-D37E-BC5A-285E6AADE771}"/>
+                      </a:ext>
+                    </a:extLst>
+                  </p:cNvPr>
+                  <p:cNvSpPr txBox="1"/>
+                  <p:nvPr/>
+                </p:nvSpPr>
+                <p:spPr>
+                  <a:xfrm>
+                    <a:off x="280314" y="574738"/>
+                    <a:ext cx="2100255" cy="897362"/>
+                  </a:xfrm>
+                  <a:prstGeom prst="rect">
+                    <a:avLst/>
+                  </a:prstGeom>
+                  <a:noFill/>
+                </p:spPr>
+                <p:txBody>
+                  <a:bodyPr wrap="none" rtlCol="0">
+                    <a:spAutoFit/>
+                  </a:bodyPr>
+                  <a:lstStyle/>
+                  <a:p>
+                    <a14:m>
+                      <m:oMath xmlns:m="http://schemas.openxmlformats.org/officeDocument/2006/math">
+                        <m:r>
+                          <a:rPr lang="en-CA" b="0" i="1" smtClean="0">
+                            <a:latin typeface="Cambria Math" panose="02040503050406030204" pitchFamily="18" charset="0"/>
+                          </a:rPr>
+                          <m:t>𝑚𝑎𝑥</m:t>
+                        </m:r>
+                        <m:r>
+                          <a:rPr lang="en-CA" b="0" i="1" smtClean="0">
+                            <a:latin typeface="Cambria Math" panose="02040503050406030204" pitchFamily="18" charset="0"/>
+                          </a:rPr>
+                          <m:t>/</m:t>
+                        </m:r>
+                        <m:r>
+                          <a:rPr lang="en-CA" b="0" i="1" smtClean="0">
+                            <a:latin typeface="Cambria Math" panose="02040503050406030204" pitchFamily="18" charset="0"/>
+                          </a:rPr>
+                          <m:t>𝑚𝑖𝑛</m:t>
+                        </m:r>
+                      </m:oMath>
+                    </a14:m>
+                    <a:r>
+                      <a:rPr lang="en-US" dirty="0"/>
+                      <a:t> </a:t>
+                    </a:r>
+                    <a14:m>
+                      <m:oMath xmlns:m="http://schemas.openxmlformats.org/officeDocument/2006/math">
+                        <m:nary>
+                          <m:naryPr>
+                            <m:chr m:val="∑"/>
+                            <m:supHide m:val="on"/>
+                            <m:ctrlPr>
+                              <a:rPr lang="en-US" i="1" dirty="0" smtClean="0">
+                                <a:latin typeface="Cambria Math" panose="02040503050406030204" pitchFamily="18" charset="0"/>
+                              </a:rPr>
+                            </m:ctrlPr>
+                          </m:naryPr>
+                          <m:sub>
+                            <m:eqArr>
+                              <m:eqArrPr>
+                                <m:ctrlPr>
+                                  <a:rPr lang="en-CA" b="0" i="1" dirty="0" smtClean="0">
+                                    <a:latin typeface="Cambria Math" panose="02040503050406030204" pitchFamily="18" charset="0"/>
+                                  </a:rPr>
+                                </m:ctrlPr>
+                              </m:eqArrPr>
+                              <m:e>
+                                <m:r>
+                                  <m:rPr>
+                                    <m:brk m:alnAt="7"/>
+                                  </m:rPr>
+                                  <a:rPr lang="en-CA" b="0" i="1" dirty="0" smtClean="0">
+                                    <a:latin typeface="Cambria Math" panose="02040503050406030204" pitchFamily="18" charset="0"/>
+                                  </a:rPr>
+                                  <m:t>𝑗</m:t>
+                                </m:r>
+                                <m:r>
+                                  <a:rPr lang="en-CA" b="0" i="1" dirty="0" smtClean="0">
+                                    <a:latin typeface="Cambria Math" panose="02040503050406030204" pitchFamily="18" charset="0"/>
+                                    <a:ea typeface="Cambria Math" panose="02040503050406030204" pitchFamily="18" charset="0"/>
+                                  </a:rPr>
+                                  <m:t>∈</m:t>
+                                </m:r>
+                                <m:sSup>
+                                  <m:sSupPr>
+                                    <m:ctrlPr>
+                                      <a:rPr lang="en-CA" b="0" i="1" dirty="0" smtClean="0">
+                                        <a:latin typeface="Cambria Math" panose="02040503050406030204" pitchFamily="18" charset="0"/>
+                                        <a:ea typeface="Cambria Math" panose="02040503050406030204" pitchFamily="18" charset="0"/>
+                                      </a:rPr>
+                                    </m:ctrlPr>
+                                  </m:sSupPr>
+                                  <m:e>
+                                    <m:r>
+                                      <a:rPr lang="en-CA" b="0" i="1" dirty="0" smtClean="0">
+                                        <a:latin typeface="Cambria Math" panose="02040503050406030204" pitchFamily="18" charset="0"/>
+                                        <a:ea typeface="Cambria Math" panose="02040503050406030204" pitchFamily="18" charset="0"/>
+                                      </a:rPr>
+                                      <m:t>𝐽</m:t>
+                                    </m:r>
+                                  </m:e>
+                                  <m:sup>
+                                    <m:r>
+                                      <a:rPr lang="en-CA" b="0" i="1" dirty="0" smtClean="0">
+                                        <a:latin typeface="Cambria Math" panose="02040503050406030204" pitchFamily="18" charset="0"/>
+                                        <a:ea typeface="Cambria Math" panose="02040503050406030204" pitchFamily="18" charset="0"/>
+                                      </a:rPr>
+                                      <m:t>𝑘</m:t>
+                                    </m:r>
+                                  </m:sup>
+                                </m:sSup>
+                              </m:e>
+                              <m:e>
+                                <m:r>
+                                  <a:rPr lang="en-CA" b="0" i="1" dirty="0" smtClean="0">
+                                    <a:latin typeface="Cambria Math" panose="02040503050406030204" pitchFamily="18" charset="0"/>
+                                    <a:ea typeface="Cambria Math" panose="02040503050406030204" pitchFamily="18" charset="0"/>
+                                  </a:rPr>
+                                  <m:t>𝑘</m:t>
+                                </m:r>
+                                <m:r>
+                                  <a:rPr lang="en-CA" b="0" i="1" dirty="0" smtClean="0">
+                                    <a:latin typeface="Cambria Math" panose="02040503050406030204" pitchFamily="18" charset="0"/>
+                                    <a:ea typeface="Cambria Math" panose="02040503050406030204" pitchFamily="18" charset="0"/>
+                                  </a:rPr>
+                                  <m:t>∈</m:t>
+                                </m:r>
+                                <m:r>
+                                  <a:rPr lang="en-CA" b="0" i="1" dirty="0" smtClean="0">
+                                    <a:latin typeface="Cambria Math" panose="02040503050406030204" pitchFamily="18" charset="0"/>
+                                    <a:ea typeface="Cambria Math" panose="02040503050406030204" pitchFamily="18" charset="0"/>
+                                  </a:rPr>
+                                  <m:t>𝐾</m:t>
+                                </m:r>
+                              </m:e>
+                            </m:eqArr>
+                          </m:sub>
+                          <m:sup/>
+                          <m:e>
+                            <m:sSubSup>
+                              <m:sSubSupPr>
+                                <m:ctrlPr>
+                                  <a:rPr lang="en-US" i="1" dirty="0" smtClean="0">
+                                    <a:latin typeface="Cambria Math" panose="02040503050406030204" pitchFamily="18" charset="0"/>
+                                  </a:rPr>
+                                </m:ctrlPr>
+                              </m:sSubSupPr>
+                              <m:e>
+                                <m:r>
+                                  <a:rPr lang="en-CA" b="0" i="1" dirty="0" smtClean="0">
+                                    <a:latin typeface="Cambria Math" panose="02040503050406030204" pitchFamily="18" charset="0"/>
+                                  </a:rPr>
+                                  <m:t>𝑉</m:t>
+                                </m:r>
+                              </m:e>
+                              <m:sub>
+                                <m:r>
+                                  <a:rPr lang="en-CA" b="0" i="1" dirty="0" smtClean="0">
+                                    <a:latin typeface="Cambria Math" panose="02040503050406030204" pitchFamily="18" charset="0"/>
+                                  </a:rPr>
+                                  <m:t>𝑗</m:t>
+                                </m:r>
+                              </m:sub>
+                              <m:sup>
+                                <m:r>
+                                  <a:rPr lang="en-CA" b="0" i="1" dirty="0" smtClean="0">
+                                    <a:latin typeface="Cambria Math" panose="02040503050406030204" pitchFamily="18" charset="0"/>
+                                  </a:rPr>
+                                  <m:t>𝑘</m:t>
+                                </m:r>
+                              </m:sup>
+                            </m:sSubSup>
+                          </m:e>
+                        </m:nary>
+                      </m:oMath>
+                    </a14:m>
+                    <a:r>
+                      <a:rPr lang="en-US" dirty="0"/>
+                      <a:t> </a:t>
+                    </a:r>
+                  </a:p>
+                  <a:p>
+                    <a:r>
+                      <a:rPr lang="en-US" dirty="0"/>
+                      <a:t>subject to</a:t>
+                    </a:r>
+                  </a:p>
+                </p:txBody>
+              </p:sp>
+            </mc:Choice>
+            <mc:Fallback>
+              <p:sp>
+                <p:nvSpPr>
+                  <p:cNvPr id="44" name="TextBox 43">
+                    <a:extLst>
+                      <a:ext uri="{FF2B5EF4-FFF2-40B4-BE49-F238E27FC236}">
+                        <a16:creationId xmlns:a16="http://schemas.microsoft.com/office/drawing/2014/main" id="{6028B1B6-2C97-D37E-BC5A-285E6AADE771}"/>
+                      </a:ext>
+                    </a:extLst>
+                  </p:cNvPr>
+                  <p:cNvSpPr txBox="1">
+                    <a:spLocks noRot="1" noChangeAspect="1" noMove="1" noResize="1" noEditPoints="1" noAdjustHandles="1" noChangeArrowheads="1" noChangeShapeType="1" noTextEdit="1"/>
+                  </p:cNvSpPr>
+                  <p:nvPr/>
+                </p:nvSpPr>
+                <p:spPr>
+                  <a:xfrm>
+                    <a:off x="280314" y="574738"/>
+                    <a:ext cx="2100255" cy="897362"/>
+                  </a:xfrm>
+                  <a:prstGeom prst="rect">
+                    <a:avLst/>
+                  </a:prstGeom>
+                  <a:blipFill>
+                    <a:blip r:embed="rId16"/>
+                    <a:stretch>
+                      <a:fillRect l="-2319" t="-46939" r="-6087" b="-20408"/>
+                    </a:stretch>
+                  </a:blipFill>
+                </p:spPr>
+                <p:txBody>
+                  <a:bodyPr/>
+                  <a:lstStyle/>
+                  <a:p>
+                    <a:r>
+                      <a:rPr lang="en-IN">
+                        <a:noFill/>
+                      </a:rPr>
+                      <a:t> </a:t>
+                    </a:r>
+                  </a:p>
+                </p:txBody>
+              </p:sp>
+            </mc:Fallback>
+          </mc:AlternateContent>
+          <p:sp>
+            <p:nvSpPr>
+              <p:cNvPr id="45" name="Left Bracket 44">
+                <a:extLst>
+                  <a:ext uri="{FF2B5EF4-FFF2-40B4-BE49-F238E27FC236}">
+                    <a16:creationId xmlns:a16="http://schemas.microsoft.com/office/drawing/2014/main" id="{6F615FF1-C495-BAA6-522E-4945482E55E1}"/>
+                  </a:ext>
+                </a:extLst>
+              </p:cNvPr>
+              <p:cNvSpPr/>
+              <p:nvPr/>
+            </p:nvSpPr>
+            <p:spPr>
+              <a:xfrm>
+                <a:off x="1788037" y="1643557"/>
+                <a:ext cx="167313" cy="2358993"/>
+              </a:xfrm>
+              <a:prstGeom prst="leftBracket">
+                <a:avLst/>
+              </a:prstGeom>
+              <a:ln w="19050"/>
+            </p:spPr>
+            <p:style>
+              <a:lnRef idx="1">
+                <a:schemeClr val="dk1"/>
+              </a:lnRef>
+              <a:fillRef idx="0">
+                <a:schemeClr val="dk1"/>
+              </a:fillRef>
+              <a:effectRef idx="0">
+                <a:schemeClr val="dk1"/>
+              </a:effectRef>
+              <a:fontRef idx="minor">
+                <a:schemeClr val="tx1"/>
+              </a:fontRef>
+            </p:style>
+            <p:txBody>
+              <a:bodyPr rtlCol="0" anchor="ctr"/>
+              <a:lstStyle/>
+              <a:p>
+                <a:pPr algn="ctr"/>
+                <a:endParaRPr lang="en-US" sz="1400"/>
+              </a:p>
+            </p:txBody>
+          </p:sp>
         </p:grpSp>
         <mc:AlternateContent xmlns:mc="http://schemas.openxmlformats.org/markup-compatibility/2006">
           <mc:Choice xmlns:a14="http://schemas.microsoft.com/office/drawing/2010/main" Requires="a14">
@@ -6322,7 +6133,7 @@
               <p:spPr>
                 <a:xfrm>
                   <a:off x="7976060" y="5668681"/>
-                  <a:ext cx="1055674" cy="333105"/>
+                  <a:ext cx="966803" cy="311560"/>
                 </a:xfrm>
                 <a:prstGeom prst="rect">
                   <a:avLst/>
@@ -6337,77 +6148,78 @@
                 <a:p>
                   <a:pPr/>
                   <a14:m>
-                    <m:oMathPara xmlns:m="http://schemas.openxmlformats.org/officeDocument/2006/math">
-                      <m:oMathParaPr>
-                        <m:jc m:val="centerGroup"/>
-                      </m:oMathParaPr>
-                      <m:oMath xmlns:m="http://schemas.openxmlformats.org/officeDocument/2006/math">
-                        <m:sSup>
-                          <m:sSupPr>
-                            <m:ctrlPr>
-                              <a:rPr lang="en-US" sz="1400" i="1" smtClean="0">
-                                <a:latin typeface="Cambria Math" panose="02040503050406030204" pitchFamily="18" charset="0"/>
-                              </a:rPr>
-                            </m:ctrlPr>
-                          </m:sSupPr>
-                          <m:e>
-                            <m:r>
-                              <a:rPr lang="en-CA" sz="1400" b="0" i="1" smtClean="0">
-                                <a:latin typeface="Cambria Math" panose="02040503050406030204" pitchFamily="18" charset="0"/>
-                              </a:rPr>
-                              <m:t>𝑋</m:t>
-                            </m:r>
-                          </m:e>
-                          <m:sup>
-                            <m:r>
-                              <a:rPr lang="en-CA" sz="1400" b="0" i="1" smtClean="0">
-                                <a:latin typeface="Cambria Math" panose="02040503050406030204" pitchFamily="18" charset="0"/>
-                              </a:rPr>
-                              <m:t>𝑘</m:t>
-                            </m:r>
-                          </m:sup>
-                        </m:sSup>
-                        <m:r>
-                          <a:rPr lang="en-CA" sz="1400" b="0" i="1" smtClean="0">
-                            <a:latin typeface="Cambria Math" panose="02040503050406030204" pitchFamily="18" charset="0"/>
-                          </a:rPr>
-                          <m:t>= </m:t>
-                        </m:r>
-                        <m:sSubSup>
-                          <m:sSubSupPr>
-                            <m:ctrlPr>
-                              <a:rPr lang="en-CA" sz="1400" b="0" i="1" smtClean="0">
-                                <a:latin typeface="Cambria Math" panose="02040503050406030204" pitchFamily="18" charset="0"/>
-                              </a:rPr>
-                            </m:ctrlPr>
-                          </m:sSubSupPr>
-                          <m:e>
-                            <m:r>
-                              <a:rPr lang="en-CA" sz="1400" b="0" i="1" smtClean="0">
-                                <a:latin typeface="Cambria Math" panose="02040503050406030204" pitchFamily="18" charset="0"/>
-                              </a:rPr>
-                              <m:t>𝑋</m:t>
-                            </m:r>
-                          </m:e>
-                          <m:sub>
-                            <m:r>
-                              <a:rPr lang="en-CA" sz="1400" b="0" i="1" smtClean="0">
-                                <a:latin typeface="Cambria Math" panose="02040503050406030204" pitchFamily="18" charset="0"/>
-                              </a:rPr>
-                              <m:t>𝑒𝑥𝑝</m:t>
-                            </m:r>
-                          </m:sub>
-                          <m:sup>
-                            <m:r>
-                              <a:rPr lang="en-CA" sz="1400" b="0" i="1" smtClean="0">
-                                <a:latin typeface="Cambria Math" panose="02040503050406030204" pitchFamily="18" charset="0"/>
-                              </a:rPr>
-                              <m:t>𝑘</m:t>
-                            </m:r>
-                          </m:sup>
-                        </m:sSubSup>
-                      </m:oMath>
-                    </m:oMathPara>
+                    <m:oMath xmlns:m="http://schemas.openxmlformats.org/officeDocument/2006/math">
+                      <m:sSup>
+                        <m:sSupPr>
+                          <m:ctrlPr>
+                            <a:rPr lang="en-US" sz="1400" i="1" smtClean="0">
+                              <a:latin typeface="Cambria Math" panose="02040503050406030204" pitchFamily="18" charset="0"/>
+                            </a:rPr>
+                          </m:ctrlPr>
+                        </m:sSupPr>
+                        <m:e>
+                          <m:r>
+                            <a:rPr lang="en-CA" sz="1400" b="0" i="1" smtClean="0">
+                              <a:latin typeface="Cambria Math" panose="02040503050406030204" pitchFamily="18" charset="0"/>
+                            </a:rPr>
+                            <m:t>𝑋</m:t>
+                          </m:r>
+                        </m:e>
+                        <m:sup>
+                          <m:r>
+                            <a:rPr lang="en-CA" sz="1400" b="0" i="1" smtClean="0">
+                              <a:latin typeface="Cambria Math" panose="02040503050406030204" pitchFamily="18" charset="0"/>
+                            </a:rPr>
+                            <m:t>𝑘</m:t>
+                          </m:r>
+                        </m:sup>
+                      </m:sSup>
+                      <m:r>
+                        <a:rPr lang="en-CA" sz="1400" b="0" i="1" smtClean="0">
+                          <a:latin typeface="Cambria Math" panose="02040503050406030204" pitchFamily="18" charset="0"/>
+                        </a:rPr>
+                        <m:t>=</m:t>
+                      </m:r>
+                    </m:oMath>
+                  </a14:m>
+                  <a:r>
+                    <a:rPr lang="en-US" sz="1400" dirty="0" smtClean="0"/>
+                    <a:t> </a:t>
+                  </a:r>
+                  <a14:m>
+                    <m:oMath xmlns:m="http://schemas.openxmlformats.org/officeDocument/2006/math">
+                      <m:sSup>
+                        <m:sSupPr>
+                          <m:ctrlPr>
+                            <a:rPr lang="en-US" sz="1400" i="1">
+                              <a:latin typeface="Cambria Math" panose="02040503050406030204" pitchFamily="18" charset="0"/>
+                            </a:rPr>
+                          </m:ctrlPr>
+                        </m:sSupPr>
+                        <m:e>
+                          <m:r>
+                            <a:rPr lang="en-CA" sz="1400" i="1">
+                              <a:latin typeface="Cambria Math" panose="02040503050406030204" pitchFamily="18" charset="0"/>
+                            </a:rPr>
+                            <m:t>𝑋</m:t>
+                          </m:r>
+                        </m:e>
+                        <m:sup>
+                          <m:r>
+                            <a:rPr lang="en-CA" sz="1400" i="1">
+                              <a:latin typeface="Cambria Math" panose="02040503050406030204" pitchFamily="18" charset="0"/>
+                            </a:rPr>
+                            <m:t>𝑘</m:t>
+                          </m:r>
+                          <m:r>
+                            <a:rPr lang="en-IN" sz="1400" b="0" i="1" smtClean="0">
+                              <a:latin typeface="Cambria Math" panose="02040503050406030204" pitchFamily="18" charset="0"/>
+                            </a:rPr>
+                            <m:t>∗</m:t>
+                          </m:r>
+                        </m:sup>
+                      </m:sSup>
+                    </m:oMath>
                   </a14:m>
                   <a:endParaRPr lang="en-US" sz="1400" dirty="0"/>
                 </a:p>
@@ -6432,15 +6244,15 @@
               <p:spPr>
                 <a:xfrm>
                   <a:off x="7976060" y="5668681"/>
-                  <a:ext cx="1055674" cy="333105"/>
+                  <a:ext cx="966803" cy="311560"/>
                 </a:xfrm>
                 <a:prstGeom prst="rect">
                   <a:avLst/>
                 </a:prstGeom>
                 <a:blipFill>
-                  <a:blip r:embed="rId18"/>
+                  <a:blip r:embed="rId17"/>
                   <a:stretch>
-                    <a:fillRect b="-3704"/>
+                    <a:fillRect/>
                   </a:stretch>
                 </a:blipFill>
               </p:spPr>
@@ -6449,7 +6261,7 @@
                 <a:lstStyle/>
                 <a:p>
                   <a:r>
-                    <a:rPr lang="en-US">
+                    <a:rPr lang="en-IN">
                       <a:noFill/>
                     </a:rPr>
                     <a:t> </a:t>
@@ -6655,9 +6467,9 @@
           </a:fontRef>
         </p:style>
       </p:cxnSp>
-      <mc:AlternateContent xmlns:mc="http://schemas.openxmlformats.org/markup-compatibility/2006">
-        <mc:Choice xmlns:p14="http://schemas.microsoft.com/office/powerpoint/2010/main" Requires="p14">
-          <p:contentPart p14:bwMode="auto" r:id="rId19">
+      <mc:AlternateContent xmlns:mc="http://schemas.openxmlformats.org/markup-compatibility/2006" xmlns:p14="http://schemas.microsoft.com/office/powerpoint/2010/main">
+        <mc:Choice Requires="p14">
+          <p:contentPart p14:bwMode="auto" r:id="rId18">
             <p14:nvContentPartPr>
               <p14:cNvPr id="61" name="Ink 60">
                 <a:extLst>
@@ -6675,7 +6487,7 @@
             </p14:xfrm>
           </p:contentPart>
         </mc:Choice>
-        <mc:Fallback>
+        <mc:Fallback xmlns="">
           <p:pic>
             <p:nvPicPr>
               <p:cNvPr id="61" name="Ink 60">
@@ -6704,6 +6516,177 @@
               </a:prstGeom>
             </p:spPr>
           </p:pic>
+        </mc:Fallback>
+      </mc:AlternateContent>
+      <mc:AlternateContent xmlns:mc="http://schemas.openxmlformats.org/markup-compatibility/2006">
+        <mc:Choice xmlns:p14="http://schemas.microsoft.com/office/powerpoint/2010/main" Requires="p14">
+          <p:contentPart p14:bwMode="auto" r:id="rId21">
+            <p14:nvContentPartPr>
+              <p14:cNvPr id="9" name="Ink 8"/>
+              <p14:cNvContentPartPr/>
+              <p14:nvPr/>
+            </p14:nvContentPartPr>
+            <p14:xfrm>
+              <a:off x="12765261" y="1367145"/>
+              <a:ext cx="360" cy="360"/>
+            </p14:xfrm>
+          </p:contentPart>
+        </mc:Choice>
+        <mc:Fallback>
+          <p:pic>
+            <p:nvPicPr>
+              <p:cNvPr id="9" name="Ink 8"/>
+              <p:cNvPicPr/>
+              <p:nvPr/>
+            </p:nvPicPr>
+            <p:blipFill>
+              <a:blip r:embed="rId22"/>
+              <a:stretch>
+                <a:fillRect/>
+              </a:stretch>
+            </p:blipFill>
+            <p:spPr>
+              <a:xfrm>
+                <a:off x="12753381" y="1355265"/>
+                <a:ext cx="24120" cy="24120"/>
+              </a:xfrm>
+              <a:prstGeom prst="rect">
+                <a:avLst/>
+              </a:prstGeom>
+            </p:spPr>
+          </p:pic>
+        </mc:Fallback>
+      </mc:AlternateContent>
+      <mc:AlternateContent xmlns:mc="http://schemas.openxmlformats.org/markup-compatibility/2006">
+        <mc:Choice xmlns:a14="http://schemas.microsoft.com/office/drawing/2010/main" Requires="a14">
+          <p:sp>
+            <p:nvSpPr>
+              <p:cNvPr id="46" name="TextBox 45">
+                <a:extLst>
+                  <a:ext uri="{FF2B5EF4-FFF2-40B4-BE49-F238E27FC236}">
+                    <a16:creationId xmlns:a16="http://schemas.microsoft.com/office/drawing/2014/main" id="{5F23B830-96C0-3E72-D86A-4DB704C3EAB0}"/>
+                  </a:ext>
+                </a:extLst>
+              </p:cNvPr>
+              <p:cNvSpPr txBox="1"/>
+              <p:nvPr/>
+            </p:nvSpPr>
+            <p:spPr>
+              <a:xfrm>
+                <a:off x="7568622" y="5196089"/>
+                <a:ext cx="4164670" cy="527004"/>
+              </a:xfrm>
+              <a:prstGeom prst="rect">
+                <a:avLst/>
+              </a:prstGeom>
+              <a:noFill/>
+            </p:spPr>
+            <p:txBody>
+              <a:bodyPr wrap="square" rtlCol="0">
+                <a:spAutoFit/>
+              </a:bodyPr>
+              <a:lstStyle/>
+              <a:p>
+                <a:pPr/>
+                <a:r>
+                  <a:rPr lang="en-US" sz="1400" dirty="0" smtClean="0"/>
+                  <a:t>Here </a:t>
+                </a:r>
+                <a14:m>
+                  <m:oMath xmlns:m="http://schemas.openxmlformats.org/officeDocument/2006/math">
+                    <m:sSup>
+                      <m:sSupPr>
+                        <m:ctrlPr>
+                          <a:rPr lang="en-US" sz="1400" i="1">
+                            <a:latin typeface="Cambria Math" panose="02040503050406030204" pitchFamily="18" charset="0"/>
+                          </a:rPr>
+                        </m:ctrlPr>
+                      </m:sSupPr>
+                      <m:e>
+                        <m:r>
+                          <a:rPr lang="en-CA" sz="1400" i="1">
+                            <a:latin typeface="Cambria Math" panose="02040503050406030204" pitchFamily="18" charset="0"/>
+                          </a:rPr>
+                          <m:t>𝑋</m:t>
+                        </m:r>
+                      </m:e>
+                      <m:sup>
+                        <m:r>
+                          <a:rPr lang="en-CA" sz="1400" i="1">
+                            <a:latin typeface="Cambria Math" panose="02040503050406030204" pitchFamily="18" charset="0"/>
+                          </a:rPr>
+                          <m:t>𝑘</m:t>
+                        </m:r>
+                        <m:r>
+                          <a:rPr lang="en-IN" sz="1400" b="0" i="1" smtClean="0">
+                            <a:latin typeface="Cambria Math" panose="02040503050406030204" pitchFamily="18" charset="0"/>
+                          </a:rPr>
+                          <m:t>∗</m:t>
+                        </m:r>
+                      </m:sup>
+                    </m:sSup>
+                  </m:oMath>
+                </a14:m>
+                <a:r>
+                  <a:rPr lang="en-US" sz="1400" dirty="0" smtClean="0"/>
+                  <a:t> refers to the value obtained in </a:t>
+                </a:r>
+                <a:r>
+                  <a:rPr lang="en-US" sz="1400" dirty="0" err="1" smtClean="0"/>
+                  <a:t>metagutpred</a:t>
+                </a:r>
+                <a:r>
+                  <a:rPr lang="en-US" sz="1400" dirty="0" smtClean="0"/>
+                  <a:t> simulation</a:t>
+                </a:r>
+                <a:endParaRPr lang="en-US" sz="1400" dirty="0"/>
+              </a:p>
+            </p:txBody>
+          </p:sp>
+        </mc:Choice>
+        <mc:Fallback>
+          <p:sp>
+            <p:nvSpPr>
+              <p:cNvPr id="46" name="TextBox 45">
+                <a:extLst>
+                  <a:ext uri="{FF2B5EF4-FFF2-40B4-BE49-F238E27FC236}">
+                    <a16:creationId xmlns:a16="http://schemas.microsoft.com/office/drawing/2014/main" id="{5F23B830-96C0-3E72-D86A-4DB704C3EAB0}"/>
+                  </a:ext>
+                </a:extLst>
+              </p:cNvPr>
+              <p:cNvSpPr txBox="1">
+                <a:spLocks noRot="1" noChangeAspect="1" noMove="1" noResize="1" noEditPoints="1" noAdjustHandles="1" noChangeArrowheads="1" noChangeShapeType="1" noTextEdit="1"/>
+              </p:cNvSpPr>
+              <p:nvPr/>
+            </p:nvSpPr>
+            <p:spPr>
+              <a:xfrm>
+                <a:off x="7568622" y="5196089"/>
+                <a:ext cx="4164670" cy="527004"/>
+              </a:xfrm>
+              <a:prstGeom prst="rect">
+                <a:avLst/>
+              </a:prstGeom>
+              <a:blipFill>
+                <a:blip r:embed="rId23"/>
+                <a:stretch>
+                  <a:fillRect l="-439" r="-878" b="-11494"/>
+                </a:stretch>
+              </a:blipFill>
+            </p:spPr>
+            <p:txBody>
+              <a:bodyPr/>
+              <a:lstStyle/>
+              <a:p>
+                <a:r>
+                  <a:rPr lang="en-IN">
+                    <a:noFill/>
+                  </a:rPr>
+                  <a:t> </a:t>
+                </a:r>
+              </a:p>
+            </p:txBody>
+          </p:sp>
         </mc:Fallback>
       </mc:AlternateContent>
     </p:spTree>
